--- a/slides/Session 3 - Put a Model Inside It.pptx
+++ b/slides/Session 3 - Put a Model Inside It.pptx
@@ -27,9 +27,11 @@
     <p:sldId id="275" r:id="rId21"/>
     <p:sldId id="276" r:id="rId22"/>
     <p:sldId id="277" r:id="rId23"/>
+    <p:sldId id="278" r:id="rId24"/>
+    <p:sldId id="279" r:id="rId25"/>
   </p:sldIdLst>
   <p:notesMasterIdLst>
-    <p:notesMasterId r:id="rId24"/>
+    <p:notesMasterId r:id="rId26"/>
   </p:notesMasterIdLst>
   <p:sldSz cx="12192000" cy="6858000"/>
   <p:notesSz cx="6858000" cy="12192000"/>
@@ -699,7 +701,7 @@
           <a:p>
             <a:r>
               <a:rPr lang="en-US" dirty="0"/>
-              <a:t>Few-shot prompting: simultaneously the most useful trick in the box and the most over-used. Both halves get said here.</a:t>
+              <a:t>The order here is the lesson. Most people reach for a clever prompting trick before they have any way to tell whether it helped — so evaluation comes first, and few-shot arrives afterwards as one intervention among several.</a:t>
             </a:r>
             <a:endParaRPr lang="en-US" dirty="0"/>
           </a:p>
@@ -787,7 +789,7 @@
           <a:p>
             <a:r>
               <a:rPr lang="en-US" dirty="0"/>
-              <a:t>The second example is the important one and it is the one nobody writes. Most people show the model three successes and then wonder why it never admits defeat.</a:t>
+              <a:t>Give them the word for something they have already done. They ran score() in checkpoint 4 without being told it was an evaluation. The fourth bullet is the one that reaches their own projects: the roommate and carpool briefs all want an explanation back, and an explanation cannot be marked against a key — so you mark properties instead. That idea has a name, a rubric, and they will meet it again.</a:t>
             </a:r>
             <a:endParaRPr lang="en-US" dirty="0"/>
           </a:p>
@@ -875,7 +877,7 @@
           <a:p>
             <a:r>
               <a:rPr lang="en-US" dirty="0"/>
-              <a:t>The honest position, and the one that separates people who have shipped from people who have read a blog post. Few-shot is a fix for a measured problem, not a default ingredient you sprinkle on everything.</a:t>
+              <a:t>Every number on this slide is measured, not invented — run naive_parser over inbox.json and you get exactly this. Spend the time on msg-07: the parser dropped both hot americanos because “(hot)” broke its pattern, kept the croissants, filled every field and flagged nothing. Ryan pays for three croissants and gets no coffee. Then make the point about the zero: no false alarms sounds like good news and is not, because it came with an escape. If you never cry wolf you are not looking hard enough. Ask which cell they would rather be in, and why a café should choose differently from a hospital or a bank.</a:t>
             </a:r>
             <a:endParaRPr lang="en-US" dirty="0"/>
           </a:p>
@@ -963,7 +965,7 @@
           <a:p>
             <a:r>
               <a:rPr lang="en-US" dirty="0"/>
-              <a:t>This is how the prompts in PROMPTS.md were written, including the ones they will paste today. Hammer the one-change-at-a-time rule: change three lines and a better score tells you nothing about which one earned it.</a:t>
+              <a:t>The second example is the important one and it is the one nobody writes. Most people show the model three successes and then wonder why it never admits defeat.</a:t>
             </a:r>
             <a:endParaRPr lang="en-US" dirty="0"/>
           </a:p>
@@ -1051,7 +1053,7 @@
           <a:p>
             <a:r>
               <a:rPr lang="en-US" dirty="0"/>
-              <a:t>Fresh copy of the template, called lab3-practice — not their group project. A failed experiment here must not touch the app they demo in two hours. Full brief is in labs/LAB3.md.</a:t>
+              <a:t>The honest position, and the one that separates people who have shipped from people who have read a blog post. Few-shot is a fix for a measured problem, not a default ingredient you sprinkle on everything.</a:t>
             </a:r>
             <a:endParaRPr lang="en-US" dirty="0"/>
           </a:p>
@@ -1139,7 +1141,7 @@
           <a:p>
             <a:r>
               <a:rPr lang="en-US" dirty="0"/>
-              <a:t>Checkpoint 1 is the one to protect when time gets tight. They must feel the old way fail before the new way means anything — skip it and the rest is just typing someone else's code.</a:t>
+              <a:t>This is how the prompts in PROMPTS.md were written, including the ones they will paste today. Hammer the one-change-at-a-time rule: change three lines and a better score tells you nothing about which one earned it.</a:t>
             </a:r>
             <a:endParaRPr lang="en-US" dirty="0"/>
           </a:p>
@@ -1227,7 +1229,7 @@
           <a:p>
             <a:r>
               <a:rPr lang="en-US" dirty="0"/>
-              <a:t>This is the real assignment of the lecture, and it is what separates a good log entry from a weak one. Winning looks like a measured before-and-after, not a prompt that sounds more impressive.</a:t>
+              <a:t>Fresh copy of the template, called lab3-practice — not their group project. A failed experiment here must not touch the app they demo in two hours. Full brief is in labs/LAB3.md.</a:t>
             </a:r>
             <a:endParaRPr lang="en-US" dirty="0"/>
           </a:p>
@@ -1315,7 +1317,7 @@
           <a:p>
             <a:r>
               <a:rPr lang="en-US" dirty="0"/>
-              <a:t>Optional but strongly encouraged. Say the stop rule out loud before they start: when the clock runs out they stop and demo what works, and nobody is penalised for it.</a:t>
+              <a:t>Checkpoint 1 is the one to protect when time gets tight. They must feel the old way fail before the new way means anything — skip it and the rest is just typing someone else's code.</a:t>
             </a:r>
             <a:endParaRPr lang="en-US" dirty="0"/>
           </a:p>
@@ -1403,7 +1405,7 @@
           <a:p>
             <a:r>
               <a:rPr lang="en-US" dirty="0"/>
-              <a:t>Copy llm.py across, write their own schema, wire it to one page. Repeat the rule: a working project without the feature beats a broken one with it, and it always will.</a:t>
+              <a:t>This is the real assignment of the lecture, and it is what separates a good log entry from a weak one. Winning looks like a measured before-and-after, not a prompt that sounds more impressive.</a:t>
             </a:r>
             <a:endParaRPr lang="en-US" dirty="0"/>
           </a:p>
@@ -1579,7 +1581,7 @@
           <a:p>
             <a:r>
               <a:rPr lang="en-US" dirty="0"/>
-              <a:t>Science fair, not lectures — this is why fifteen groups fit in forty-five minutes. The peer form asks what each team ADDED, which is where the twist and the stretch goals earn their marks.</a:t>
+              <a:t>Optional but strongly encouraged. Say the stop rule out loud before they start: when the clock runs out they stop and demo what works, and nobody is penalised for it.</a:t>
             </a:r>
             <a:endParaRPr lang="en-US" dirty="0"/>
           </a:p>
@@ -1667,7 +1669,7 @@
           <a:p>
             <a:r>
               <a:rPr lang="en-US" dirty="0"/>
-              <a:t>The photograph slide. Pause on it, and let the room actually take the picture before moving to the closing.</a:t>
+              <a:t>Copy llm.py across, write their own schema, wire it to one page. Repeat the rule: a working project without the feature beats a broken one with it, and it always will.</a:t>
             </a:r>
             <a:endParaRPr lang="en-US" dirty="0"/>
           </a:p>
@@ -1755,7 +1757,7 @@
           <a:p>
             <a:r>
               <a:rPr lang="en-US" dirty="0"/>
-              <a:t>Leave it up through the demos and questions. The last line is the one to say out loud: none of this needed a budget, an approval, or a licence — which means nothing is stopping them building the next one on Monday.</a:t>
+              <a:t>Science fair, not lectures — this is why fifteen groups fit in forty-five minutes. The peer form asks what each team ADDED, which is where the twist and the stretch goals earn their marks.</a:t>
             </a:r>
             <a:endParaRPr lang="en-US" dirty="0"/>
           </a:p>
@@ -1779,6 +1781,182 @@
             <a:fld id="{F7021451-1387-4CA6-816F-3879F97B5CBC}" type="slidenum">
               <a:rPr lang="en-US"/>
               <a:t>22</a:t>
+            </a:fld>
+            <a:endParaRPr lang="en-US"/>
+          </a:p>
+        </p:txBody>
+      </p:sp>
+    </p:spTree>
+    <p:extLst>
+      <p:ext uri="{BB962C8B-B14F-4D97-AF65-F5344CB8AC3E}">
+        <p14:creationId xmlns:p14="http://schemas.microsoft.com/office/powerpoint/2010/main" val="1024086991"/>
+      </p:ext>
+    </p:extLst>
+  </p:cSld>
+  <p:clrMapOvr>
+    <a:masterClrMapping/>
+  </p:clrMapOvr>
+</p:notes>
+</file>
+
+<file path=ppt/notesSlides/notesSlide23.xml><?xml version="1.0" encoding="utf-8"?>
+<p:notes xmlns:a="http://schemas.openxmlformats.org/drawingml/2006/main" xmlns:r="http://schemas.openxmlformats.org/officeDocument/2006/relationships" xmlns:p="http://schemas.openxmlformats.org/presentationml/2006/main">
+  <p:cSld>
+    <p:spTree>
+      <p:nvGrpSpPr>
+        <p:cNvPr id="1" name=""/>
+        <p:cNvGrpSpPr/>
+        <p:nvPr/>
+      </p:nvGrpSpPr>
+      <p:grpSpPr>
+        <a:xfrm>
+          <a:off x="0" y="0"/>
+          <a:ext cx="0" cy="0"/>
+          <a:chOff x="0" y="0"/>
+          <a:chExt cx="0" cy="0"/>
+        </a:xfrm>
+      </p:grpSpPr>
+      <p:sp>
+        <p:nvSpPr>
+          <p:cNvPr id="2" name="Slide Image Placeholder 1"/>
+          <p:cNvSpPr>
+            <a:spLocks noGrp="1" noRot="1" noChangeAspect="1"/>
+          </p:cNvSpPr>
+          <p:nvPr>
+            <p:ph type="sldImg"/>
+          </p:nvPr>
+        </p:nvSpPr>
+        <p:spPr/>
+      </p:sp>
+      <p:sp>
+        <p:nvSpPr>
+          <p:cNvPr id="3" name="Notes Placeholder 2"/>
+          <p:cNvSpPr>
+            <a:spLocks noGrp="1"/>
+          </p:cNvSpPr>
+          <p:nvPr>
+            <p:ph type="body" idx="1"/>
+          </p:nvPr>
+        </p:nvSpPr>
+        <p:spPr/>
+        <p:txBody>
+          <a:bodyPr/>
+          <a:lstStyle/>
+          <a:p>
+            <a:r>
+              <a:rPr lang="en-US" dirty="0"/>
+              <a:t>The photograph slide. Pause on it, and let the room actually take the picture before moving to the closing.</a:t>
+            </a:r>
+            <a:endParaRPr lang="en-US" dirty="0"/>
+          </a:p>
+        </p:txBody>
+      </p:sp>
+      <p:sp>
+        <p:nvSpPr>
+          <p:cNvPr id="4" name="Slide Number Placeholder 3"/>
+          <p:cNvSpPr>
+            <a:spLocks noGrp="1"/>
+          </p:cNvSpPr>
+          <p:nvPr>
+            <p:ph type="sldNum" sz="quarter" idx="10"/>
+          </p:nvPr>
+        </p:nvSpPr>
+        <p:spPr/>
+        <p:txBody>
+          <a:bodyPr/>
+          <a:lstStyle/>
+          <a:p>
+            <a:fld id="{F7021451-1387-4CA6-816F-3879F97B5CBC}" type="slidenum">
+              <a:rPr lang="en-US"/>
+              <a:t>23</a:t>
+            </a:fld>
+            <a:endParaRPr lang="en-US"/>
+          </a:p>
+        </p:txBody>
+      </p:sp>
+    </p:spTree>
+    <p:extLst>
+      <p:ext uri="{BB962C8B-B14F-4D97-AF65-F5344CB8AC3E}">
+        <p14:creationId xmlns:p14="http://schemas.microsoft.com/office/powerpoint/2010/main" val="1024086991"/>
+      </p:ext>
+    </p:extLst>
+  </p:cSld>
+  <p:clrMapOvr>
+    <a:masterClrMapping/>
+  </p:clrMapOvr>
+</p:notes>
+</file>
+
+<file path=ppt/notesSlides/notesSlide24.xml><?xml version="1.0" encoding="utf-8"?>
+<p:notes xmlns:a="http://schemas.openxmlformats.org/drawingml/2006/main" xmlns:r="http://schemas.openxmlformats.org/officeDocument/2006/relationships" xmlns:p="http://schemas.openxmlformats.org/presentationml/2006/main">
+  <p:cSld>
+    <p:spTree>
+      <p:nvGrpSpPr>
+        <p:cNvPr id="1" name=""/>
+        <p:cNvGrpSpPr/>
+        <p:nvPr/>
+      </p:nvGrpSpPr>
+      <p:grpSpPr>
+        <a:xfrm>
+          <a:off x="0" y="0"/>
+          <a:ext cx="0" cy="0"/>
+          <a:chOff x="0" y="0"/>
+          <a:chExt cx="0" cy="0"/>
+        </a:xfrm>
+      </p:grpSpPr>
+      <p:sp>
+        <p:nvSpPr>
+          <p:cNvPr id="2" name="Slide Image Placeholder 1"/>
+          <p:cNvSpPr>
+            <a:spLocks noGrp="1" noRot="1" noChangeAspect="1"/>
+          </p:cNvSpPr>
+          <p:nvPr>
+            <p:ph type="sldImg"/>
+          </p:nvPr>
+        </p:nvSpPr>
+        <p:spPr/>
+      </p:sp>
+      <p:sp>
+        <p:nvSpPr>
+          <p:cNvPr id="3" name="Notes Placeholder 2"/>
+          <p:cNvSpPr>
+            <a:spLocks noGrp="1"/>
+          </p:cNvSpPr>
+          <p:nvPr>
+            <p:ph type="body" idx="1"/>
+          </p:nvPr>
+        </p:nvSpPr>
+        <p:spPr/>
+        <p:txBody>
+          <a:bodyPr/>
+          <a:lstStyle/>
+          <a:p>
+            <a:r>
+              <a:rPr lang="en-US" dirty="0"/>
+              <a:t>Leave it up through the demos and questions. The last line is the one to say out loud: none of this needed a budget, an approval, or a licence — which means nothing is stopping them building the next one on Monday.</a:t>
+            </a:r>
+            <a:endParaRPr lang="en-US" dirty="0"/>
+          </a:p>
+        </p:txBody>
+      </p:sp>
+      <p:sp>
+        <p:nvSpPr>
+          <p:cNvPr id="4" name="Slide Number Placeholder 3"/>
+          <p:cNvSpPr>
+            <a:spLocks noGrp="1"/>
+          </p:cNvSpPr>
+          <p:nvPr>
+            <p:ph type="sldNum" sz="quarter" idx="10"/>
+          </p:nvPr>
+        </p:nvSpPr>
+        <p:spPr/>
+        <p:txBody>
+          <a:bodyPr/>
+          <a:lstStyle/>
+          <a:p>
+            <a:fld id="{F7021451-1387-4CA6-816F-3879F97B5CBC}" type="slidenum">
+              <a:rPr lang="en-US"/>
+              <a:t>24</a:t>
             </a:fld>
             <a:endParaRPr lang="en-US"/>
           </a:p>
@@ -3708,7 +3886,7 @@
                 <a:ea typeface="Libre Franklin" pitchFamily="34" charset="-122"/>
                 <a:cs typeface="Libre Franklin" pitchFamily="34" charset="-120"/>
               </a:rPr>
-              <a:t>Examples, and when they pay</a:t>
+              <a:t>Knowing if it works</a:t>
             </a:r>
             <a:endParaRPr lang="en-US" sz="4000" dirty="0"/>
           </a:p>
@@ -3750,7 +3928,7 @@
                 <a:ea typeface="Libre Franklin" pitchFamily="34" charset="-122"/>
                 <a:cs typeface="Libre Franklin" pitchFamily="34" charset="-120"/>
               </a:rPr>
-              <a:t>Showing beats telling — at a price you should know before you pay it.</a:t>
+              <a:t>Measure first. Then change one thing, and measure again.</a:t>
             </a:r>
             <a:endParaRPr lang="en-US" sz="1700" dirty="0"/>
           </a:p>
@@ -3866,7 +4044,7 @@
                 <a:ea typeface="Libre Franklin" pitchFamily="34" charset="-122"/>
                 <a:cs typeface="Libre Franklin" pitchFamily="34" charset="-120"/>
               </a:rPr>
-              <a:t>Few-shot: show, do not describe</a:t>
+              <a:t>How do you know it worked?</a:t>
             </a:r>
             <a:endParaRPr lang="en-US" sz="2800" dirty="0"/>
           </a:p>
@@ -3978,362 +4156,92 @@
       </p:sp>
       <p:sp>
         <p:nvSpPr>
-          <p:cNvPr id="7" name="Shape 5"/>
+          <p:cNvPr id="7" name="Text 5"/>
           <p:cNvSpPr/>
           <p:nvPr/>
         </p:nvSpPr>
         <p:spPr>
           <a:xfrm>
             <a:off x="558800" y="1511300"/>
-            <a:ext cx="6517030" cy="4572000"/>
-          </a:xfrm>
-          <a:prstGeom prst="rect">
-            <a:avLst/>
-          </a:prstGeom>
-          <a:solidFill>
-            <a:srgbClr val="F5F2EC"/>
-          </a:solidFill>
-          <a:ln w="6350">
-            <a:solidFill>
-              <a:srgbClr val="E1DED7"/>
-            </a:solidFill>
-            <a:prstDash val="solid"/>
-          </a:ln>
-        </p:spPr>
-      </p:sp>
-      <p:sp>
-        <p:nvSpPr>
-          <p:cNvPr id="8" name="Text 6"/>
-          <p:cNvSpPr/>
-          <p:nvPr/>
-        </p:nvSpPr>
-        <p:spPr>
-          <a:xfrm>
-            <a:off x="800100" y="1727200"/>
-            <a:ext cx="6034430" cy="4140200"/>
-          </a:xfrm>
-          <a:prstGeom prst="rect">
-            <a:avLst/>
-          </a:prstGeom>
-          <a:noFill/>
-          <a:ln/>
-        </p:spPr>
-        <p:txBody>
-          <a:bodyPr wrap="square" lIns="0" tIns="0" rIns="0" bIns="0" rtlCol="0" anchor="t"/>
-          <a:lstStyle/>
-          <a:p>
-            <a:pPr indent="0" marL="0">
-              <a:lnSpc>
-                <a:spcPct val="160000"/>
-              </a:lnSpc>
-              <a:buNone/>
-            </a:pPr>
-            <a:r>
-              <a:rPr lang="en-US" sz="1400" dirty="0">
-                <a:solidFill>
-                  <a:srgbClr val="332F2A"/>
-                </a:solidFill>
-                <a:latin typeface="IBM Plex Mono" pitchFamily="34" charset="0"/>
-                <a:ea typeface="IBM Plex Mono" pitchFamily="34" charset="-122"/>
-                <a:cs typeface="IBM Plex Mono" pitchFamily="34" charset="-120"/>
-              </a:rPr>
-              <a:t>Examples of correct output:</a:t>
-            </a:r>
-            <a:endParaRPr lang="en-US" sz="1400" dirty="0"/>
-          </a:p>
-          <a:p>
-            <a:pPr indent="0" marL="0">
-              <a:lnSpc>
-                <a:spcPct val="160000"/>
-              </a:lnSpc>
-              <a:buNone/>
-            </a:pPr>
-            <a:endParaRPr lang="en-US" sz="1400" dirty="0"/>
-          </a:p>
-          <a:p>
-            <a:pPr indent="0" marL="0">
-              <a:lnSpc>
-                <a:spcPct val="160000"/>
-              </a:lnSpc>
-              <a:buNone/>
-            </a:pPr>
-            <a:r>
-              <a:rPr lang="en-US" sz="1400" dirty="0">
-                <a:solidFill>
-                  <a:srgbClr val="332F2A"/>
-                </a:solidFill>
-                <a:latin typeface="IBM Plex Mono" pitchFamily="34" charset="0"/>
-                <a:ea typeface="IBM Plex Mono" pitchFamily="34" charset="-122"/>
-                <a:cs typeface="IBM Plex Mono" pitchFamily="34" charset="-120"/>
-              </a:rPr>
-              <a:t>message: "iced choc x2, 15:45, Fai"</a:t>
-            </a:r>
-            <a:endParaRPr lang="en-US" sz="1400" dirty="0"/>
-          </a:p>
-          <a:p>
-            <a:pPr indent="0" marL="0">
-              <a:lnSpc>
-                <a:spcPct val="160000"/>
-              </a:lnSpc>
-              <a:buNone/>
-            </a:pPr>
-            <a:r>
-              <a:rPr lang="en-US" sz="1400" dirty="0">
-                <a:solidFill>
-                  <a:srgbClr val="332F2A"/>
-                </a:solidFill>
-                <a:latin typeface="IBM Plex Mono" pitchFamily="34" charset="0"/>
-                <a:ea typeface="IBM Plex Mono" pitchFamily="34" charset="-122"/>
-                <a:cs typeface="IBM Plex Mono" pitchFamily="34" charset="-120"/>
-              </a:rPr>
-              <a:t>order:   customer: Fai</a:t>
-            </a:r>
-            <a:endParaRPr lang="en-US" sz="1400" dirty="0"/>
-          </a:p>
-          <a:p>
-            <a:pPr indent="0" marL="0">
-              <a:lnSpc>
-                <a:spcPct val="160000"/>
-              </a:lnSpc>
-              <a:buNone/>
-            </a:pPr>
-            <a:r>
-              <a:rPr lang="en-US" sz="1400" dirty="0">
-                <a:solidFill>
-                  <a:srgbClr val="332F2A"/>
-                </a:solidFill>
-                <a:latin typeface="IBM Plex Mono" pitchFamily="34" charset="0"/>
-                <a:ea typeface="IBM Plex Mono" pitchFamily="34" charset="-122"/>
-                <a:cs typeface="IBM Plex Mono" pitchFamily="34" charset="-120"/>
-              </a:rPr>
-              <a:t>         items: [Iced Chocolate x2]</a:t>
-            </a:r>
-            <a:endParaRPr lang="en-US" sz="1400" dirty="0"/>
-          </a:p>
-          <a:p>
-            <a:pPr indent="0" marL="0">
-              <a:lnSpc>
-                <a:spcPct val="160000"/>
-              </a:lnSpc>
-              <a:buNone/>
-            </a:pPr>
-            <a:r>
-              <a:rPr lang="en-US" sz="1400" dirty="0">
-                <a:solidFill>
-                  <a:srgbClr val="332F2A"/>
-                </a:solidFill>
-                <a:latin typeface="IBM Plex Mono" pitchFamily="34" charset="0"/>
-                <a:ea typeface="IBM Plex Mono" pitchFamily="34" charset="-122"/>
-                <a:cs typeface="IBM Plex Mono" pitchFamily="34" charset="-120"/>
-              </a:rPr>
-              <a:t>         pickup: "15:45"</a:t>
-            </a:r>
-            <a:endParaRPr lang="en-US" sz="1400" dirty="0"/>
-          </a:p>
-          <a:p>
-            <a:pPr indent="0" marL="0">
-              <a:lnSpc>
-                <a:spcPct val="160000"/>
-              </a:lnSpc>
-              <a:buNone/>
-            </a:pPr>
-            <a:endParaRPr lang="en-US" sz="1400" dirty="0"/>
-          </a:p>
-          <a:p>
-            <a:pPr indent="0" marL="0">
-              <a:lnSpc>
-                <a:spcPct val="160000"/>
-              </a:lnSpc>
-              <a:buNone/>
-            </a:pPr>
-            <a:r>
-              <a:rPr lang="en-US" sz="1400" dirty="0">
-                <a:solidFill>
-                  <a:srgbClr val="332F2A"/>
-                </a:solidFill>
-                <a:latin typeface="IBM Plex Mono" pitchFamily="34" charset="0"/>
-                <a:ea typeface="IBM Plex Mono" pitchFamily="34" charset="-122"/>
-                <a:cs typeface="IBM Plex Mono" pitchFamily="34" charset="-120"/>
-              </a:rPr>
-              <a:t>message: "one green tea latte, after 4"</a:t>
-            </a:r>
-            <a:endParaRPr lang="en-US" sz="1400" dirty="0"/>
-          </a:p>
-          <a:p>
-            <a:pPr indent="0" marL="0">
-              <a:lnSpc>
-                <a:spcPct val="160000"/>
-              </a:lnSpc>
-              <a:buNone/>
-            </a:pPr>
-            <a:r>
-              <a:rPr lang="en-US" sz="1400" dirty="0">
-                <a:solidFill>
-                  <a:srgbClr val="332F2A"/>
-                </a:solidFill>
-                <a:latin typeface="IBM Plex Mono" pitchFamily="34" charset="0"/>
-                <a:ea typeface="IBM Plex Mono" pitchFamily="34" charset="-122"/>
-                <a:cs typeface="IBM Plex Mono" pitchFamily="34" charset="-120"/>
-              </a:rPr>
-              <a:t>order:   customer: null, needs_review: true</a:t>
-            </a:r>
-            <a:endParaRPr lang="en-US" sz="1400" dirty="0"/>
-          </a:p>
-          <a:p>
-            <a:pPr indent="0" marL="0">
-              <a:lnSpc>
-                <a:spcPct val="160000"/>
-              </a:lnSpc>
-              <a:buNone/>
-            </a:pPr>
-            <a:r>
-              <a:rPr lang="en-US" sz="1400" dirty="0">
-                <a:solidFill>
-                  <a:srgbClr val="332F2A"/>
-                </a:solidFill>
-                <a:latin typeface="IBM Plex Mono" pitchFamily="34" charset="0"/>
-                <a:ea typeface="IBM Plex Mono" pitchFamily="34" charset="-122"/>
-                <a:cs typeface="IBM Plex Mono" pitchFamily="34" charset="-120"/>
-              </a:rPr>
-              <a:t>         note: "no name given"</a:t>
-            </a:r>
-            <a:endParaRPr lang="en-US" sz="1400" dirty="0"/>
-          </a:p>
-        </p:txBody>
-      </p:sp>
-      <p:sp>
-        <p:nvSpPr>
-          <p:cNvPr id="9" name="Text 7"/>
-          <p:cNvSpPr/>
-          <p:nvPr/>
-        </p:nvSpPr>
-        <p:spPr>
-          <a:xfrm>
-            <a:off x="7431430" y="1511300"/>
-            <a:ext cx="4201770" cy="1600200"/>
-          </a:xfrm>
-          <a:prstGeom prst="rect">
-            <a:avLst/>
-          </a:prstGeom>
-          <a:noFill/>
-          <a:ln/>
-        </p:spPr>
-        <p:txBody>
-          <a:bodyPr wrap="square" lIns="0" tIns="0" rIns="0" bIns="0" rtlCol="0" anchor="t"/>
-          <a:lstStyle/>
-          <a:p>
-            <a:pPr algn="l" indent="0" marL="0">
-              <a:lnSpc>
-                <a:spcPct val="145000"/>
-              </a:lnSpc>
-              <a:buNone/>
-            </a:pPr>
-            <a:r>
-              <a:rPr lang="en-US" sz="1600" dirty="0">
-                <a:solidFill>
-                  <a:srgbClr val="332F2A"/>
+            <a:ext cx="190500" cy="317500"/>
+          </a:xfrm>
+          <a:prstGeom prst="rect">
+            <a:avLst/>
+          </a:prstGeom>
+          <a:noFill/>
+          <a:ln/>
+        </p:spPr>
+        <p:txBody>
+          <a:bodyPr wrap="square" lIns="0" tIns="0" rIns="0" bIns="0" rtlCol="0" anchor="t"/>
+          <a:lstStyle/>
+          <a:p>
+            <a:pPr algn="l" indent="0" marL="0">
+              <a:lnSpc>
+                <a:spcPct val="140000"/>
+              </a:lnSpc>
+              <a:buNone/>
+            </a:pPr>
+            <a:r>
+              <a:rPr lang="en-US" sz="1700" dirty="0">
+                <a:solidFill>
+                  <a:srgbClr val="A87A2E"/>
                 </a:solidFill>
                 <a:latin typeface="Libre Franklin" pitchFamily="34" charset="0"/>
                 <a:ea typeface="Libre Franklin" pitchFamily="34" charset="-122"/>
                 <a:cs typeface="Libre Franklin" pitchFamily="34" charset="-120"/>
               </a:rPr>
-              <a:t>Two or three worked examples teach a format faster than any amount of description, and they are the only reliable way to pin down an edge case you keep losing.</a:t>
-            </a:r>
-            <a:endParaRPr lang="en-US" sz="1600" dirty="0"/>
-          </a:p>
-        </p:txBody>
-      </p:sp>
-      <p:sp>
-        <p:nvSpPr>
-          <p:cNvPr id="10" name="Text 8"/>
-          <p:cNvSpPr/>
-          <p:nvPr/>
-        </p:nvSpPr>
-        <p:spPr>
-          <a:xfrm>
-            <a:off x="7431430" y="3238500"/>
-            <a:ext cx="4201770" cy="1305560"/>
-          </a:xfrm>
-          <a:prstGeom prst="rect">
-            <a:avLst/>
-          </a:prstGeom>
-          <a:noFill/>
-          <a:ln/>
-        </p:spPr>
-        <p:txBody>
-          <a:bodyPr wrap="square" lIns="0" tIns="0" rIns="0" bIns="0" rtlCol="0" anchor="t"/>
-          <a:lstStyle/>
-          <a:p>
-            <a:pPr algn="l" indent="0" marL="0">
-              <a:lnSpc>
-                <a:spcPct val="145000"/>
-              </a:lnSpc>
-              <a:buNone/>
-            </a:pPr>
-            <a:r>
-              <a:rPr lang="en-US" sz="1600" dirty="0">
-                <a:solidFill>
-                  <a:srgbClr val="77726A"/>
+              <a:t>—</a:t>
+            </a:r>
+            <a:endParaRPr lang="en-US" sz="1700" dirty="0"/>
+          </a:p>
+        </p:txBody>
+      </p:sp>
+      <p:sp>
+        <p:nvSpPr>
+          <p:cNvPr id="8" name="Text 6"/>
+          <p:cNvSpPr/>
+          <p:nvPr/>
+        </p:nvSpPr>
+        <p:spPr>
+          <a:xfrm>
+            <a:off x="927100" y="1511300"/>
+            <a:ext cx="9156700" cy="753110"/>
+          </a:xfrm>
+          <a:prstGeom prst="rect">
+            <a:avLst/>
+          </a:prstGeom>
+          <a:noFill/>
+          <a:ln/>
+        </p:spPr>
+        <p:txBody>
+          <a:bodyPr wrap="square" lIns="0" tIns="0" rIns="0" bIns="0" rtlCol="0" anchor="t"/>
+          <a:lstStyle/>
+          <a:p>
+            <a:pPr algn="l" indent="0" marL="0">
+              <a:lnSpc>
+                <a:spcPct val="145000"/>
+              </a:lnSpc>
+              <a:buNone/>
+            </a:pPr>
+            <a:r>
+              <a:rPr lang="en-US" sz="1700" b="1" dirty="0">
+                <a:solidFill>
+                  <a:srgbClr val="332F2A"/>
                 </a:solidFill>
                 <a:latin typeface="Libre Franklin" pitchFamily="34" charset="0"/>
                 <a:ea typeface="Libre Franklin" pitchFamily="34" charset="-122"/>
                 <a:cs typeface="Libre Franklin" pitchFamily="34" charset="-120"/>
               </a:rPr>
-              <a:t>Notice the second one: an example of getting it right by refusing. Examples teach behaviour, not just shape.</a:t>
-            </a:r>
-            <a:endParaRPr lang="en-US" sz="1600" dirty="0"/>
-          </a:p>
-        </p:txBody>
-      </p:sp>
-      <p:sp>
-        <p:nvSpPr>
-          <p:cNvPr id="11" name="Shape 9"/>
-          <p:cNvSpPr/>
-          <p:nvPr/>
-        </p:nvSpPr>
-        <p:spPr>
-          <a:xfrm>
-            <a:off x="7431430" y="5384800"/>
-            <a:ext cx="12700" cy="698500"/>
-          </a:xfrm>
-          <a:prstGeom prst="rect">
-            <a:avLst/>
-          </a:prstGeom>
-          <a:solidFill>
-            <a:srgbClr val="A87A2E"/>
-          </a:solidFill>
-          <a:ln/>
-        </p:spPr>
-      </p:sp>
-      <p:sp>
-        <p:nvSpPr>
-          <p:cNvPr id="12" name="Text 10"/>
-          <p:cNvSpPr/>
-          <p:nvPr/>
-        </p:nvSpPr>
-        <p:spPr>
-          <a:xfrm>
-            <a:off x="7596530" y="5416550"/>
-            <a:ext cx="4036670" cy="698500"/>
-          </a:xfrm>
-          <a:prstGeom prst="rect">
-            <a:avLst/>
-          </a:prstGeom>
-          <a:noFill/>
-          <a:ln/>
-        </p:spPr>
-        <p:txBody>
-          <a:bodyPr wrap="square" lIns="0" tIns="0" rIns="0" bIns="0" rtlCol="0" anchor="t"/>
-          <a:lstStyle/>
-          <a:p>
-            <a:pPr algn="l" indent="0" marL="0">
-              <a:lnSpc>
-                <a:spcPct val="140000"/>
-              </a:lnSpc>
-              <a:buNone/>
-            </a:pPr>
-            <a:r>
-              <a:rPr lang="en-US" sz="1500" dirty="0">
+              <a:t>An eval is two things. </a:t>
+            </a:r>
+            <a:pPr algn="l" indent="0" marL="0">
+              <a:lnSpc>
+                <a:spcPct val="145000"/>
+              </a:lnSpc>
+              <a:buNone/>
+            </a:pPr>
+            <a:r>
+              <a:rPr lang="en-US" sz="1700" dirty="0">
                 <a:solidFill>
                   <a:srgbClr val="332F2A"/>
                 </a:solidFill>
@@ -4341,9 +4249,312 @@
                 <a:ea typeface="Libre Franklin" pitchFamily="34" charset="-122"/>
                 <a:cs typeface="Libre Franklin" pitchFamily="34" charset="-120"/>
               </a:rPr>
-              <a:t>Show the model the case you keep failing, done correctly.</a:t>
-            </a:r>
-            <a:endParaRPr lang="en-US" sz="1500" dirty="0"/>
+              <a:t>Cases whose right answer you already know, and a rule that turns what came back into a number.</a:t>
+            </a:r>
+            <a:endParaRPr lang="en-US" sz="1700" dirty="0"/>
+          </a:p>
+        </p:txBody>
+      </p:sp>
+      <p:sp>
+        <p:nvSpPr>
+          <p:cNvPr id="9" name="Text 7"/>
+          <p:cNvSpPr/>
+          <p:nvPr/>
+        </p:nvSpPr>
+        <p:spPr>
+          <a:xfrm>
+            <a:off x="558800" y="2391410"/>
+            <a:ext cx="190500" cy="317500"/>
+          </a:xfrm>
+          <a:prstGeom prst="rect">
+            <a:avLst/>
+          </a:prstGeom>
+          <a:noFill/>
+          <a:ln/>
+        </p:spPr>
+        <p:txBody>
+          <a:bodyPr wrap="square" lIns="0" tIns="0" rIns="0" bIns="0" rtlCol="0" anchor="t"/>
+          <a:lstStyle/>
+          <a:p>
+            <a:pPr algn="l" indent="0" marL="0">
+              <a:lnSpc>
+                <a:spcPct val="140000"/>
+              </a:lnSpc>
+              <a:buNone/>
+            </a:pPr>
+            <a:r>
+              <a:rPr lang="en-US" sz="1700" dirty="0">
+                <a:solidFill>
+                  <a:srgbClr val="A87A2E"/>
+                </a:solidFill>
+                <a:latin typeface="Libre Franklin" pitchFamily="34" charset="0"/>
+                <a:ea typeface="Libre Franklin" pitchFamily="34" charset="-122"/>
+                <a:cs typeface="Libre Franklin" pitchFamily="34" charset="-120"/>
+              </a:rPr>
+              <a:t>—</a:t>
+            </a:r>
+            <a:endParaRPr lang="en-US" sz="1700" dirty="0"/>
+          </a:p>
+        </p:txBody>
+      </p:sp>
+      <p:sp>
+        <p:nvSpPr>
+          <p:cNvPr id="10" name="Text 8"/>
+          <p:cNvSpPr/>
+          <p:nvPr/>
+        </p:nvSpPr>
+        <p:spPr>
+          <a:xfrm>
+            <a:off x="927100" y="2391410"/>
+            <a:ext cx="9156700" cy="753110"/>
+          </a:xfrm>
+          <a:prstGeom prst="rect">
+            <a:avLst/>
+          </a:prstGeom>
+          <a:noFill/>
+          <a:ln/>
+        </p:spPr>
+        <p:txBody>
+          <a:bodyPr wrap="square" lIns="0" tIns="0" rIns="0" bIns="0" rtlCol="0" anchor="t"/>
+          <a:lstStyle/>
+          <a:p>
+            <a:pPr algn="l" indent="0" marL="0">
+              <a:lnSpc>
+                <a:spcPct val="145000"/>
+              </a:lnSpc>
+              <a:buNone/>
+            </a:pPr>
+            <a:r>
+              <a:rPr lang="en-US" sz="1700" b="1" dirty="0">
+                <a:solidFill>
+                  <a:srgbClr val="332F2A"/>
+                </a:solidFill>
+                <a:latin typeface="Libre Franklin" pitchFamily="34" charset="0"/>
+                <a:ea typeface="Libre Franklin" pitchFamily="34" charset="-122"/>
+                <a:cs typeface="Libre Franklin" pitchFamily="34" charset="-120"/>
+              </a:rPr>
+              <a:t>You already have one. </a:t>
+            </a:r>
+            <a:pPr algn="l" indent="0" marL="0">
+              <a:lnSpc>
+                <a:spcPct val="145000"/>
+              </a:lnSpc>
+              <a:buNone/>
+            </a:pPr>
+            <a:r>
+              <a:rPr lang="en-US" sz="1700" dirty="0">
+                <a:solidFill>
+                  <a:srgbClr val="332F2A"/>
+                </a:solidFill>
+                <a:latin typeface="Libre Franklin" pitchFamily="34" charset="0"/>
+                <a:ea typeface="Libre Franklin" pitchFamily="34" charset="-122"/>
+                <a:cs typeface="Libre Franklin" pitchFamily="34" charset="-120"/>
+              </a:rPr>
+              <a:t>answer_key.json is ten known answers; score() is the rule. The rules parser gets four out of ten.</a:t>
+            </a:r>
+            <a:endParaRPr lang="en-US" sz="1700" dirty="0"/>
+          </a:p>
+        </p:txBody>
+      </p:sp>
+      <p:sp>
+        <p:nvSpPr>
+          <p:cNvPr id="11" name="Text 9"/>
+          <p:cNvSpPr/>
+          <p:nvPr/>
+        </p:nvSpPr>
+        <p:spPr>
+          <a:xfrm>
+            <a:off x="558800" y="3271520"/>
+            <a:ext cx="190500" cy="317500"/>
+          </a:xfrm>
+          <a:prstGeom prst="rect">
+            <a:avLst/>
+          </a:prstGeom>
+          <a:noFill/>
+          <a:ln/>
+        </p:spPr>
+        <p:txBody>
+          <a:bodyPr wrap="square" lIns="0" tIns="0" rIns="0" bIns="0" rtlCol="0" anchor="t"/>
+          <a:lstStyle/>
+          <a:p>
+            <a:pPr algn="l" indent="0" marL="0">
+              <a:lnSpc>
+                <a:spcPct val="140000"/>
+              </a:lnSpc>
+              <a:buNone/>
+            </a:pPr>
+            <a:r>
+              <a:rPr lang="en-US" sz="1700" dirty="0">
+                <a:solidFill>
+                  <a:srgbClr val="A87A2E"/>
+                </a:solidFill>
+                <a:latin typeface="Libre Franklin" pitchFamily="34" charset="0"/>
+                <a:ea typeface="Libre Franklin" pitchFamily="34" charset="-122"/>
+                <a:cs typeface="Libre Franklin" pitchFamily="34" charset="-120"/>
+              </a:rPr>
+              <a:t>—</a:t>
+            </a:r>
+            <a:endParaRPr lang="en-US" sz="1700" dirty="0"/>
+          </a:p>
+        </p:txBody>
+      </p:sp>
+      <p:sp>
+        <p:nvSpPr>
+          <p:cNvPr id="12" name="Text 10"/>
+          <p:cNvSpPr/>
+          <p:nvPr/>
+        </p:nvSpPr>
+        <p:spPr>
+          <a:xfrm>
+            <a:off x="927100" y="3271520"/>
+            <a:ext cx="9156700" cy="753110"/>
+          </a:xfrm>
+          <a:prstGeom prst="rect">
+            <a:avLst/>
+          </a:prstGeom>
+          <a:noFill/>
+          <a:ln/>
+        </p:spPr>
+        <p:txBody>
+          <a:bodyPr wrap="square" lIns="0" tIns="0" rIns="0" bIns="0" rtlCol="0" anchor="t"/>
+          <a:lstStyle/>
+          <a:p>
+            <a:pPr algn="l" indent="0" marL="0">
+              <a:lnSpc>
+                <a:spcPct val="145000"/>
+              </a:lnSpc>
+              <a:buNone/>
+            </a:pPr>
+            <a:r>
+              <a:rPr lang="en-US" sz="1700" b="1" dirty="0">
+                <a:solidFill>
+                  <a:srgbClr val="332F2A"/>
+                </a:solidFill>
+                <a:latin typeface="Libre Franklin" pitchFamily="34" charset="0"/>
+                <a:ea typeface="Libre Franklin" pitchFamily="34" charset="-122"/>
+                <a:cs typeface="Libre Franklin" pitchFamily="34" charset="-120"/>
+              </a:rPr>
+              <a:t>Eyeballing does not scale, and it flatters you. </a:t>
+            </a:r>
+            <a:pPr algn="l" indent="0" marL="0">
+              <a:lnSpc>
+                <a:spcPct val="145000"/>
+              </a:lnSpc>
+              <a:buNone/>
+            </a:pPr>
+            <a:r>
+              <a:rPr lang="en-US" sz="1700" dirty="0">
+                <a:solidFill>
+                  <a:srgbClr val="332F2A"/>
+                </a:solidFill>
+                <a:latin typeface="Libre Franklin" pitchFamily="34" charset="0"/>
+                <a:ea typeface="Libre Franklin" pitchFamily="34" charset="-122"/>
+                <a:cs typeface="Libre Franklin" pitchFamily="34" charset="-120"/>
+              </a:rPr>
+              <a:t>Ten you can check by hand; ten thousand you cannot — and you look hardest where you expect to pass.</a:t>
+            </a:r>
+            <a:endParaRPr lang="en-US" sz="1700" dirty="0"/>
+          </a:p>
+        </p:txBody>
+      </p:sp>
+      <p:sp>
+        <p:nvSpPr>
+          <p:cNvPr id="13" name="Text 11"/>
+          <p:cNvSpPr/>
+          <p:nvPr/>
+        </p:nvSpPr>
+        <p:spPr>
+          <a:xfrm>
+            <a:off x="558800" y="4151630"/>
+            <a:ext cx="190500" cy="317500"/>
+          </a:xfrm>
+          <a:prstGeom prst="rect">
+            <a:avLst/>
+          </a:prstGeom>
+          <a:noFill/>
+          <a:ln/>
+        </p:spPr>
+        <p:txBody>
+          <a:bodyPr wrap="square" lIns="0" tIns="0" rIns="0" bIns="0" rtlCol="0" anchor="t"/>
+          <a:lstStyle/>
+          <a:p>
+            <a:pPr algn="l" indent="0" marL="0">
+              <a:lnSpc>
+                <a:spcPct val="140000"/>
+              </a:lnSpc>
+              <a:buNone/>
+            </a:pPr>
+            <a:r>
+              <a:rPr lang="en-US" sz="1700" dirty="0">
+                <a:solidFill>
+                  <a:srgbClr val="A87A2E"/>
+                </a:solidFill>
+                <a:latin typeface="Libre Franklin" pitchFamily="34" charset="0"/>
+                <a:ea typeface="Libre Franklin" pitchFamily="34" charset="-122"/>
+                <a:cs typeface="Libre Franklin" pitchFamily="34" charset="-120"/>
+              </a:rPr>
+              <a:t>—</a:t>
+            </a:r>
+            <a:endParaRPr lang="en-US" sz="1700" dirty="0"/>
+          </a:p>
+        </p:txBody>
+      </p:sp>
+      <p:sp>
+        <p:nvSpPr>
+          <p:cNvPr id="14" name="Text 12"/>
+          <p:cNvSpPr/>
+          <p:nvPr/>
+        </p:nvSpPr>
+        <p:spPr>
+          <a:xfrm>
+            <a:off x="927100" y="4151630"/>
+            <a:ext cx="9156700" cy="753110"/>
+          </a:xfrm>
+          <a:prstGeom prst="rect">
+            <a:avLst/>
+          </a:prstGeom>
+          <a:noFill/>
+          <a:ln/>
+        </p:spPr>
+        <p:txBody>
+          <a:bodyPr wrap="square" lIns="0" tIns="0" rIns="0" bIns="0" rtlCol="0" anchor="t"/>
+          <a:lstStyle/>
+          <a:p>
+            <a:pPr algn="l" indent="0" marL="0">
+              <a:lnSpc>
+                <a:spcPct val="145000"/>
+              </a:lnSpc>
+              <a:buNone/>
+            </a:pPr>
+            <a:r>
+              <a:rPr lang="en-US" sz="1700" b="1" dirty="0">
+                <a:solidFill>
+                  <a:srgbClr val="332F2A"/>
+                </a:solidFill>
+                <a:latin typeface="Libre Franklin" pitchFamily="34" charset="0"/>
+                <a:ea typeface="Libre Franklin" pitchFamily="34" charset="-122"/>
+                <a:cs typeface="Libre Franklin" pitchFamily="34" charset="-120"/>
+              </a:rPr>
+              <a:t>Some answers cannot be keyed. </a:t>
+            </a:r>
+            <a:pPr algn="l" indent="0" marL="0">
+              <a:lnSpc>
+                <a:spcPct val="145000"/>
+              </a:lnSpc>
+              <a:buNone/>
+            </a:pPr>
+            <a:r>
+              <a:rPr lang="en-US" sz="1700" dirty="0">
+                <a:solidFill>
+                  <a:srgbClr val="332F2A"/>
+                </a:solidFill>
+                <a:latin typeface="Libre Franklin" pitchFamily="34" charset="0"/>
+                <a:ea typeface="Libre Franklin" pitchFamily="34" charset="-122"/>
+                <a:cs typeface="Libre Franklin" pitchFamily="34" charset="-120"/>
+              </a:rPr>
+              <a:t>“Explain this match” has no one right output. Grade properties: short, real reason, nothing invented.</a:t>
+            </a:r>
+            <a:endParaRPr lang="en-US" sz="1700" dirty="0"/>
           </a:p>
         </p:txBody>
       </p:sp>
@@ -4457,7 +4668,7 @@
                 <a:ea typeface="Libre Franklin" pitchFamily="34" charset="-122"/>
                 <a:cs typeface="Libre Franklin" pitchFamily="34" charset="-120"/>
               </a:rPr>
-              <a:t>What examples cost</a:t>
+              <a:t>Two ways to be wrong</a:t>
             </a:r>
             <a:endParaRPr lang="en-US" sz="2800" dirty="0"/>
           </a:p>
@@ -4567,390 +4778,152 @@
           </a:p>
         </p:txBody>
       </p:sp>
-      <p:sp>
-        <p:nvSpPr>
-          <p:cNvPr id="7" name="Text 5"/>
-          <p:cNvSpPr/>
-          <p:nvPr/>
-        </p:nvSpPr>
+      <p:pic>
+        <p:nvPicPr>
+          <p:cNvPr id="7" name="Image 0" descr="figures/fig-two-ways-wrong.png">    </p:cNvPr>
+          <p:cNvPicPr>
+            <a:picLocks noChangeAspect="1"/>
+          </p:cNvPicPr>
+          <p:nvPr/>
+        </p:nvPicPr>
+        <p:blipFill>
+          <a:blip r:embed="rId1"/>
+          <a:srcRect l="0" r="0" t="0" b="0"/>
+          <a:stretch/>
+        </p:blipFill>
         <p:spPr>
           <a:xfrm>
             <a:off x="558800" y="1511300"/>
-            <a:ext cx="190500" cy="317500"/>
-          </a:xfrm>
-          <a:prstGeom prst="rect">
-            <a:avLst/>
-          </a:prstGeom>
-          <a:noFill/>
-          <a:ln/>
-        </p:spPr>
-        <p:txBody>
-          <a:bodyPr wrap="square" lIns="0" tIns="0" rIns="0" bIns="0" rtlCol="0" anchor="t"/>
-          <a:lstStyle/>
-          <a:p>
-            <a:pPr algn="l" indent="0" marL="0">
-              <a:lnSpc>
-                <a:spcPct val="140000"/>
-              </a:lnSpc>
-              <a:buNone/>
-            </a:pPr>
-            <a:r>
-              <a:rPr lang="en-US" sz="1700" dirty="0">
-                <a:solidFill>
-                  <a:srgbClr val="A87A2E"/>
+            <a:ext cx="6134100" cy="4572000"/>
+          </a:xfrm>
+          <a:prstGeom prst="rect">
+            <a:avLst/>
+          </a:prstGeom>
+        </p:spPr>
+      </p:pic>
+      <p:sp>
+        <p:nvSpPr>
+          <p:cNvPr id="8" name="Text 5"/>
+          <p:cNvSpPr/>
+          <p:nvPr/>
+        </p:nvSpPr>
+        <p:spPr>
+          <a:xfrm>
+            <a:off x="7099300" y="1511300"/>
+            <a:ext cx="4533900" cy="1305560"/>
+          </a:xfrm>
+          <a:prstGeom prst="rect">
+            <a:avLst/>
+          </a:prstGeom>
+          <a:noFill/>
+          <a:ln/>
+        </p:spPr>
+        <p:txBody>
+          <a:bodyPr wrap="square" lIns="0" tIns="0" rIns="0" bIns="0" rtlCol="0" anchor="t"/>
+          <a:lstStyle/>
+          <a:p>
+            <a:pPr algn="l" indent="0" marL="0">
+              <a:lnSpc>
+                <a:spcPct val="145000"/>
+              </a:lnSpc>
+              <a:buNone/>
+            </a:pPr>
+            <a:r>
+              <a:rPr lang="en-US" sz="1600" dirty="0">
+                <a:solidFill>
+                  <a:srgbClr val="332F2A"/>
                 </a:solidFill>
                 <a:latin typeface="Libre Franklin" pitchFamily="34" charset="0"/>
                 <a:ea typeface="Libre Franklin" pitchFamily="34" charset="-122"/>
                 <a:cs typeface="Libre Franklin" pitchFamily="34" charset="-120"/>
               </a:rPr>
-              <a:t>—</a:t>
-            </a:r>
-            <a:endParaRPr lang="en-US" sz="1700" dirty="0"/>
-          </a:p>
-        </p:txBody>
-      </p:sp>
-      <p:sp>
-        <p:nvSpPr>
-          <p:cNvPr id="8" name="Text 6"/>
-          <p:cNvSpPr/>
-          <p:nvPr/>
-        </p:nvSpPr>
-        <p:spPr>
-          <a:xfrm>
-            <a:off x="927100" y="1511300"/>
-            <a:ext cx="9156700" cy="753110"/>
-          </a:xfrm>
-          <a:prstGeom prst="rect">
-            <a:avLst/>
-          </a:prstGeom>
-          <a:noFill/>
-          <a:ln/>
-        </p:spPr>
-        <p:txBody>
-          <a:bodyPr wrap="square" lIns="0" tIns="0" rIns="0" bIns="0" rtlCol="0" anchor="t"/>
-          <a:lstStyle/>
-          <a:p>
-            <a:pPr algn="l" indent="0" marL="0">
-              <a:lnSpc>
-                <a:spcPct val="145000"/>
-              </a:lnSpc>
-              <a:buNone/>
-            </a:pPr>
-            <a:r>
-              <a:rPr lang="en-US" sz="1700" b="1" dirty="0">
-                <a:solidFill>
-                  <a:srgbClr val="332F2A"/>
+              <a:t>Our score only marks the order — customer, items, time. Whether the parser flagged a doubtful one is a separate question, and four out of ten never asks it.</a:t>
+            </a:r>
+            <a:endParaRPr lang="en-US" sz="1600" dirty="0"/>
+          </a:p>
+        </p:txBody>
+      </p:sp>
+      <p:sp>
+        <p:nvSpPr>
+          <p:cNvPr id="9" name="Text 6"/>
+          <p:cNvSpPr/>
+          <p:nvPr/>
+        </p:nvSpPr>
+        <p:spPr>
+          <a:xfrm>
+            <a:off x="7099300" y="2943860"/>
+            <a:ext cx="4533900" cy="1600200"/>
+          </a:xfrm>
+          <a:prstGeom prst="rect">
+            <a:avLst/>
+          </a:prstGeom>
+          <a:noFill/>
+          <a:ln/>
+        </p:spPr>
+        <p:txBody>
+          <a:bodyPr wrap="square" lIns="0" tIns="0" rIns="0" bIns="0" rtlCol="0" anchor="t"/>
+          <a:lstStyle/>
+          <a:p>
+            <a:pPr algn="l" indent="0" marL="0">
+              <a:lnSpc>
+                <a:spcPct val="145000"/>
+              </a:lnSpc>
+              <a:buNone/>
+            </a:pPr>
+            <a:r>
+              <a:rPr lang="en-US" sz="1600" dirty="0">
+                <a:solidFill>
+                  <a:srgbClr val="77726A"/>
                 </a:solidFill>
                 <a:latin typeface="Libre Franklin" pitchFamily="34" charset="0"/>
                 <a:ea typeface="Libre Franklin" pitchFamily="34" charset="-122"/>
                 <a:cs typeface="Libre Franklin" pitchFamily="34" charset="-120"/>
               </a:rPr>
-              <a:t>They are tokens, every single call. </a:t>
-            </a:r>
-            <a:pPr algn="l" indent="0" marL="0">
-              <a:lnSpc>
-                <a:spcPct val="145000"/>
-              </a:lnSpc>
-              <a:buNone/>
-            </a:pPr>
-            <a:r>
-              <a:rPr lang="en-US" sz="1700" dirty="0">
-                <a:solidFill>
-                  <a:srgbClr val="332F2A"/>
-                </a:solidFill>
-                <a:latin typeface="Libre Franklin" pitchFamily="34" charset="0"/>
-                <a:ea typeface="Libre Franklin" pitchFamily="34" charset="-122"/>
-                <a:cs typeface="Libre Franklin" pitchFamily="34" charset="-120"/>
-              </a:rPr>
-              <a:t>Three examples in a prompt you send ten thousand times is three thousand examples paid for.</a:t>
-            </a:r>
-            <a:endParaRPr lang="en-US" sz="1700" dirty="0"/>
-          </a:p>
-        </p:txBody>
-      </p:sp>
-      <p:sp>
-        <p:nvSpPr>
-          <p:cNvPr id="9" name="Text 7"/>
-          <p:cNvSpPr/>
-          <p:nvPr/>
-        </p:nvSpPr>
-        <p:spPr>
-          <a:xfrm>
-            <a:off x="558800" y="2391410"/>
-            <a:ext cx="190500" cy="317500"/>
-          </a:xfrm>
-          <a:prstGeom prst="rect">
-            <a:avLst/>
-          </a:prstGeom>
-          <a:noFill/>
-          <a:ln/>
-        </p:spPr>
-        <p:txBody>
-          <a:bodyPr wrap="square" lIns="0" tIns="0" rIns="0" bIns="0" rtlCol="0" anchor="t"/>
-          <a:lstStyle/>
-          <a:p>
-            <a:pPr algn="l" indent="0" marL="0">
-              <a:lnSpc>
-                <a:spcPct val="140000"/>
-              </a:lnSpc>
-              <a:buNone/>
-            </a:pPr>
-            <a:r>
-              <a:rPr lang="en-US" sz="1700" dirty="0">
-                <a:solidFill>
-                  <a:srgbClr val="A87A2E"/>
-                </a:solidFill>
-                <a:latin typeface="Libre Franklin" pitchFamily="34" charset="0"/>
-                <a:ea typeface="Libre Franklin" pitchFamily="34" charset="-122"/>
-                <a:cs typeface="Libre Franklin" pitchFamily="34" charset="-120"/>
-              </a:rPr>
-              <a:t>—</a:t>
-            </a:r>
-            <a:endParaRPr lang="en-US" sz="1700" dirty="0"/>
-          </a:p>
-        </p:txBody>
-      </p:sp>
-      <p:sp>
-        <p:nvSpPr>
-          <p:cNvPr id="10" name="Text 8"/>
-          <p:cNvSpPr/>
-          <p:nvPr/>
-        </p:nvSpPr>
-        <p:spPr>
-          <a:xfrm>
-            <a:off x="927100" y="2391410"/>
-            <a:ext cx="9156700" cy="753110"/>
-          </a:xfrm>
-          <a:prstGeom prst="rect">
-            <a:avLst/>
-          </a:prstGeom>
-          <a:noFill/>
-          <a:ln/>
-        </p:spPr>
-        <p:txBody>
-          <a:bodyPr wrap="square" lIns="0" tIns="0" rIns="0" bIns="0" rtlCol="0" anchor="t"/>
-          <a:lstStyle/>
-          <a:p>
-            <a:pPr algn="l" indent="0" marL="0">
-              <a:lnSpc>
-                <a:spcPct val="145000"/>
-              </a:lnSpc>
-              <a:buNone/>
-            </a:pPr>
-            <a:r>
-              <a:rPr lang="en-US" sz="1700" b="1" dirty="0">
-                <a:solidFill>
-                  <a:srgbClr val="332F2A"/>
-                </a:solidFill>
-                <a:latin typeface="Libre Franklin" pitchFamily="34" charset="0"/>
-                <a:ea typeface="Libre Franklin" pitchFamily="34" charset="-122"/>
-                <a:cs typeface="Libre Franklin" pitchFamily="34" charset="-120"/>
-              </a:rPr>
-              <a:t>They bias hard. </a:t>
-            </a:r>
-            <a:pPr algn="l" indent="0" marL="0">
-              <a:lnSpc>
-                <a:spcPct val="145000"/>
-              </a:lnSpc>
-              <a:buNone/>
-            </a:pPr>
-            <a:r>
-              <a:rPr lang="en-US" sz="1700" dirty="0">
-                <a:solidFill>
-                  <a:srgbClr val="332F2A"/>
-                </a:solidFill>
-                <a:latin typeface="Libre Franklin" pitchFamily="34" charset="0"/>
-                <a:ea typeface="Libre Franklin" pitchFamily="34" charset="-122"/>
-                <a:cs typeface="Libre Franklin" pitchFamily="34" charset="-120"/>
-              </a:rPr>
-              <a:t>Show three coffee orders and it will read a cake order as coffee. Vary them or pay for it.</a:t>
-            </a:r>
-            <a:endParaRPr lang="en-US" sz="1700" dirty="0"/>
-          </a:p>
-        </p:txBody>
-      </p:sp>
-      <p:sp>
-        <p:nvSpPr>
-          <p:cNvPr id="11" name="Text 9"/>
-          <p:cNvSpPr/>
-          <p:nvPr/>
-        </p:nvSpPr>
-        <p:spPr>
-          <a:xfrm>
-            <a:off x="558800" y="3271520"/>
-            <a:ext cx="190500" cy="317500"/>
-          </a:xfrm>
-          <a:prstGeom prst="rect">
-            <a:avLst/>
-          </a:prstGeom>
-          <a:noFill/>
-          <a:ln/>
-        </p:spPr>
-        <p:txBody>
-          <a:bodyPr wrap="square" lIns="0" tIns="0" rIns="0" bIns="0" rtlCol="0" anchor="t"/>
-          <a:lstStyle/>
-          <a:p>
-            <a:pPr algn="l" indent="0" marL="0">
-              <a:lnSpc>
-                <a:spcPct val="140000"/>
-              </a:lnSpc>
-              <a:buNone/>
-            </a:pPr>
-            <a:r>
-              <a:rPr lang="en-US" sz="1700" dirty="0">
-                <a:solidFill>
-                  <a:srgbClr val="A87A2E"/>
-                </a:solidFill>
-                <a:latin typeface="Libre Franklin" pitchFamily="34" charset="0"/>
-                <a:ea typeface="Libre Franklin" pitchFamily="34" charset="-122"/>
-                <a:cs typeface="Libre Franklin" pitchFamily="34" charset="-120"/>
-              </a:rPr>
-              <a:t>—</a:t>
-            </a:r>
-            <a:endParaRPr lang="en-US" sz="1700" dirty="0"/>
-          </a:p>
-        </p:txBody>
-      </p:sp>
-      <p:sp>
-        <p:nvSpPr>
-          <p:cNvPr id="12" name="Text 10"/>
-          <p:cNvSpPr/>
-          <p:nvPr/>
-        </p:nvSpPr>
-        <p:spPr>
-          <a:xfrm>
-            <a:off x="927100" y="3271520"/>
-            <a:ext cx="9156700" cy="753110"/>
-          </a:xfrm>
-          <a:prstGeom prst="rect">
-            <a:avLst/>
-          </a:prstGeom>
-          <a:noFill/>
-          <a:ln/>
-        </p:spPr>
-        <p:txBody>
-          <a:bodyPr wrap="square" lIns="0" tIns="0" rIns="0" bIns="0" rtlCol="0" anchor="t"/>
-          <a:lstStyle/>
-          <a:p>
-            <a:pPr algn="l" indent="0" marL="0">
-              <a:lnSpc>
-                <a:spcPct val="145000"/>
-              </a:lnSpc>
-              <a:buNone/>
-            </a:pPr>
-            <a:r>
-              <a:rPr lang="en-US" sz="1700" b="1" dirty="0">
-                <a:solidFill>
-                  <a:srgbClr val="332F2A"/>
-                </a:solidFill>
-                <a:latin typeface="Libre Franklin" pitchFamily="34" charset="0"/>
-                <a:ea typeface="Libre Franklin" pitchFamily="34" charset="-122"/>
-                <a:cs typeface="Libre Franklin" pitchFamily="34" charset="-120"/>
-              </a:rPr>
-              <a:t>Our café prompt has none. </a:t>
-            </a:r>
-            <a:pPr algn="l" indent="0" marL="0">
-              <a:lnSpc>
-                <a:spcPct val="145000"/>
-              </a:lnSpc>
-              <a:buNone/>
-            </a:pPr>
-            <a:r>
-              <a:rPr lang="en-US" sz="1700" dirty="0">
-                <a:solidFill>
-                  <a:srgbClr val="332F2A"/>
-                </a:solidFill>
-                <a:latin typeface="Libre Franklin" pitchFamily="34" charset="0"/>
-                <a:ea typeface="Libre Franklin" pitchFamily="34" charset="-122"/>
-                <a:cs typeface="Libre Franklin" pitchFamily="34" charset="-120"/>
-              </a:rPr>
-              <a:t>It scores ten out of ten on the inbox without a single example — so adding some would be cost with no gain.</a:t>
-            </a:r>
-            <a:endParaRPr lang="en-US" sz="1700" dirty="0"/>
-          </a:p>
-        </p:txBody>
-      </p:sp>
-      <p:sp>
-        <p:nvSpPr>
-          <p:cNvPr id="13" name="Text 11"/>
-          <p:cNvSpPr/>
-          <p:nvPr/>
-        </p:nvSpPr>
-        <p:spPr>
-          <a:xfrm>
-            <a:off x="558800" y="4151630"/>
-            <a:ext cx="190500" cy="317500"/>
-          </a:xfrm>
-          <a:prstGeom prst="rect">
-            <a:avLst/>
-          </a:prstGeom>
-          <a:noFill/>
-          <a:ln/>
-        </p:spPr>
-        <p:txBody>
-          <a:bodyPr wrap="square" lIns="0" tIns="0" rIns="0" bIns="0" rtlCol="0" anchor="t"/>
-          <a:lstStyle/>
-          <a:p>
-            <a:pPr algn="l" indent="0" marL="0">
-              <a:lnSpc>
-                <a:spcPct val="140000"/>
-              </a:lnSpc>
-              <a:buNone/>
-            </a:pPr>
-            <a:r>
-              <a:rPr lang="en-US" sz="1700" dirty="0">
-                <a:solidFill>
-                  <a:srgbClr val="A87A2E"/>
-                </a:solidFill>
-                <a:latin typeface="Libre Franklin" pitchFamily="34" charset="0"/>
-                <a:ea typeface="Libre Franklin" pitchFamily="34" charset="-122"/>
-                <a:cs typeface="Libre Franklin" pitchFamily="34" charset="-120"/>
-              </a:rPr>
-              <a:t>—</a:t>
-            </a:r>
-            <a:endParaRPr lang="en-US" sz="1700" dirty="0"/>
-          </a:p>
-        </p:txBody>
-      </p:sp>
-      <p:sp>
-        <p:nvSpPr>
-          <p:cNvPr id="14" name="Text 12"/>
-          <p:cNvSpPr/>
-          <p:nvPr/>
-        </p:nvSpPr>
-        <p:spPr>
-          <a:xfrm>
-            <a:off x="927100" y="4151630"/>
-            <a:ext cx="9156700" cy="440055"/>
-          </a:xfrm>
-          <a:prstGeom prst="rect">
-            <a:avLst/>
-          </a:prstGeom>
-          <a:noFill/>
-          <a:ln/>
-        </p:spPr>
-        <p:txBody>
-          <a:bodyPr wrap="square" lIns="0" tIns="0" rIns="0" bIns="0" rtlCol="0" anchor="t"/>
-          <a:lstStyle/>
-          <a:p>
-            <a:pPr algn="l" indent="0" marL="0">
-              <a:lnSpc>
-                <a:spcPct val="145000"/>
-              </a:lnSpc>
-              <a:buNone/>
-            </a:pPr>
-            <a:r>
-              <a:rPr lang="en-US" sz="1700" dirty="0">
-                <a:solidFill>
-                  <a:srgbClr val="332F2A"/>
-                </a:solidFill>
-                <a:latin typeface="Libre Franklin" pitchFamily="34" charset="0"/>
-                <a:ea typeface="Libre Franklin" pitchFamily="34" charset="-122"/>
-                <a:cs typeface="Libre Franklin" pitchFamily="34" charset="-120"/>
-              </a:rPr>
-              <a:t>Reach for examples when a rule keeps failing, not by default.</a:t>
-            </a:r>
-            <a:endParaRPr lang="en-US" sz="1700" dirty="0"/>
+              <a:t>The two mistakes cost different amounts. A false alarm costs a human one glance; an escape costs a customer. A checker that never cries wolf is one that misses things.</a:t>
+            </a:r>
+            <a:endParaRPr lang="en-US" sz="1600" dirty="0"/>
+          </a:p>
+        </p:txBody>
+      </p:sp>
+      <p:sp>
+        <p:nvSpPr>
+          <p:cNvPr id="10" name="Text 7"/>
+          <p:cNvSpPr/>
+          <p:nvPr/>
+        </p:nvSpPr>
+        <p:spPr>
+          <a:xfrm>
+            <a:off x="7099300" y="5956300"/>
+            <a:ext cx="4533900" cy="215900"/>
+          </a:xfrm>
+          <a:prstGeom prst="rect">
+            <a:avLst/>
+          </a:prstGeom>
+          <a:noFill/>
+          <a:ln/>
+        </p:spPr>
+        <p:txBody>
+          <a:bodyPr wrap="square" lIns="0" tIns="0" rIns="0" bIns="0" rtlCol="0" anchor="t"/>
+          <a:lstStyle/>
+          <a:p>
+            <a:pPr algn="l" indent="0" marL="0">
+              <a:lnSpc>
+                <a:spcPct val="145000"/>
+              </a:lnSpc>
+              <a:buNone/>
+            </a:pPr>
+            <a:r>
+              <a:rPr lang="en-US" sz="1200" dirty="0">
+                <a:solidFill>
+                  <a:srgbClr val="99948B"/>
+                </a:solidFill>
+                <a:latin typeface="IBM Plex Mono" pitchFamily="34" charset="0"/>
+                <a:ea typeface="IBM Plex Mono" pitchFamily="34" charset="-122"/>
+                <a:cs typeface="IBM Plex Mono" pitchFamily="34" charset="-120"/>
+              </a:rPr>
+              <a:t>Fig. 12 — the rules parser on the real inbox, both axes at once</a:t>
+            </a:r>
+            <a:endParaRPr lang="en-US" sz="1200" dirty="0"/>
           </a:p>
         </p:txBody>
       </p:sp>
@@ -5064,7 +5037,7 @@
                 <a:ea typeface="Libre Franklin" pitchFamily="34" charset="-122"/>
                 <a:cs typeface="Libre Franklin" pitchFamily="34" charset="-120"/>
               </a:rPr>
-              <a:t>Making it better on purpose</a:t>
+              <a:t>Few-shot: show, do not describe</a:t>
             </a:r>
             <a:endParaRPr lang="en-US" sz="2800" dirty="0"/>
           </a:p>
@@ -5174,39 +5147,241 @@
           </a:p>
         </p:txBody>
       </p:sp>
-      <p:pic>
-        <p:nvPicPr>
-          <p:cNvPr id="7" name="Image 0" descr="figures/fig-prompt-loop.png">    </p:cNvPr>
-          <p:cNvPicPr>
-            <a:picLocks noChangeAspect="1"/>
-          </p:cNvPicPr>
-          <p:nvPr/>
-        </p:nvPicPr>
-        <p:blipFill>
-          <a:blip r:embed="rId1"/>
-          <a:srcRect l="0" r="0" t="0" b="0"/>
-          <a:stretch/>
-        </p:blipFill>
+      <p:sp>
+        <p:nvSpPr>
+          <p:cNvPr id="7" name="Shape 5"/>
+          <p:cNvSpPr/>
+          <p:nvPr/>
+        </p:nvSpPr>
         <p:spPr>
           <a:xfrm>
             <a:off x="558800" y="1511300"/>
-            <a:ext cx="6134100" cy="4572000"/>
-          </a:xfrm>
-          <a:prstGeom prst="rect">
-            <a:avLst/>
-          </a:prstGeom>
-        </p:spPr>
-      </p:pic>
-      <p:sp>
-        <p:nvSpPr>
-          <p:cNvPr id="8" name="Text 5"/>
-          <p:cNvSpPr/>
-          <p:nvPr/>
-        </p:nvSpPr>
-        <p:spPr>
-          <a:xfrm>
-            <a:off x="7099300" y="1511300"/>
-            <a:ext cx="4533900" cy="1600200"/>
+            <a:ext cx="6517030" cy="4572000"/>
+          </a:xfrm>
+          <a:prstGeom prst="rect">
+            <a:avLst/>
+          </a:prstGeom>
+          <a:solidFill>
+            <a:srgbClr val="F5F2EC"/>
+          </a:solidFill>
+          <a:ln w="6350">
+            <a:solidFill>
+              <a:srgbClr val="E1DED7"/>
+            </a:solidFill>
+            <a:prstDash val="solid"/>
+          </a:ln>
+        </p:spPr>
+      </p:sp>
+      <p:sp>
+        <p:nvSpPr>
+          <p:cNvPr id="8" name="Text 6"/>
+          <p:cNvSpPr/>
+          <p:nvPr/>
+        </p:nvSpPr>
+        <p:spPr>
+          <a:xfrm>
+            <a:off x="800100" y="1727200"/>
+            <a:ext cx="6034430" cy="4140200"/>
+          </a:xfrm>
+          <a:prstGeom prst="rect">
+            <a:avLst/>
+          </a:prstGeom>
+          <a:noFill/>
+          <a:ln/>
+        </p:spPr>
+        <p:txBody>
+          <a:bodyPr wrap="square" lIns="0" tIns="0" rIns="0" bIns="0" rtlCol="0" anchor="t"/>
+          <a:lstStyle/>
+          <a:p>
+            <a:pPr indent="0" marL="0">
+              <a:lnSpc>
+                <a:spcPct val="160000"/>
+              </a:lnSpc>
+              <a:buNone/>
+            </a:pPr>
+            <a:r>
+              <a:rPr lang="en-US" sz="1400" dirty="0">
+                <a:solidFill>
+                  <a:srgbClr val="332F2A"/>
+                </a:solidFill>
+                <a:latin typeface="IBM Plex Mono" pitchFamily="34" charset="0"/>
+                <a:ea typeface="IBM Plex Mono" pitchFamily="34" charset="-122"/>
+                <a:cs typeface="IBM Plex Mono" pitchFamily="34" charset="-120"/>
+              </a:rPr>
+              <a:t>Examples of correct output:</a:t>
+            </a:r>
+            <a:endParaRPr lang="en-US" sz="1400" dirty="0"/>
+          </a:p>
+          <a:p>
+            <a:pPr indent="0" marL="0">
+              <a:lnSpc>
+                <a:spcPct val="160000"/>
+              </a:lnSpc>
+              <a:buNone/>
+            </a:pPr>
+            <a:endParaRPr lang="en-US" sz="1400" dirty="0"/>
+          </a:p>
+          <a:p>
+            <a:pPr indent="0" marL="0">
+              <a:lnSpc>
+                <a:spcPct val="160000"/>
+              </a:lnSpc>
+              <a:buNone/>
+            </a:pPr>
+            <a:r>
+              <a:rPr lang="en-US" sz="1400" dirty="0">
+                <a:solidFill>
+                  <a:srgbClr val="332F2A"/>
+                </a:solidFill>
+                <a:latin typeface="IBM Plex Mono" pitchFamily="34" charset="0"/>
+                <a:ea typeface="IBM Plex Mono" pitchFamily="34" charset="-122"/>
+                <a:cs typeface="IBM Plex Mono" pitchFamily="34" charset="-120"/>
+              </a:rPr>
+              <a:t>message: "iced choc x2, 15:45, Fai"</a:t>
+            </a:r>
+            <a:endParaRPr lang="en-US" sz="1400" dirty="0"/>
+          </a:p>
+          <a:p>
+            <a:pPr indent="0" marL="0">
+              <a:lnSpc>
+                <a:spcPct val="160000"/>
+              </a:lnSpc>
+              <a:buNone/>
+            </a:pPr>
+            <a:r>
+              <a:rPr lang="en-US" sz="1400" dirty="0">
+                <a:solidFill>
+                  <a:srgbClr val="332F2A"/>
+                </a:solidFill>
+                <a:latin typeface="IBM Plex Mono" pitchFamily="34" charset="0"/>
+                <a:ea typeface="IBM Plex Mono" pitchFamily="34" charset="-122"/>
+                <a:cs typeface="IBM Plex Mono" pitchFamily="34" charset="-120"/>
+              </a:rPr>
+              <a:t>order:   customer: Fai</a:t>
+            </a:r>
+            <a:endParaRPr lang="en-US" sz="1400" dirty="0"/>
+          </a:p>
+          <a:p>
+            <a:pPr indent="0" marL="0">
+              <a:lnSpc>
+                <a:spcPct val="160000"/>
+              </a:lnSpc>
+              <a:buNone/>
+            </a:pPr>
+            <a:r>
+              <a:rPr lang="en-US" sz="1400" dirty="0">
+                <a:solidFill>
+                  <a:srgbClr val="332F2A"/>
+                </a:solidFill>
+                <a:latin typeface="IBM Plex Mono" pitchFamily="34" charset="0"/>
+                <a:ea typeface="IBM Plex Mono" pitchFamily="34" charset="-122"/>
+                <a:cs typeface="IBM Plex Mono" pitchFamily="34" charset="-120"/>
+              </a:rPr>
+              <a:t>         items: [Iced Chocolate x2]</a:t>
+            </a:r>
+            <a:endParaRPr lang="en-US" sz="1400" dirty="0"/>
+          </a:p>
+          <a:p>
+            <a:pPr indent="0" marL="0">
+              <a:lnSpc>
+                <a:spcPct val="160000"/>
+              </a:lnSpc>
+              <a:buNone/>
+            </a:pPr>
+            <a:r>
+              <a:rPr lang="en-US" sz="1400" dirty="0">
+                <a:solidFill>
+                  <a:srgbClr val="332F2A"/>
+                </a:solidFill>
+                <a:latin typeface="IBM Plex Mono" pitchFamily="34" charset="0"/>
+                <a:ea typeface="IBM Plex Mono" pitchFamily="34" charset="-122"/>
+                <a:cs typeface="IBM Plex Mono" pitchFamily="34" charset="-120"/>
+              </a:rPr>
+              <a:t>         pickup: "15:45"</a:t>
+            </a:r>
+            <a:endParaRPr lang="en-US" sz="1400" dirty="0"/>
+          </a:p>
+          <a:p>
+            <a:pPr indent="0" marL="0">
+              <a:lnSpc>
+                <a:spcPct val="160000"/>
+              </a:lnSpc>
+              <a:buNone/>
+            </a:pPr>
+            <a:endParaRPr lang="en-US" sz="1400" dirty="0"/>
+          </a:p>
+          <a:p>
+            <a:pPr indent="0" marL="0">
+              <a:lnSpc>
+                <a:spcPct val="160000"/>
+              </a:lnSpc>
+              <a:buNone/>
+            </a:pPr>
+            <a:r>
+              <a:rPr lang="en-US" sz="1400" dirty="0">
+                <a:solidFill>
+                  <a:srgbClr val="332F2A"/>
+                </a:solidFill>
+                <a:latin typeface="IBM Plex Mono" pitchFamily="34" charset="0"/>
+                <a:ea typeface="IBM Plex Mono" pitchFamily="34" charset="-122"/>
+                <a:cs typeface="IBM Plex Mono" pitchFamily="34" charset="-120"/>
+              </a:rPr>
+              <a:t>message: "one green tea latte, after 4"</a:t>
+            </a:r>
+            <a:endParaRPr lang="en-US" sz="1400" dirty="0"/>
+          </a:p>
+          <a:p>
+            <a:pPr indent="0" marL="0">
+              <a:lnSpc>
+                <a:spcPct val="160000"/>
+              </a:lnSpc>
+              <a:buNone/>
+            </a:pPr>
+            <a:r>
+              <a:rPr lang="en-US" sz="1400" dirty="0">
+                <a:solidFill>
+                  <a:srgbClr val="332F2A"/>
+                </a:solidFill>
+                <a:latin typeface="IBM Plex Mono" pitchFamily="34" charset="0"/>
+                <a:ea typeface="IBM Plex Mono" pitchFamily="34" charset="-122"/>
+                <a:cs typeface="IBM Plex Mono" pitchFamily="34" charset="-120"/>
+              </a:rPr>
+              <a:t>order:   customer: null, needs_review: true</a:t>
+            </a:r>
+            <a:endParaRPr lang="en-US" sz="1400" dirty="0"/>
+          </a:p>
+          <a:p>
+            <a:pPr indent="0" marL="0">
+              <a:lnSpc>
+                <a:spcPct val="160000"/>
+              </a:lnSpc>
+              <a:buNone/>
+            </a:pPr>
+            <a:r>
+              <a:rPr lang="en-US" sz="1400" dirty="0">
+                <a:solidFill>
+                  <a:srgbClr val="332F2A"/>
+                </a:solidFill>
+                <a:latin typeface="IBM Plex Mono" pitchFamily="34" charset="0"/>
+                <a:ea typeface="IBM Plex Mono" pitchFamily="34" charset="-122"/>
+                <a:cs typeface="IBM Plex Mono" pitchFamily="34" charset="-120"/>
+              </a:rPr>
+              <a:t>         note: "no name given"</a:t>
+            </a:r>
+            <a:endParaRPr lang="en-US" sz="1400" dirty="0"/>
+          </a:p>
+        </p:txBody>
+      </p:sp>
+      <p:sp>
+        <p:nvSpPr>
+          <p:cNvPr id="9" name="Text 7"/>
+          <p:cNvSpPr/>
+          <p:nvPr/>
+        </p:nvSpPr>
+        <p:spPr>
+          <a:xfrm>
+            <a:off x="7431430" y="1511300"/>
+            <a:ext cx="4201770" cy="1600200"/>
           </a:xfrm>
           <a:prstGeom prst="rect">
             <a:avLst/>
@@ -5233,7 +5408,7 @@
                 <a:ea typeface="Libre Franklin" pitchFamily="34" charset="-122"/>
                 <a:cs typeface="Libre Franklin" pitchFamily="34" charset="-120"/>
               </a:rPr>
-              <a:t>Write messages whose answers you already know. Score the prompt against them. Change exactly one line, and score it again — kept if it helped, reverted if it did not.</a:t>
+              <a:t>Two or three worked examples teach a format faster than any amount of description, and they are the only reliable way to pin down an edge case you keep losing.</a:t>
             </a:r>
             <a:endParaRPr lang="en-US" sz="1600" dirty="0"/>
           </a:p>
@@ -5241,14 +5416,14 @@
       </p:sp>
       <p:sp>
         <p:nvSpPr>
-          <p:cNvPr id="9" name="Text 6"/>
-          <p:cNvSpPr/>
-          <p:nvPr/>
-        </p:nvSpPr>
-        <p:spPr>
-          <a:xfrm>
-            <a:off x="7099300" y="3238500"/>
-            <a:ext cx="4533900" cy="1305560"/>
+          <p:cNvPr id="10" name="Text 8"/>
+          <p:cNvSpPr/>
+          <p:nvPr/>
+        </p:nvSpPr>
+        <p:spPr>
+          <a:xfrm>
+            <a:off x="7431430" y="3238500"/>
+            <a:ext cx="4201770" cy="1305560"/>
           </a:xfrm>
           <a:prstGeom prst="rect">
             <a:avLst/>
@@ -5275,7 +5450,7 @@
                 <a:ea typeface="Libre Franklin" pitchFamily="34" charset="-122"/>
                 <a:cs typeface="Libre Franklin" pitchFamily="34" charset="-120"/>
               </a:rPr>
-              <a:t>Never judge a prompt by one run. The same prompt on the same message answers differently on different days, which is why you measure many and never one.</a:t>
+              <a:t>Notice the second one: an example of getting it right by refusing. Examples teach behaviour, not just shape.</a:t>
             </a:r>
             <a:endParaRPr lang="en-US" sz="1600" dirty="0"/>
           </a:p>
@@ -5283,43 +5458,63 @@
       </p:sp>
       <p:sp>
         <p:nvSpPr>
-          <p:cNvPr id="10" name="Text 7"/>
-          <p:cNvSpPr/>
-          <p:nvPr/>
-        </p:nvSpPr>
-        <p:spPr>
-          <a:xfrm>
-            <a:off x="7099300" y="5956300"/>
-            <a:ext cx="4533900" cy="215900"/>
-          </a:xfrm>
-          <a:prstGeom prst="rect">
-            <a:avLst/>
-          </a:prstGeom>
-          <a:noFill/>
-          <a:ln/>
-        </p:spPr>
-        <p:txBody>
-          <a:bodyPr wrap="square" lIns="0" tIns="0" rIns="0" bIns="0" rtlCol="0" anchor="t"/>
-          <a:lstStyle/>
-          <a:p>
-            <a:pPr algn="l" indent="0" marL="0">
-              <a:lnSpc>
-                <a:spcPct val="145000"/>
-              </a:lnSpc>
-              <a:buNone/>
-            </a:pPr>
-            <a:r>
-              <a:rPr lang="en-US" sz="1200" dirty="0">
-                <a:solidFill>
-                  <a:srgbClr val="99948B"/>
-                </a:solidFill>
-                <a:latin typeface="IBM Plex Mono" pitchFamily="34" charset="0"/>
-                <a:ea typeface="IBM Plex Mono" pitchFamily="34" charset="-122"/>
-                <a:cs typeface="IBM Plex Mono" pitchFamily="34" charset="-120"/>
-              </a:rPr>
-              <a:t>Fig. 11 — the loop that actually improves prompts</a:t>
-            </a:r>
-            <a:endParaRPr lang="en-US" sz="1200" dirty="0"/>
+          <p:cNvPr id="11" name="Shape 9"/>
+          <p:cNvSpPr/>
+          <p:nvPr/>
+        </p:nvSpPr>
+        <p:spPr>
+          <a:xfrm>
+            <a:off x="7431430" y="5384800"/>
+            <a:ext cx="12700" cy="698500"/>
+          </a:xfrm>
+          <a:prstGeom prst="rect">
+            <a:avLst/>
+          </a:prstGeom>
+          <a:solidFill>
+            <a:srgbClr val="A87A2E"/>
+          </a:solidFill>
+          <a:ln/>
+        </p:spPr>
+      </p:sp>
+      <p:sp>
+        <p:nvSpPr>
+          <p:cNvPr id="12" name="Text 10"/>
+          <p:cNvSpPr/>
+          <p:nvPr/>
+        </p:nvSpPr>
+        <p:spPr>
+          <a:xfrm>
+            <a:off x="7596530" y="5416550"/>
+            <a:ext cx="4036670" cy="698500"/>
+          </a:xfrm>
+          <a:prstGeom prst="rect">
+            <a:avLst/>
+          </a:prstGeom>
+          <a:noFill/>
+          <a:ln/>
+        </p:spPr>
+        <p:txBody>
+          <a:bodyPr wrap="square" lIns="0" tIns="0" rIns="0" bIns="0" rtlCol="0" anchor="t"/>
+          <a:lstStyle/>
+          <a:p>
+            <a:pPr algn="l" indent="0" marL="0">
+              <a:lnSpc>
+                <a:spcPct val="140000"/>
+              </a:lnSpc>
+              <a:buNone/>
+            </a:pPr>
+            <a:r>
+              <a:rPr lang="en-US" sz="1500" dirty="0">
+                <a:solidFill>
+                  <a:srgbClr val="332F2A"/>
+                </a:solidFill>
+                <a:latin typeface="Libre Franklin" pitchFamily="34" charset="0"/>
+                <a:ea typeface="Libre Franklin" pitchFamily="34" charset="-122"/>
+                <a:cs typeface="Libre Franklin" pitchFamily="34" charset="-120"/>
+              </a:rPr>
+              <a:t>Show the model the case you keep failing, done correctly.</a:t>
+            </a:r>
+            <a:endParaRPr lang="en-US" sz="1500" dirty="0"/>
           </a:p>
         </p:txBody>
       </p:sp>
@@ -5337,7 +5532,7 @@
     <p:bg>
       <p:bgPr>
         <a:solidFill>
-          <a:srgbClr val="F5F2EC"/>
+          <a:srgbClr val="FCFBF8"/>
         </a:solidFill>
       </p:bgPr>
     </p:bg>
@@ -5363,37 +5558,37 @@
         </p:nvSpPr>
         <p:spPr>
           <a:xfrm>
-            <a:off x="558800" y="2286000"/>
-            <a:ext cx="11074400" cy="254000"/>
-          </a:xfrm>
-          <a:prstGeom prst="rect">
-            <a:avLst/>
-          </a:prstGeom>
-          <a:noFill/>
-          <a:ln/>
-        </p:spPr>
-        <p:txBody>
-          <a:bodyPr wrap="square" lIns="0" tIns="0" rIns="0" bIns="0" rtlCol="0" anchor="t"/>
-          <a:lstStyle/>
-          <a:p>
-            <a:pPr algn="l" indent="0" marL="0">
-              <a:lnSpc>
-                <a:spcPct val="145000"/>
-              </a:lnSpc>
-              <a:buNone/>
-            </a:pPr>
-            <a:r>
-              <a:rPr lang="en-US" sz="1300" spc="182" kern="0" dirty="0">
-                <a:solidFill>
-                  <a:srgbClr val="A87A2E"/>
+            <a:off x="558800" y="355600"/>
+            <a:ext cx="11074400" cy="215900"/>
+          </a:xfrm>
+          <a:prstGeom prst="rect">
+            <a:avLst/>
+          </a:prstGeom>
+          <a:noFill/>
+          <a:ln/>
+        </p:spPr>
+        <p:txBody>
+          <a:bodyPr wrap="square" lIns="0" tIns="0" rIns="0" bIns="0" rtlCol="0" anchor="t"/>
+          <a:lstStyle/>
+          <a:p>
+            <a:pPr algn="l" indent="0" marL="0">
+              <a:lnSpc>
+                <a:spcPct val="145000"/>
+              </a:lnSpc>
+              <a:buNone/>
+            </a:pPr>
+            <a:r>
+              <a:rPr lang="en-US" sz="1200" spc="168" kern="0" dirty="0">
+                <a:solidFill>
+                  <a:srgbClr val="77726A"/>
                 </a:solidFill>
                 <a:latin typeface="IBM Plex Mono" pitchFamily="34" charset="0"/>
                 <a:ea typeface="IBM Plex Mono" pitchFamily="34" charset="-122"/>
                 <a:cs typeface="IBM Plex Mono" pitchFamily="34" charset="-120"/>
               </a:rPr>
-              <a:t>SECTION 04</a:t>
-            </a:r>
-            <a:endParaRPr lang="en-US" sz="1300" dirty="0"/>
+              <a:t>SECTION 03</a:t>
+            </a:r>
+            <a:endParaRPr lang="en-US" sz="1200" dirty="0"/>
           </a:p>
         </p:txBody>
       </p:sp>
@@ -5405,27 +5600,27 @@
         </p:nvSpPr>
         <p:spPr>
           <a:xfrm>
-            <a:off x="558800" y="2667000"/>
-            <a:ext cx="8255000" cy="1206500"/>
-          </a:xfrm>
-          <a:prstGeom prst="rect">
-            <a:avLst/>
-          </a:prstGeom>
-          <a:noFill/>
-          <a:ln/>
-        </p:spPr>
-        <p:txBody>
-          <a:bodyPr wrap="square" lIns="0" tIns="0" rIns="0" bIns="0" rtlCol="0" anchor="t"/>
-          <a:lstStyle/>
-          <a:p>
-            <a:pPr algn="l" indent="0" marL="0">
-              <a:lnSpc>
-                <a:spcPct val="108000"/>
-              </a:lnSpc>
-              <a:buNone/>
-            </a:pPr>
-            <a:r>
-              <a:rPr lang="en-US" sz="4000" b="1" dirty="0">
+            <a:off x="558800" y="635000"/>
+            <a:ext cx="11074400" cy="508000"/>
+          </a:xfrm>
+          <a:prstGeom prst="rect">
+            <a:avLst/>
+          </a:prstGeom>
+          <a:noFill/>
+          <a:ln/>
+        </p:spPr>
+        <p:txBody>
+          <a:bodyPr wrap="square" lIns="0" tIns="0" rIns="0" bIns="0" rtlCol="0" anchor="t"/>
+          <a:lstStyle/>
+          <a:p>
+            <a:pPr algn="l" indent="0" marL="0">
+              <a:lnSpc>
+                <a:spcPct val="110000"/>
+              </a:lnSpc>
+              <a:buNone/>
+            </a:pPr>
+            <a:r>
+              <a:rPr lang="en-US" sz="2800" b="1" dirty="0">
                 <a:solidFill>
                   <a:srgbClr val="332F2A"/>
                 </a:solidFill>
@@ -5433,22 +5628,126 @@
                 <a:ea typeface="Libre Franklin" pitchFamily="34" charset="-122"/>
                 <a:cs typeface="Libre Franklin" pitchFamily="34" charset="-120"/>
               </a:rPr>
-              <a:t>Lab 3 — the Intake Desk</a:t>
-            </a:r>
-            <a:endParaRPr lang="en-US" sz="4000" dirty="0"/>
-          </a:p>
-        </p:txBody>
-      </p:sp>
-      <p:sp>
-        <p:nvSpPr>
-          <p:cNvPr id="4" name="Text 2"/>
-          <p:cNvSpPr/>
-          <p:nvPr/>
-        </p:nvSpPr>
-        <p:spPr>
-          <a:xfrm>
-            <a:off x="558800" y="4064000"/>
-            <a:ext cx="6985000" cy="635000"/>
+              <a:t>What examples cost</a:t>
+            </a:r>
+            <a:endParaRPr lang="en-US" sz="2800" dirty="0"/>
+          </a:p>
+        </p:txBody>
+      </p:sp>
+      <p:sp>
+        <p:nvSpPr>
+          <p:cNvPr id="4" name="Shape 2"/>
+          <p:cNvSpPr/>
+          <p:nvPr/>
+        </p:nvSpPr>
+        <p:spPr>
+          <a:xfrm>
+            <a:off x="558800" y="1181100"/>
+            <a:ext cx="11074400" cy="6350"/>
+          </a:xfrm>
+          <a:prstGeom prst="rect">
+            <a:avLst/>
+          </a:prstGeom>
+          <a:solidFill>
+            <a:srgbClr val="E1DED7"/>
+          </a:solidFill>
+          <a:ln/>
+        </p:spPr>
+      </p:sp>
+      <p:sp>
+        <p:nvSpPr>
+          <p:cNvPr id="5" name="Text 3"/>
+          <p:cNvSpPr/>
+          <p:nvPr/>
+        </p:nvSpPr>
+        <p:spPr>
+          <a:xfrm>
+            <a:off x="558800" y="6337300"/>
+            <a:ext cx="9804400" cy="215900"/>
+          </a:xfrm>
+          <a:prstGeom prst="rect">
+            <a:avLst/>
+          </a:prstGeom>
+          <a:noFill/>
+          <a:ln/>
+        </p:spPr>
+        <p:txBody>
+          <a:bodyPr wrap="square" lIns="0" tIns="0" rIns="0" bIns="0" rtlCol="0" anchor="t"/>
+          <a:lstStyle/>
+          <a:p>
+            <a:pPr algn="l" indent="0" marL="0">
+              <a:lnSpc>
+                <a:spcPct val="145000"/>
+              </a:lnSpc>
+              <a:buNone/>
+            </a:pPr>
+            <a:r>
+              <a:rPr lang="en-US" sz="1200" dirty="0">
+                <a:solidFill>
+                  <a:srgbClr val="99948B"/>
+                </a:solidFill>
+                <a:latin typeface="IBM Plex Mono" pitchFamily="34" charset="0"/>
+                <a:ea typeface="IBM Plex Mono" pitchFamily="34" charset="-122"/>
+                <a:cs typeface="IBM Plex Mono" pitchFamily="34" charset="-120"/>
+              </a:rPr>
+              <a:t>AI for Software Development · Session 3</a:t>
+            </a:r>
+            <a:endParaRPr lang="en-US" sz="1200" dirty="0"/>
+          </a:p>
+        </p:txBody>
+      </p:sp>
+      <p:sp>
+        <p:nvSpPr>
+          <p:cNvPr id="6" name="Text 4"/>
+          <p:cNvSpPr/>
+          <p:nvPr/>
+        </p:nvSpPr>
+        <p:spPr>
+          <a:xfrm>
+            <a:off x="10363200" y="6337300"/>
+            <a:ext cx="1270000" cy="215900"/>
+          </a:xfrm>
+          <a:prstGeom prst="rect">
+            <a:avLst/>
+          </a:prstGeom>
+          <a:noFill/>
+          <a:ln/>
+        </p:spPr>
+        <p:txBody>
+          <a:bodyPr wrap="square" lIns="0" tIns="0" rIns="0" bIns="0" rtlCol="0" anchor="t"/>
+          <a:lstStyle/>
+          <a:p>
+            <a:pPr algn="r" indent="0" marL="0">
+              <a:lnSpc>
+                <a:spcPct val="145000"/>
+              </a:lnSpc>
+              <a:buNone/>
+            </a:pPr>
+            <a:r>
+              <a:rPr lang="en-US" sz="1200" dirty="0">
+                <a:solidFill>
+                  <a:srgbClr val="99948B"/>
+                </a:solidFill>
+                <a:latin typeface="IBM Plex Mono" pitchFamily="34" charset="0"/>
+                <a:ea typeface="IBM Plex Mono" pitchFamily="34" charset="-122"/>
+                <a:cs typeface="IBM Plex Mono" pitchFamily="34" charset="-120"/>
+              </a:rPr>
+              <a:t>15</a:t>
+            </a:r>
+            <a:endParaRPr lang="en-US" sz="1200" dirty="0"/>
+          </a:p>
+        </p:txBody>
+      </p:sp>
+      <p:sp>
+        <p:nvSpPr>
+          <p:cNvPr id="7" name="Text 5"/>
+          <p:cNvSpPr/>
+          <p:nvPr/>
+        </p:nvSpPr>
+        <p:spPr>
+          <a:xfrm>
+            <a:off x="558800" y="1511300"/>
+            <a:ext cx="190500" cy="317500"/>
           </a:xfrm>
           <a:prstGeom prst="rect">
             <a:avLst/>
@@ -5469,13 +5768,358 @@
             <a:r>
               <a:rPr lang="en-US" sz="1700" dirty="0">
                 <a:solidFill>
-                  <a:srgbClr val="77726A"/>
+                  <a:srgbClr val="A87A2E"/>
                 </a:solidFill>
                 <a:latin typeface="Libre Franklin" pitchFamily="34" charset="0"/>
                 <a:ea typeface="Libre Franklin" pitchFamily="34" charset="-122"/>
                 <a:cs typeface="Libre Franklin" pitchFamily="34" charset="-120"/>
               </a:rPr>
-              <a:t>Sixty-five minutes. A regex parser, a model, and a queue for a human.</a:t>
+              <a:t>—</a:t>
+            </a:r>
+            <a:endParaRPr lang="en-US" sz="1700" dirty="0"/>
+          </a:p>
+        </p:txBody>
+      </p:sp>
+      <p:sp>
+        <p:nvSpPr>
+          <p:cNvPr id="8" name="Text 6"/>
+          <p:cNvSpPr/>
+          <p:nvPr/>
+        </p:nvSpPr>
+        <p:spPr>
+          <a:xfrm>
+            <a:off x="927100" y="1511300"/>
+            <a:ext cx="9156700" cy="753110"/>
+          </a:xfrm>
+          <a:prstGeom prst="rect">
+            <a:avLst/>
+          </a:prstGeom>
+          <a:noFill/>
+          <a:ln/>
+        </p:spPr>
+        <p:txBody>
+          <a:bodyPr wrap="square" lIns="0" tIns="0" rIns="0" bIns="0" rtlCol="0" anchor="t"/>
+          <a:lstStyle/>
+          <a:p>
+            <a:pPr algn="l" indent="0" marL="0">
+              <a:lnSpc>
+                <a:spcPct val="145000"/>
+              </a:lnSpc>
+              <a:buNone/>
+            </a:pPr>
+            <a:r>
+              <a:rPr lang="en-US" sz="1700" b="1" dirty="0">
+                <a:solidFill>
+                  <a:srgbClr val="332F2A"/>
+                </a:solidFill>
+                <a:latin typeface="Libre Franklin" pitchFamily="34" charset="0"/>
+                <a:ea typeface="Libre Franklin" pitchFamily="34" charset="-122"/>
+                <a:cs typeface="Libre Franklin" pitchFamily="34" charset="-120"/>
+              </a:rPr>
+              <a:t>They are tokens, every single call. </a:t>
+            </a:r>
+            <a:pPr algn="l" indent="0" marL="0">
+              <a:lnSpc>
+                <a:spcPct val="145000"/>
+              </a:lnSpc>
+              <a:buNone/>
+            </a:pPr>
+            <a:r>
+              <a:rPr lang="en-US" sz="1700" dirty="0">
+                <a:solidFill>
+                  <a:srgbClr val="332F2A"/>
+                </a:solidFill>
+                <a:latin typeface="Libre Franklin" pitchFamily="34" charset="0"/>
+                <a:ea typeface="Libre Franklin" pitchFamily="34" charset="-122"/>
+                <a:cs typeface="Libre Franklin" pitchFamily="34" charset="-120"/>
+              </a:rPr>
+              <a:t>Three examples in a prompt you send ten thousand times is three thousand examples paid for.</a:t>
+            </a:r>
+            <a:endParaRPr lang="en-US" sz="1700" dirty="0"/>
+          </a:p>
+        </p:txBody>
+      </p:sp>
+      <p:sp>
+        <p:nvSpPr>
+          <p:cNvPr id="9" name="Text 7"/>
+          <p:cNvSpPr/>
+          <p:nvPr/>
+        </p:nvSpPr>
+        <p:spPr>
+          <a:xfrm>
+            <a:off x="558800" y="2391410"/>
+            <a:ext cx="190500" cy="317500"/>
+          </a:xfrm>
+          <a:prstGeom prst="rect">
+            <a:avLst/>
+          </a:prstGeom>
+          <a:noFill/>
+          <a:ln/>
+        </p:spPr>
+        <p:txBody>
+          <a:bodyPr wrap="square" lIns="0" tIns="0" rIns="0" bIns="0" rtlCol="0" anchor="t"/>
+          <a:lstStyle/>
+          <a:p>
+            <a:pPr algn="l" indent="0" marL="0">
+              <a:lnSpc>
+                <a:spcPct val="140000"/>
+              </a:lnSpc>
+              <a:buNone/>
+            </a:pPr>
+            <a:r>
+              <a:rPr lang="en-US" sz="1700" dirty="0">
+                <a:solidFill>
+                  <a:srgbClr val="A87A2E"/>
+                </a:solidFill>
+                <a:latin typeface="Libre Franklin" pitchFamily="34" charset="0"/>
+                <a:ea typeface="Libre Franklin" pitchFamily="34" charset="-122"/>
+                <a:cs typeface="Libre Franklin" pitchFamily="34" charset="-120"/>
+              </a:rPr>
+              <a:t>—</a:t>
+            </a:r>
+            <a:endParaRPr lang="en-US" sz="1700" dirty="0"/>
+          </a:p>
+        </p:txBody>
+      </p:sp>
+      <p:sp>
+        <p:nvSpPr>
+          <p:cNvPr id="10" name="Text 8"/>
+          <p:cNvSpPr/>
+          <p:nvPr/>
+        </p:nvSpPr>
+        <p:spPr>
+          <a:xfrm>
+            <a:off x="927100" y="2391410"/>
+            <a:ext cx="9156700" cy="753110"/>
+          </a:xfrm>
+          <a:prstGeom prst="rect">
+            <a:avLst/>
+          </a:prstGeom>
+          <a:noFill/>
+          <a:ln/>
+        </p:spPr>
+        <p:txBody>
+          <a:bodyPr wrap="square" lIns="0" tIns="0" rIns="0" bIns="0" rtlCol="0" anchor="t"/>
+          <a:lstStyle/>
+          <a:p>
+            <a:pPr algn="l" indent="0" marL="0">
+              <a:lnSpc>
+                <a:spcPct val="145000"/>
+              </a:lnSpc>
+              <a:buNone/>
+            </a:pPr>
+            <a:r>
+              <a:rPr lang="en-US" sz="1700" b="1" dirty="0">
+                <a:solidFill>
+                  <a:srgbClr val="332F2A"/>
+                </a:solidFill>
+                <a:latin typeface="Libre Franklin" pitchFamily="34" charset="0"/>
+                <a:ea typeface="Libre Franklin" pitchFamily="34" charset="-122"/>
+                <a:cs typeface="Libre Franklin" pitchFamily="34" charset="-120"/>
+              </a:rPr>
+              <a:t>They bias hard. </a:t>
+            </a:r>
+            <a:pPr algn="l" indent="0" marL="0">
+              <a:lnSpc>
+                <a:spcPct val="145000"/>
+              </a:lnSpc>
+              <a:buNone/>
+            </a:pPr>
+            <a:r>
+              <a:rPr lang="en-US" sz="1700" dirty="0">
+                <a:solidFill>
+                  <a:srgbClr val="332F2A"/>
+                </a:solidFill>
+                <a:latin typeface="Libre Franklin" pitchFamily="34" charset="0"/>
+                <a:ea typeface="Libre Franklin" pitchFamily="34" charset="-122"/>
+                <a:cs typeface="Libre Franklin" pitchFamily="34" charset="-120"/>
+              </a:rPr>
+              <a:t>Show three coffee orders and it will read a cake order as coffee. Vary them or pay for it.</a:t>
+            </a:r>
+            <a:endParaRPr lang="en-US" sz="1700" dirty="0"/>
+          </a:p>
+        </p:txBody>
+      </p:sp>
+      <p:sp>
+        <p:nvSpPr>
+          <p:cNvPr id="11" name="Text 9"/>
+          <p:cNvSpPr/>
+          <p:nvPr/>
+        </p:nvSpPr>
+        <p:spPr>
+          <a:xfrm>
+            <a:off x="558800" y="3271520"/>
+            <a:ext cx="190500" cy="317500"/>
+          </a:xfrm>
+          <a:prstGeom prst="rect">
+            <a:avLst/>
+          </a:prstGeom>
+          <a:noFill/>
+          <a:ln/>
+        </p:spPr>
+        <p:txBody>
+          <a:bodyPr wrap="square" lIns="0" tIns="0" rIns="0" bIns="0" rtlCol="0" anchor="t"/>
+          <a:lstStyle/>
+          <a:p>
+            <a:pPr algn="l" indent="0" marL="0">
+              <a:lnSpc>
+                <a:spcPct val="140000"/>
+              </a:lnSpc>
+              <a:buNone/>
+            </a:pPr>
+            <a:r>
+              <a:rPr lang="en-US" sz="1700" dirty="0">
+                <a:solidFill>
+                  <a:srgbClr val="A87A2E"/>
+                </a:solidFill>
+                <a:latin typeface="Libre Franklin" pitchFamily="34" charset="0"/>
+                <a:ea typeface="Libre Franklin" pitchFamily="34" charset="-122"/>
+                <a:cs typeface="Libre Franklin" pitchFamily="34" charset="-120"/>
+              </a:rPr>
+              <a:t>—</a:t>
+            </a:r>
+            <a:endParaRPr lang="en-US" sz="1700" dirty="0"/>
+          </a:p>
+        </p:txBody>
+      </p:sp>
+      <p:sp>
+        <p:nvSpPr>
+          <p:cNvPr id="12" name="Text 10"/>
+          <p:cNvSpPr/>
+          <p:nvPr/>
+        </p:nvSpPr>
+        <p:spPr>
+          <a:xfrm>
+            <a:off x="927100" y="3271520"/>
+            <a:ext cx="9156700" cy="753110"/>
+          </a:xfrm>
+          <a:prstGeom prst="rect">
+            <a:avLst/>
+          </a:prstGeom>
+          <a:noFill/>
+          <a:ln/>
+        </p:spPr>
+        <p:txBody>
+          <a:bodyPr wrap="square" lIns="0" tIns="0" rIns="0" bIns="0" rtlCol="0" anchor="t"/>
+          <a:lstStyle/>
+          <a:p>
+            <a:pPr algn="l" indent="0" marL="0">
+              <a:lnSpc>
+                <a:spcPct val="145000"/>
+              </a:lnSpc>
+              <a:buNone/>
+            </a:pPr>
+            <a:r>
+              <a:rPr lang="en-US" sz="1700" b="1" dirty="0">
+                <a:solidFill>
+                  <a:srgbClr val="332F2A"/>
+                </a:solidFill>
+                <a:latin typeface="Libre Franklin" pitchFamily="34" charset="0"/>
+                <a:ea typeface="Libre Franklin" pitchFamily="34" charset="-122"/>
+                <a:cs typeface="Libre Franklin" pitchFamily="34" charset="-120"/>
+              </a:rPr>
+              <a:t>Our café prompt has none. </a:t>
+            </a:r>
+            <a:pPr algn="l" indent="0" marL="0">
+              <a:lnSpc>
+                <a:spcPct val="145000"/>
+              </a:lnSpc>
+              <a:buNone/>
+            </a:pPr>
+            <a:r>
+              <a:rPr lang="en-US" sz="1700" dirty="0">
+                <a:solidFill>
+                  <a:srgbClr val="332F2A"/>
+                </a:solidFill>
+                <a:latin typeface="Libre Franklin" pitchFamily="34" charset="0"/>
+                <a:ea typeface="Libre Franklin" pitchFamily="34" charset="-122"/>
+                <a:cs typeface="Libre Franklin" pitchFamily="34" charset="-120"/>
+              </a:rPr>
+              <a:t>It scores ten out of ten on the inbox without a single example — so adding some would be cost with no gain.</a:t>
+            </a:r>
+            <a:endParaRPr lang="en-US" sz="1700" dirty="0"/>
+          </a:p>
+        </p:txBody>
+      </p:sp>
+      <p:sp>
+        <p:nvSpPr>
+          <p:cNvPr id="13" name="Text 11"/>
+          <p:cNvSpPr/>
+          <p:nvPr/>
+        </p:nvSpPr>
+        <p:spPr>
+          <a:xfrm>
+            <a:off x="558800" y="4151630"/>
+            <a:ext cx="190500" cy="317500"/>
+          </a:xfrm>
+          <a:prstGeom prst="rect">
+            <a:avLst/>
+          </a:prstGeom>
+          <a:noFill/>
+          <a:ln/>
+        </p:spPr>
+        <p:txBody>
+          <a:bodyPr wrap="square" lIns="0" tIns="0" rIns="0" bIns="0" rtlCol="0" anchor="t"/>
+          <a:lstStyle/>
+          <a:p>
+            <a:pPr algn="l" indent="0" marL="0">
+              <a:lnSpc>
+                <a:spcPct val="140000"/>
+              </a:lnSpc>
+              <a:buNone/>
+            </a:pPr>
+            <a:r>
+              <a:rPr lang="en-US" sz="1700" dirty="0">
+                <a:solidFill>
+                  <a:srgbClr val="A87A2E"/>
+                </a:solidFill>
+                <a:latin typeface="Libre Franklin" pitchFamily="34" charset="0"/>
+                <a:ea typeface="Libre Franklin" pitchFamily="34" charset="-122"/>
+                <a:cs typeface="Libre Franklin" pitchFamily="34" charset="-120"/>
+              </a:rPr>
+              <a:t>—</a:t>
+            </a:r>
+            <a:endParaRPr lang="en-US" sz="1700" dirty="0"/>
+          </a:p>
+        </p:txBody>
+      </p:sp>
+      <p:sp>
+        <p:nvSpPr>
+          <p:cNvPr id="14" name="Text 12"/>
+          <p:cNvSpPr/>
+          <p:nvPr/>
+        </p:nvSpPr>
+        <p:spPr>
+          <a:xfrm>
+            <a:off x="927100" y="4151630"/>
+            <a:ext cx="9156700" cy="440055"/>
+          </a:xfrm>
+          <a:prstGeom prst="rect">
+            <a:avLst/>
+          </a:prstGeom>
+          <a:noFill/>
+          <a:ln/>
+        </p:spPr>
+        <p:txBody>
+          <a:bodyPr wrap="square" lIns="0" tIns="0" rIns="0" bIns="0" rtlCol="0" anchor="t"/>
+          <a:lstStyle/>
+          <a:p>
+            <a:pPr algn="l" indent="0" marL="0">
+              <a:lnSpc>
+                <a:spcPct val="145000"/>
+              </a:lnSpc>
+              <a:buNone/>
+            </a:pPr>
+            <a:r>
+              <a:rPr lang="en-US" sz="1700" dirty="0">
+                <a:solidFill>
+                  <a:srgbClr val="332F2A"/>
+                </a:solidFill>
+                <a:latin typeface="Libre Franklin" pitchFamily="34" charset="0"/>
+                <a:ea typeface="Libre Franklin" pitchFamily="34" charset="-122"/>
+                <a:cs typeface="Libre Franklin" pitchFamily="34" charset="-120"/>
+              </a:rPr>
+              <a:t>Reach for examples when a rule keeps failing, not by default.</a:t>
             </a:r>
             <a:endParaRPr lang="en-US" sz="1700" dirty="0"/>
           </a:p>
@@ -5549,7 +6193,7 @@
                 <a:ea typeface="IBM Plex Mono" pitchFamily="34" charset="-122"/>
                 <a:cs typeface="IBM Plex Mono" pitchFamily="34" charset="-120"/>
               </a:rPr>
-              <a:t>SECTION 04</a:t>
+              <a:t>SECTION 03</a:t>
             </a:r>
             <a:endParaRPr lang="en-US" sz="1200" dirty="0"/>
           </a:p>
@@ -5591,7 +6235,7 @@
                 <a:ea typeface="Libre Franklin" pitchFamily="34" charset="-122"/>
                 <a:cs typeface="Libre Franklin" pitchFamily="34" charset="-120"/>
               </a:rPr>
-              <a:t>Four checkpoints</a:t>
+              <a:t>Making it better on purpose</a:t>
             </a:r>
             <a:endParaRPr lang="en-US" sz="2800" dirty="0"/>
           </a:p>
@@ -5701,407 +6345,152 @@
           </a:p>
         </p:txBody>
       </p:sp>
-      <p:sp>
-        <p:nvSpPr>
-          <p:cNvPr id="7" name="Text 5"/>
-          <p:cNvSpPr/>
-          <p:nvPr/>
-        </p:nvSpPr>
+      <p:pic>
+        <p:nvPicPr>
+          <p:cNvPr id="7" name="Image 0" descr="figures/fig-prompt-loop.png">    </p:cNvPr>
+          <p:cNvPicPr>
+            <a:picLocks noChangeAspect="1"/>
+          </p:cNvPicPr>
+          <p:nvPr/>
+        </p:nvPicPr>
+        <p:blipFill>
+          <a:blip r:embed="rId1"/>
+          <a:srcRect l="0" r="0" t="0" b="0"/>
+          <a:stretch/>
+        </p:blipFill>
         <p:spPr>
           <a:xfrm>
             <a:off x="558800" y="1511300"/>
-            <a:ext cx="190500" cy="317500"/>
-          </a:xfrm>
-          <a:prstGeom prst="rect">
-            <a:avLst/>
-          </a:prstGeom>
-          <a:noFill/>
-          <a:ln/>
-        </p:spPr>
-        <p:txBody>
-          <a:bodyPr wrap="square" lIns="0" tIns="0" rIns="0" bIns="0" rtlCol="0" anchor="t"/>
-          <a:lstStyle/>
-          <a:p>
-            <a:pPr algn="l" indent="0" marL="0">
-              <a:lnSpc>
-                <a:spcPct val="140000"/>
-              </a:lnSpc>
-              <a:buNone/>
-            </a:pPr>
-            <a:r>
-              <a:rPr lang="en-US" sz="1700" dirty="0">
-                <a:solidFill>
-                  <a:srgbClr val="A87A2E"/>
+            <a:ext cx="6134100" cy="4572000"/>
+          </a:xfrm>
+          <a:prstGeom prst="rect">
+            <a:avLst/>
+          </a:prstGeom>
+        </p:spPr>
+      </p:pic>
+      <p:sp>
+        <p:nvSpPr>
+          <p:cNvPr id="8" name="Text 5"/>
+          <p:cNvSpPr/>
+          <p:nvPr/>
+        </p:nvSpPr>
+        <p:spPr>
+          <a:xfrm>
+            <a:off x="7099300" y="1511300"/>
+            <a:ext cx="4533900" cy="1600200"/>
+          </a:xfrm>
+          <a:prstGeom prst="rect">
+            <a:avLst/>
+          </a:prstGeom>
+          <a:noFill/>
+          <a:ln/>
+        </p:spPr>
+        <p:txBody>
+          <a:bodyPr wrap="square" lIns="0" tIns="0" rIns="0" bIns="0" rtlCol="0" anchor="t"/>
+          <a:lstStyle/>
+          <a:p>
+            <a:pPr algn="l" indent="0" marL="0">
+              <a:lnSpc>
+                <a:spcPct val="145000"/>
+              </a:lnSpc>
+              <a:buNone/>
+            </a:pPr>
+            <a:r>
+              <a:rPr lang="en-US" sz="1600" dirty="0">
+                <a:solidFill>
+                  <a:srgbClr val="332F2A"/>
                 </a:solidFill>
                 <a:latin typeface="Libre Franklin" pitchFamily="34" charset="0"/>
                 <a:ea typeface="Libre Franklin" pitchFamily="34" charset="-122"/>
                 <a:cs typeface="Libre Franklin" pitchFamily="34" charset="-120"/>
               </a:rPr>
-              <a:t>—</a:t>
-            </a:r>
-            <a:endParaRPr lang="en-US" sz="1700" dirty="0"/>
-          </a:p>
-        </p:txBody>
-      </p:sp>
-      <p:sp>
-        <p:nvSpPr>
-          <p:cNvPr id="8" name="Text 6"/>
-          <p:cNvSpPr/>
-          <p:nvPr/>
-        </p:nvSpPr>
-        <p:spPr>
-          <a:xfrm>
-            <a:off x="927100" y="1511300"/>
-            <a:ext cx="9156700" cy="753110"/>
-          </a:xfrm>
-          <a:prstGeom prst="rect">
-            <a:avLst/>
-          </a:prstGeom>
-          <a:noFill/>
-          <a:ln/>
-        </p:spPr>
-        <p:txBody>
-          <a:bodyPr wrap="square" lIns="0" tIns="0" rIns="0" bIns="0" rtlCol="0" anchor="t"/>
-          <a:lstStyle/>
-          <a:p>
-            <a:pPr algn="l" indent="0" marL="0">
-              <a:lnSpc>
-                <a:spcPct val="145000"/>
-              </a:lnSpc>
-              <a:buNone/>
-            </a:pPr>
-            <a:r>
-              <a:rPr lang="en-US" sz="1700" b="1" dirty="0">
-                <a:solidFill>
-                  <a:srgbClr val="332F2A"/>
+              <a:t>Write messages whose answers you already know. Score the prompt against them. Change exactly one line, and score it again — kept if it helped, reverted if it did not.</a:t>
+            </a:r>
+            <a:endParaRPr lang="en-US" sz="1600" dirty="0"/>
+          </a:p>
+        </p:txBody>
+      </p:sp>
+      <p:sp>
+        <p:nvSpPr>
+          <p:cNvPr id="9" name="Text 6"/>
+          <p:cNvSpPr/>
+          <p:nvPr/>
+        </p:nvSpPr>
+        <p:spPr>
+          <a:xfrm>
+            <a:off x="7099300" y="3238500"/>
+            <a:ext cx="4533900" cy="1305560"/>
+          </a:xfrm>
+          <a:prstGeom prst="rect">
+            <a:avLst/>
+          </a:prstGeom>
+          <a:noFill/>
+          <a:ln/>
+        </p:spPr>
+        <p:txBody>
+          <a:bodyPr wrap="square" lIns="0" tIns="0" rIns="0" bIns="0" rtlCol="0" anchor="t"/>
+          <a:lstStyle/>
+          <a:p>
+            <a:pPr algn="l" indent="0" marL="0">
+              <a:lnSpc>
+                <a:spcPct val="145000"/>
+              </a:lnSpc>
+              <a:buNone/>
+            </a:pPr>
+            <a:r>
+              <a:rPr lang="en-US" sz="1600" dirty="0">
+                <a:solidFill>
+                  <a:srgbClr val="77726A"/>
                 </a:solidFill>
                 <a:latin typeface="Libre Franklin" pitchFamily="34" charset="0"/>
                 <a:ea typeface="Libre Franklin" pitchFamily="34" charset="-122"/>
                 <a:cs typeface="Libre Franklin" pitchFamily="34" charset="-120"/>
               </a:rPr>
-              <a:t>Run the rules parser. </a:t>
-            </a:r>
-            <a:pPr algn="l" indent="0" marL="0">
-              <a:lnSpc>
-                <a:spcPct val="145000"/>
-              </a:lnSpc>
-              <a:buNone/>
-            </a:pPr>
-            <a:r>
-              <a:rPr lang="en-US" sz="1700" dirty="0">
-                <a:solidFill>
-                  <a:srgbClr val="332F2A"/>
-                </a:solidFill>
-                <a:latin typeface="Libre Franklin" pitchFamily="34" charset="0"/>
-                <a:ea typeface="Libre Franklin" pitchFamily="34" charset="-122"/>
-                <a:cs typeface="Libre Franklin" pitchFamily="34" charset="-120"/>
-              </a:rPr>
-              <a:t>Ten real messages, four of them read correctly. Look at the six it misses and ask how many more rules you would need.</a:t>
-            </a:r>
-            <a:endParaRPr lang="en-US" sz="1700" dirty="0"/>
-          </a:p>
-        </p:txBody>
-      </p:sp>
-      <p:sp>
-        <p:nvSpPr>
-          <p:cNvPr id="9" name="Text 7"/>
-          <p:cNvSpPr/>
-          <p:nvPr/>
-        </p:nvSpPr>
-        <p:spPr>
-          <a:xfrm>
-            <a:off x="558800" y="2391410"/>
-            <a:ext cx="190500" cy="317500"/>
-          </a:xfrm>
-          <a:prstGeom prst="rect">
-            <a:avLst/>
-          </a:prstGeom>
-          <a:noFill/>
-          <a:ln/>
-        </p:spPr>
-        <p:txBody>
-          <a:bodyPr wrap="square" lIns="0" tIns="0" rIns="0" bIns="0" rtlCol="0" anchor="t"/>
-          <a:lstStyle/>
-          <a:p>
-            <a:pPr algn="l" indent="0" marL="0">
-              <a:lnSpc>
-                <a:spcPct val="140000"/>
-              </a:lnSpc>
-              <a:buNone/>
-            </a:pPr>
-            <a:r>
-              <a:rPr lang="en-US" sz="1700" dirty="0">
-                <a:solidFill>
-                  <a:srgbClr val="A87A2E"/>
-                </a:solidFill>
-                <a:latin typeface="Libre Franklin" pitchFamily="34" charset="0"/>
-                <a:ea typeface="Libre Franklin" pitchFamily="34" charset="-122"/>
-                <a:cs typeface="Libre Franklin" pitchFamily="34" charset="-120"/>
-              </a:rPr>
-              <a:t>—</a:t>
-            </a:r>
-            <a:endParaRPr lang="en-US" sz="1700" dirty="0"/>
-          </a:p>
-        </p:txBody>
-      </p:sp>
-      <p:sp>
-        <p:nvSpPr>
-          <p:cNvPr id="10" name="Text 8"/>
-          <p:cNvSpPr/>
-          <p:nvPr/>
-        </p:nvSpPr>
-        <p:spPr>
-          <a:xfrm>
-            <a:off x="927100" y="2391410"/>
-            <a:ext cx="9156700" cy="753110"/>
-          </a:xfrm>
-          <a:prstGeom prst="rect">
-            <a:avLst/>
-          </a:prstGeom>
-          <a:noFill/>
-          <a:ln/>
-        </p:spPr>
-        <p:txBody>
-          <a:bodyPr wrap="square" lIns="0" tIns="0" rIns="0" bIns="0" rtlCol="0" anchor="t"/>
-          <a:lstStyle/>
-          <a:p>
-            <a:pPr algn="l" indent="0" marL="0">
-              <a:lnSpc>
-                <a:spcPct val="145000"/>
-              </a:lnSpc>
-              <a:buNone/>
-            </a:pPr>
-            <a:r>
-              <a:rPr lang="en-US" sz="1700" b="1" dirty="0">
-                <a:solidFill>
-                  <a:srgbClr val="332F2A"/>
-                </a:solidFill>
-                <a:latin typeface="Libre Franklin" pitchFamily="34" charset="0"/>
-                <a:ea typeface="Libre Franklin" pitchFamily="34" charset="-122"/>
-                <a:cs typeface="Libre Franklin" pitchFamily="34" charset="-120"/>
-              </a:rPr>
-              <a:t>Ask in plain text. </a:t>
-            </a:r>
-            <a:pPr algn="l" indent="0" marL="0">
-              <a:lnSpc>
-                <a:spcPct val="145000"/>
-              </a:lnSpc>
-              <a:buNone/>
-            </a:pPr>
-            <a:r>
-              <a:rPr lang="en-US" sz="1700" dirty="0">
-                <a:solidFill>
-                  <a:srgbClr val="332F2A"/>
-                </a:solidFill>
-                <a:latin typeface="Libre Franklin" pitchFamily="34" charset="0"/>
-                <a:ea typeface="Libre Franklin" pitchFamily="34" charset="-122"/>
-                <a:cs typeface="Libre Franklin" pitchFamily="34" charset="-120"/>
-              </a:rPr>
-              <a:t>The answer will be correct and useless — a sentence, when your till needs fields.</a:t>
-            </a:r>
-            <a:endParaRPr lang="en-US" sz="1700" dirty="0"/>
-          </a:p>
-        </p:txBody>
-      </p:sp>
-      <p:sp>
-        <p:nvSpPr>
-          <p:cNvPr id="11" name="Text 9"/>
-          <p:cNvSpPr/>
-          <p:nvPr/>
-        </p:nvSpPr>
-        <p:spPr>
-          <a:xfrm>
-            <a:off x="558800" y="3271520"/>
-            <a:ext cx="190500" cy="317500"/>
-          </a:xfrm>
-          <a:prstGeom prst="rect">
-            <a:avLst/>
-          </a:prstGeom>
-          <a:noFill/>
-          <a:ln/>
-        </p:spPr>
-        <p:txBody>
-          <a:bodyPr wrap="square" lIns="0" tIns="0" rIns="0" bIns="0" rtlCol="0" anchor="t"/>
-          <a:lstStyle/>
-          <a:p>
-            <a:pPr algn="l" indent="0" marL="0">
-              <a:lnSpc>
-                <a:spcPct val="140000"/>
-              </a:lnSpc>
-              <a:buNone/>
-            </a:pPr>
-            <a:r>
-              <a:rPr lang="en-US" sz="1700" dirty="0">
-                <a:solidFill>
-                  <a:srgbClr val="A87A2E"/>
-                </a:solidFill>
-                <a:latin typeface="Libre Franklin" pitchFamily="34" charset="0"/>
-                <a:ea typeface="Libre Franklin" pitchFamily="34" charset="-122"/>
-                <a:cs typeface="Libre Franklin" pitchFamily="34" charset="-120"/>
-              </a:rPr>
-              <a:t>—</a:t>
-            </a:r>
-            <a:endParaRPr lang="en-US" sz="1700" dirty="0"/>
-          </a:p>
-        </p:txBody>
-      </p:sp>
-      <p:sp>
-        <p:nvSpPr>
-          <p:cNvPr id="12" name="Text 10"/>
-          <p:cNvSpPr/>
-          <p:nvPr/>
-        </p:nvSpPr>
-        <p:spPr>
-          <a:xfrm>
-            <a:off x="927100" y="3271520"/>
-            <a:ext cx="9156700" cy="753110"/>
-          </a:xfrm>
-          <a:prstGeom prst="rect">
-            <a:avLst/>
-          </a:prstGeom>
-          <a:noFill/>
-          <a:ln/>
-        </p:spPr>
-        <p:txBody>
-          <a:bodyPr wrap="square" lIns="0" tIns="0" rIns="0" bIns="0" rtlCol="0" anchor="t"/>
-          <a:lstStyle/>
-          <a:p>
-            <a:pPr algn="l" indent="0" marL="0">
-              <a:lnSpc>
-                <a:spcPct val="145000"/>
-              </a:lnSpc>
-              <a:buNone/>
-            </a:pPr>
-            <a:r>
-              <a:rPr lang="en-US" sz="1700" b="1" dirty="0">
-                <a:solidFill>
-                  <a:srgbClr val="332F2A"/>
-                </a:solidFill>
-                <a:latin typeface="Libre Franklin" pitchFamily="34" charset="0"/>
-                <a:ea typeface="Libre Franklin" pitchFamily="34" charset="-122"/>
-                <a:cs typeface="Libre Franklin" pitchFamily="34" charset="-120"/>
-              </a:rPr>
-              <a:t>Ask for a shape. </a:t>
-            </a:r>
-            <a:pPr algn="l" indent="0" marL="0">
-              <a:lnSpc>
-                <a:spcPct val="145000"/>
-              </a:lnSpc>
-              <a:buNone/>
-            </a:pPr>
-            <a:r>
-              <a:rPr lang="en-US" sz="1700" dirty="0">
-                <a:solidFill>
-                  <a:srgbClr val="332F2A"/>
-                </a:solidFill>
-                <a:latin typeface="Libre Franklin" pitchFamily="34" charset="0"/>
-                <a:ea typeface="Libre Franklin" pitchFamily="34" charset="-122"/>
-                <a:cs typeface="Libre Franklin" pitchFamily="34" charset="-120"/>
-              </a:rPr>
-              <a:t>One argument later, ten messy messages become ten rows. No regular expressions.</a:t>
-            </a:r>
-            <a:endParaRPr lang="en-US" sz="1700" dirty="0"/>
-          </a:p>
-        </p:txBody>
-      </p:sp>
-      <p:sp>
-        <p:nvSpPr>
-          <p:cNvPr id="13" name="Text 11"/>
-          <p:cNvSpPr/>
-          <p:nvPr/>
-        </p:nvSpPr>
-        <p:spPr>
-          <a:xfrm>
-            <a:off x="558800" y="4151630"/>
-            <a:ext cx="190500" cy="317500"/>
-          </a:xfrm>
-          <a:prstGeom prst="rect">
-            <a:avLst/>
-          </a:prstGeom>
-          <a:noFill/>
-          <a:ln/>
-        </p:spPr>
-        <p:txBody>
-          <a:bodyPr wrap="square" lIns="0" tIns="0" rIns="0" bIns="0" rtlCol="0" anchor="t"/>
-          <a:lstStyle/>
-          <a:p>
-            <a:pPr algn="l" indent="0" marL="0">
-              <a:lnSpc>
-                <a:spcPct val="140000"/>
-              </a:lnSpc>
-              <a:buNone/>
-            </a:pPr>
-            <a:r>
-              <a:rPr lang="en-US" sz="1700" dirty="0">
-                <a:solidFill>
-                  <a:srgbClr val="A87A2E"/>
-                </a:solidFill>
-                <a:latin typeface="Libre Franklin" pitchFamily="34" charset="0"/>
-                <a:ea typeface="Libre Franklin" pitchFamily="34" charset="-122"/>
-                <a:cs typeface="Libre Franklin" pitchFamily="34" charset="-120"/>
-              </a:rPr>
-              <a:t>—</a:t>
-            </a:r>
-            <a:endParaRPr lang="en-US" sz="1700" dirty="0"/>
-          </a:p>
-        </p:txBody>
-      </p:sp>
-      <p:sp>
-        <p:nvSpPr>
-          <p:cNvPr id="14" name="Text 12"/>
-          <p:cNvSpPr/>
-          <p:nvPr/>
-        </p:nvSpPr>
-        <p:spPr>
-          <a:xfrm>
-            <a:off x="927100" y="4151630"/>
-            <a:ext cx="9156700" cy="753110"/>
-          </a:xfrm>
-          <a:prstGeom prst="rect">
-            <a:avLst/>
-          </a:prstGeom>
-          <a:noFill/>
-          <a:ln/>
-        </p:spPr>
-        <p:txBody>
-          <a:bodyPr wrap="square" lIns="0" tIns="0" rIns="0" bIns="0" rtlCol="0" anchor="t"/>
-          <a:lstStyle/>
-          <a:p>
-            <a:pPr algn="l" indent="0" marL="0">
-              <a:lnSpc>
-                <a:spcPct val="145000"/>
-              </a:lnSpc>
-              <a:buNone/>
-            </a:pPr>
-            <a:r>
-              <a:rPr lang="en-US" sz="1700" b="1" dirty="0">
-                <a:solidFill>
-                  <a:srgbClr val="332F2A"/>
-                </a:solidFill>
-                <a:latin typeface="Libre Franklin" pitchFamily="34" charset="0"/>
-                <a:ea typeface="Libre Franklin" pitchFamily="34" charset="-122"/>
-                <a:cs typeface="Libre Franklin" pitchFamily="34" charset="-120"/>
-              </a:rPr>
-              <a:t>Score it, then plan for being wrong. </a:t>
-            </a:r>
-            <a:pPr algn="l" indent="0" marL="0">
-              <a:lnSpc>
-                <a:spcPct val="145000"/>
-              </a:lnSpc>
-              <a:buNone/>
-            </a:pPr>
-            <a:r>
-              <a:rPr lang="en-US" sz="1700" dirty="0">
-                <a:solidFill>
-                  <a:srgbClr val="332F2A"/>
-                </a:solidFill>
-                <a:latin typeface="Libre Franklin" pitchFamily="34" charset="0"/>
-                <a:ea typeface="Libre Franklin" pitchFamily="34" charset="-122"/>
-                <a:cs typeface="Libre Franklin" pitchFamily="34" charset="-120"/>
-              </a:rPr>
-              <a:t>Grade yourself against the answer key, and send what the model was unsure about to a human.</a:t>
-            </a:r>
-            <a:endParaRPr lang="en-US" sz="1700" dirty="0"/>
+              <a:t>Never judge a prompt by one run. The same prompt on the same message answers differently on different days, which is why you measure many and never one.</a:t>
+            </a:r>
+            <a:endParaRPr lang="en-US" sz="1600" dirty="0"/>
+          </a:p>
+        </p:txBody>
+      </p:sp>
+      <p:sp>
+        <p:nvSpPr>
+          <p:cNvPr id="10" name="Text 7"/>
+          <p:cNvSpPr/>
+          <p:nvPr/>
+        </p:nvSpPr>
+        <p:spPr>
+          <a:xfrm>
+            <a:off x="7099300" y="5956300"/>
+            <a:ext cx="4533900" cy="215900"/>
+          </a:xfrm>
+          <a:prstGeom prst="rect">
+            <a:avLst/>
+          </a:prstGeom>
+          <a:noFill/>
+          <a:ln/>
+        </p:spPr>
+        <p:txBody>
+          <a:bodyPr wrap="square" lIns="0" tIns="0" rIns="0" bIns="0" rtlCol="0" anchor="t"/>
+          <a:lstStyle/>
+          <a:p>
+            <a:pPr algn="l" indent="0" marL="0">
+              <a:lnSpc>
+                <a:spcPct val="145000"/>
+              </a:lnSpc>
+              <a:buNone/>
+            </a:pPr>
+            <a:r>
+              <a:rPr lang="en-US" sz="1200" dirty="0">
+                <a:solidFill>
+                  <a:srgbClr val="99948B"/>
+                </a:solidFill>
+                <a:latin typeface="IBM Plex Mono" pitchFamily="34" charset="0"/>
+                <a:ea typeface="IBM Plex Mono" pitchFamily="34" charset="-122"/>
+                <a:cs typeface="IBM Plex Mono" pitchFamily="34" charset="-120"/>
+              </a:rPr>
+              <a:t>Fig. 11 — the loop that actually improves prompts</a:t>
+            </a:r>
+            <a:endParaRPr lang="en-US" sz="1200" dirty="0"/>
           </a:p>
         </p:txBody>
       </p:sp>
@@ -6116,6 +6505,164 @@
 <file path=ppt/slides/slide17.xml><?xml version="1.0" encoding="utf-8"?>
 <p:sld xmlns:a="http://schemas.openxmlformats.org/drawingml/2006/main" xmlns:r="http://schemas.openxmlformats.org/officeDocument/2006/relationships" xmlns:p="http://schemas.openxmlformats.org/presentationml/2006/main">
   <p:cSld name="Slide 17">
+    <p:bg>
+      <p:bgPr>
+        <a:solidFill>
+          <a:srgbClr val="F5F2EC"/>
+        </a:solidFill>
+      </p:bgPr>
+    </p:bg>
+    <p:spTree>
+      <p:nvGrpSpPr>
+        <p:cNvPr id="1" name=""/>
+        <p:cNvGrpSpPr/>
+        <p:nvPr/>
+      </p:nvGrpSpPr>
+      <p:grpSpPr>
+        <a:xfrm>
+          <a:off x="0" y="0"/>
+          <a:ext cx="0" cy="0"/>
+          <a:chOff x="0" y="0"/>
+          <a:chExt cx="0" cy="0"/>
+        </a:xfrm>
+      </p:grpSpPr>
+      <p:sp>
+        <p:nvSpPr>
+          <p:cNvPr id="2" name="Text 0"/>
+          <p:cNvSpPr/>
+          <p:nvPr/>
+        </p:nvSpPr>
+        <p:spPr>
+          <a:xfrm>
+            <a:off x="558800" y="2286000"/>
+            <a:ext cx="11074400" cy="254000"/>
+          </a:xfrm>
+          <a:prstGeom prst="rect">
+            <a:avLst/>
+          </a:prstGeom>
+          <a:noFill/>
+          <a:ln/>
+        </p:spPr>
+        <p:txBody>
+          <a:bodyPr wrap="square" lIns="0" tIns="0" rIns="0" bIns="0" rtlCol="0" anchor="t"/>
+          <a:lstStyle/>
+          <a:p>
+            <a:pPr algn="l" indent="0" marL="0">
+              <a:lnSpc>
+                <a:spcPct val="145000"/>
+              </a:lnSpc>
+              <a:buNone/>
+            </a:pPr>
+            <a:r>
+              <a:rPr lang="en-US" sz="1300" spc="182" kern="0" dirty="0">
+                <a:solidFill>
+                  <a:srgbClr val="A87A2E"/>
+                </a:solidFill>
+                <a:latin typeface="IBM Plex Mono" pitchFamily="34" charset="0"/>
+                <a:ea typeface="IBM Plex Mono" pitchFamily="34" charset="-122"/>
+                <a:cs typeface="IBM Plex Mono" pitchFamily="34" charset="-120"/>
+              </a:rPr>
+              <a:t>SECTION 04</a:t>
+            </a:r>
+            <a:endParaRPr lang="en-US" sz="1300" dirty="0"/>
+          </a:p>
+        </p:txBody>
+      </p:sp>
+      <p:sp>
+        <p:nvSpPr>
+          <p:cNvPr id="3" name="Text 1"/>
+          <p:cNvSpPr/>
+          <p:nvPr/>
+        </p:nvSpPr>
+        <p:spPr>
+          <a:xfrm>
+            <a:off x="558800" y="2667000"/>
+            <a:ext cx="8255000" cy="1206500"/>
+          </a:xfrm>
+          <a:prstGeom prst="rect">
+            <a:avLst/>
+          </a:prstGeom>
+          <a:noFill/>
+          <a:ln/>
+        </p:spPr>
+        <p:txBody>
+          <a:bodyPr wrap="square" lIns="0" tIns="0" rIns="0" bIns="0" rtlCol="0" anchor="t"/>
+          <a:lstStyle/>
+          <a:p>
+            <a:pPr algn="l" indent="0" marL="0">
+              <a:lnSpc>
+                <a:spcPct val="108000"/>
+              </a:lnSpc>
+              <a:buNone/>
+            </a:pPr>
+            <a:r>
+              <a:rPr lang="en-US" sz="4000" b="1" dirty="0">
+                <a:solidFill>
+                  <a:srgbClr val="332F2A"/>
+                </a:solidFill>
+                <a:latin typeface="Libre Franklin" pitchFamily="34" charset="0"/>
+                <a:ea typeface="Libre Franklin" pitchFamily="34" charset="-122"/>
+                <a:cs typeface="Libre Franklin" pitchFamily="34" charset="-120"/>
+              </a:rPr>
+              <a:t>Lab 3 — the Intake Desk</a:t>
+            </a:r>
+            <a:endParaRPr lang="en-US" sz="4000" dirty="0"/>
+          </a:p>
+        </p:txBody>
+      </p:sp>
+      <p:sp>
+        <p:nvSpPr>
+          <p:cNvPr id="4" name="Text 2"/>
+          <p:cNvSpPr/>
+          <p:nvPr/>
+        </p:nvSpPr>
+        <p:spPr>
+          <a:xfrm>
+            <a:off x="558800" y="4064000"/>
+            <a:ext cx="6985000" cy="635000"/>
+          </a:xfrm>
+          <a:prstGeom prst="rect">
+            <a:avLst/>
+          </a:prstGeom>
+          <a:noFill/>
+          <a:ln/>
+        </p:spPr>
+        <p:txBody>
+          <a:bodyPr wrap="square" lIns="0" tIns="0" rIns="0" bIns="0" rtlCol="0" anchor="t"/>
+          <a:lstStyle/>
+          <a:p>
+            <a:pPr algn="l" indent="0" marL="0">
+              <a:lnSpc>
+                <a:spcPct val="140000"/>
+              </a:lnSpc>
+              <a:buNone/>
+            </a:pPr>
+            <a:r>
+              <a:rPr lang="en-US" sz="1700" dirty="0">
+                <a:solidFill>
+                  <a:srgbClr val="77726A"/>
+                </a:solidFill>
+                <a:latin typeface="Libre Franklin" pitchFamily="34" charset="0"/>
+                <a:ea typeface="Libre Franklin" pitchFamily="34" charset="-122"/>
+                <a:cs typeface="Libre Franklin" pitchFamily="34" charset="-120"/>
+              </a:rPr>
+              <a:t>Sixty-five minutes. A regex parser, a model, and a queue for a human.</a:t>
+            </a:r>
+            <a:endParaRPr lang="en-US" sz="1700" dirty="0"/>
+          </a:p>
+        </p:txBody>
+      </p:sp>
+    </p:spTree>
+  </p:cSld>
+  <p:clrMapOvr>
+    <a:masterClrMapping/>
+  </p:clrMapOvr>
+</p:sld>
+</file>
+
+<file path=ppt/slides/slide18.xml><?xml version="1.0" encoding="utf-8"?>
+<p:sld xmlns:a="http://schemas.openxmlformats.org/drawingml/2006/main" xmlns:r="http://schemas.openxmlformats.org/officeDocument/2006/relationships" xmlns:p="http://schemas.openxmlformats.org/presentationml/2006/main">
+  <p:cSld name="Slide 18">
     <p:bg>
       <p:bgPr>
         <a:solidFill>
@@ -6215,7 +6762,7 @@
                 <a:ea typeface="Libre Franklin" pitchFamily="34" charset="-122"/>
                 <a:cs typeface="Libre Franklin" pitchFamily="34" charset="-120"/>
               </a:rPr>
-              <a:t>Your job: attack the prompt</a:t>
+              <a:t>Four checkpoints</a:t>
             </a:r>
             <a:endParaRPr lang="en-US" sz="2800" dirty="0"/>
           </a:p>
@@ -6319,7 +6866,7 @@
                 <a:ea typeface="IBM Plex Mono" pitchFamily="34" charset="-122"/>
                 <a:cs typeface="IBM Plex Mono" pitchFamily="34" charset="-120"/>
               </a:rPr>
-              <a:t>17</a:t>
+              <a:t>18</a:t>
             </a:r>
             <a:endParaRPr lang="en-US" sz="1200" dirty="0"/>
           </a:p>
@@ -6327,340 +6874,92 @@
       </p:sp>
       <p:sp>
         <p:nvSpPr>
-          <p:cNvPr id="7" name="Shape 5"/>
+          <p:cNvPr id="7" name="Text 5"/>
           <p:cNvSpPr/>
           <p:nvPr/>
         </p:nvSpPr>
         <p:spPr>
           <a:xfrm>
             <a:off x="558800" y="1511300"/>
-            <a:ext cx="6517030" cy="4572000"/>
-          </a:xfrm>
-          <a:prstGeom prst="rect">
-            <a:avLst/>
-          </a:prstGeom>
-          <a:solidFill>
-            <a:srgbClr val="F5F2EC"/>
-          </a:solidFill>
-          <a:ln w="6350">
-            <a:solidFill>
-              <a:srgbClr val="E1DED7"/>
-            </a:solidFill>
-            <a:prstDash val="solid"/>
-          </a:ln>
-        </p:spPr>
-      </p:sp>
-      <p:sp>
-        <p:nvSpPr>
-          <p:cNvPr id="8" name="Text 6"/>
-          <p:cNvSpPr/>
-          <p:nvPr/>
-        </p:nvSpPr>
-        <p:spPr>
-          <a:xfrm>
-            <a:off x="800100" y="1727200"/>
-            <a:ext cx="6034430" cy="4140200"/>
-          </a:xfrm>
-          <a:prstGeom prst="rect">
-            <a:avLst/>
-          </a:prstGeom>
-          <a:noFill/>
-          <a:ln/>
-        </p:spPr>
-        <p:txBody>
-          <a:bodyPr wrap="square" lIns="0" tIns="0" rIns="0" bIns="0" rtlCol="0" anchor="t"/>
-          <a:lstStyle/>
-          <a:p>
-            <a:pPr indent="0" marL="0">
-              <a:lnSpc>
-                <a:spcPct val="160000"/>
-              </a:lnSpc>
-              <a:buNone/>
-            </a:pPr>
-            <a:r>
-              <a:rPr lang="en-US" sz="1400" dirty="0">
-                <a:solidFill>
-                  <a:srgbClr val="332F2A"/>
-                </a:solidFill>
-                <a:latin typeface="IBM Plex Mono" pitchFamily="34" charset="0"/>
-                <a:ea typeface="IBM Plex Mono" pitchFamily="34" charset="-122"/>
-                <a:cs typeface="IBM Plex Mono" pitchFamily="34" charset="-120"/>
-              </a:rPr>
-              <a:t>1. Write 5 messages the inbox does not</a:t>
-            </a:r>
-            <a:endParaRPr lang="en-US" sz="1400" dirty="0"/>
-          </a:p>
-          <a:p>
-            <a:pPr indent="0" marL="0">
-              <a:lnSpc>
-                <a:spcPct val="160000"/>
-              </a:lnSpc>
-              <a:buNone/>
-            </a:pPr>
-            <a:r>
-              <a:rPr lang="en-US" sz="1400" dirty="0">
-                <a:solidFill>
-                  <a:srgbClr val="332F2A"/>
-                </a:solidFill>
-                <a:latin typeface="IBM Plex Mono" pitchFamily="34" charset="0"/>
-                <a:ea typeface="IBM Plex Mono" pitchFamily="34" charset="-122"/>
-                <a:cs typeface="IBM Plex Mono" pitchFamily="34" charset="-120"/>
-              </a:rPr>
-              <a:t>   have. Make them hard.</a:t>
-            </a:r>
-            <a:endParaRPr lang="en-US" sz="1400" dirty="0"/>
-          </a:p>
-          <a:p>
-            <a:pPr indent="0" marL="0">
-              <a:lnSpc>
-                <a:spcPct val="160000"/>
-              </a:lnSpc>
-              <a:buNone/>
-            </a:pPr>
-            <a:endParaRPr lang="en-US" sz="1400" dirty="0"/>
-          </a:p>
-          <a:p>
-            <a:pPr indent="0" marL="0">
-              <a:lnSpc>
-                <a:spcPct val="160000"/>
-              </a:lnSpc>
-              <a:buNone/>
-            </a:pPr>
-            <a:r>
-              <a:rPr lang="en-US" sz="1400" dirty="0">
-                <a:solidFill>
-                  <a:srgbClr val="332F2A"/>
-                </a:solidFill>
-                <a:latin typeface="IBM Plex Mono" pitchFamily="34" charset="0"/>
-                <a:ea typeface="IBM Plex Mono" pitchFamily="34" charset="-122"/>
-                <a:cs typeface="IBM Plex Mono" pitchFamily="34" charset="-120"/>
-              </a:rPr>
-              <a:t>2. Write the correct answer for each.</a:t>
-            </a:r>
-            <a:endParaRPr lang="en-US" sz="1400" dirty="0"/>
-          </a:p>
-          <a:p>
-            <a:pPr indent="0" marL="0">
-              <a:lnSpc>
-                <a:spcPct val="160000"/>
-              </a:lnSpc>
-              <a:buNone/>
-            </a:pPr>
-            <a:endParaRPr lang="en-US" sz="1400" dirty="0"/>
-          </a:p>
-          <a:p>
-            <a:pPr indent="0" marL="0">
-              <a:lnSpc>
-                <a:spcPct val="160000"/>
-              </a:lnSpc>
-              <a:buNone/>
-            </a:pPr>
-            <a:r>
-              <a:rPr lang="en-US" sz="1400" dirty="0">
-                <a:solidFill>
-                  <a:srgbClr val="332F2A"/>
-                </a:solidFill>
-                <a:latin typeface="IBM Plex Mono" pitchFamily="34" charset="0"/>
-                <a:ea typeface="IBM Plex Mono" pitchFamily="34" charset="-122"/>
-                <a:cs typeface="IBM Plex Mono" pitchFamily="34" charset="-120"/>
-              </a:rPr>
-              <a:t>3. Score the current prompt on them.</a:t>
-            </a:r>
-            <a:endParaRPr lang="en-US" sz="1400" dirty="0"/>
-          </a:p>
-          <a:p>
-            <a:pPr indent="0" marL="0">
-              <a:lnSpc>
-                <a:spcPct val="160000"/>
-              </a:lnSpc>
-              <a:buNone/>
-            </a:pPr>
-            <a:endParaRPr lang="en-US" sz="1400" dirty="0"/>
-          </a:p>
-          <a:p>
-            <a:pPr indent="0" marL="0">
-              <a:lnSpc>
-                <a:spcPct val="160000"/>
-              </a:lnSpc>
-              <a:buNone/>
-            </a:pPr>
-            <a:r>
-              <a:rPr lang="en-US" sz="1400" dirty="0">
-                <a:solidFill>
-                  <a:srgbClr val="332F2A"/>
-                </a:solidFill>
-                <a:latin typeface="IBM Plex Mono" pitchFamily="34" charset="0"/>
-                <a:ea typeface="IBM Plex Mono" pitchFamily="34" charset="-122"/>
-                <a:cs typeface="IBM Plex Mono" pitchFamily="34" charset="-120"/>
-              </a:rPr>
-              <a:t>4. Change ONE line. Score again.</a:t>
-            </a:r>
-            <a:endParaRPr lang="en-US" sz="1400" dirty="0"/>
-          </a:p>
-          <a:p>
-            <a:pPr indent="0" marL="0">
-              <a:lnSpc>
-                <a:spcPct val="160000"/>
-              </a:lnSpc>
-              <a:buNone/>
-            </a:pPr>
-            <a:endParaRPr lang="en-US" sz="1400" dirty="0"/>
-          </a:p>
-          <a:p>
-            <a:pPr indent="0" marL="0">
-              <a:lnSpc>
-                <a:spcPct val="160000"/>
-              </a:lnSpc>
-              <a:buNone/>
-            </a:pPr>
-            <a:r>
-              <a:rPr lang="en-US" sz="1400" dirty="0">
-                <a:solidFill>
-                  <a:srgbClr val="332F2A"/>
-                </a:solidFill>
-                <a:latin typeface="IBM Plex Mono" pitchFamily="34" charset="0"/>
-                <a:ea typeface="IBM Plex Mono" pitchFamily="34" charset="-122"/>
-                <a:cs typeface="IBM Plex Mono" pitchFamily="34" charset="-120"/>
-              </a:rPr>
-              <a:t>5. Keep it or revert it. Repeat.</a:t>
-            </a:r>
-            <a:endParaRPr lang="en-US" sz="1400" dirty="0"/>
-          </a:p>
-        </p:txBody>
-      </p:sp>
-      <p:sp>
-        <p:nvSpPr>
-          <p:cNvPr id="9" name="Text 7"/>
-          <p:cNvSpPr/>
-          <p:nvPr/>
-        </p:nvSpPr>
-        <p:spPr>
-          <a:xfrm>
-            <a:off x="7431430" y="1511300"/>
-            <a:ext cx="4201770" cy="1600200"/>
-          </a:xfrm>
-          <a:prstGeom prst="rect">
-            <a:avLst/>
-          </a:prstGeom>
-          <a:noFill/>
-          <a:ln/>
-        </p:spPr>
-        <p:txBody>
-          <a:bodyPr wrap="square" lIns="0" tIns="0" rIns="0" bIns="0" rtlCol="0" anchor="t"/>
-          <a:lstStyle/>
-          <a:p>
-            <a:pPr algn="l" indent="0" marL="0">
-              <a:lnSpc>
-                <a:spcPct val="145000"/>
-              </a:lnSpc>
-              <a:buNone/>
-            </a:pPr>
-            <a:r>
-              <a:rPr lang="en-US" sz="1600" dirty="0">
-                <a:solidFill>
-                  <a:srgbClr val="332F2A"/>
+            <a:ext cx="190500" cy="317500"/>
+          </a:xfrm>
+          <a:prstGeom prst="rect">
+            <a:avLst/>
+          </a:prstGeom>
+          <a:noFill/>
+          <a:ln/>
+        </p:spPr>
+        <p:txBody>
+          <a:bodyPr wrap="square" lIns="0" tIns="0" rIns="0" bIns="0" rtlCol="0" anchor="t"/>
+          <a:lstStyle/>
+          <a:p>
+            <a:pPr algn="l" indent="0" marL="0">
+              <a:lnSpc>
+                <a:spcPct val="140000"/>
+              </a:lnSpc>
+              <a:buNone/>
+            </a:pPr>
+            <a:r>
+              <a:rPr lang="en-US" sz="1700" dirty="0">
+                <a:solidFill>
+                  <a:srgbClr val="A87A2E"/>
                 </a:solidFill>
                 <a:latin typeface="Libre Franklin" pitchFamily="34" charset="0"/>
                 <a:ea typeface="Libre Franklin" pitchFamily="34" charset="-122"/>
                 <a:cs typeface="Libre Franklin" pitchFamily="34" charset="-120"/>
               </a:rPr>
-              <a:t>The prompt in core/intake.py already scores ten out of ten on the ten messages you were given, so there is nothing to improve there. Bring it messages it has never seen.</a:t>
-            </a:r>
-            <a:endParaRPr lang="en-US" sz="1600" dirty="0"/>
-          </a:p>
-        </p:txBody>
-      </p:sp>
-      <p:sp>
-        <p:nvSpPr>
-          <p:cNvPr id="10" name="Text 8"/>
-          <p:cNvSpPr/>
-          <p:nvPr/>
-        </p:nvSpPr>
-        <p:spPr>
-          <a:xfrm>
-            <a:off x="7431430" y="3238500"/>
-            <a:ext cx="4201770" cy="1600200"/>
-          </a:xfrm>
-          <a:prstGeom prst="rect">
-            <a:avLst/>
-          </a:prstGeom>
-          <a:noFill/>
-          <a:ln/>
-        </p:spPr>
-        <p:txBody>
-          <a:bodyPr wrap="square" lIns="0" tIns="0" rIns="0" bIns="0" rtlCol="0" anchor="t"/>
-          <a:lstStyle/>
-          <a:p>
-            <a:pPr algn="l" indent="0" marL="0">
-              <a:lnSpc>
-                <a:spcPct val="145000"/>
-              </a:lnSpc>
-              <a:buNone/>
-            </a:pPr>
-            <a:r>
-              <a:rPr lang="en-US" sz="1600" dirty="0">
-                <a:solidFill>
-                  <a:srgbClr val="77726A"/>
+              <a:t>—</a:t>
+            </a:r>
+            <a:endParaRPr lang="en-US" sz="1700" dirty="0"/>
+          </a:p>
+        </p:txBody>
+      </p:sp>
+      <p:sp>
+        <p:nvSpPr>
+          <p:cNvPr id="8" name="Text 6"/>
+          <p:cNvSpPr/>
+          <p:nvPr/>
+        </p:nvSpPr>
+        <p:spPr>
+          <a:xfrm>
+            <a:off x="927100" y="1511300"/>
+            <a:ext cx="9156700" cy="753110"/>
+          </a:xfrm>
+          <a:prstGeom prst="rect">
+            <a:avLst/>
+          </a:prstGeom>
+          <a:noFill/>
+          <a:ln/>
+        </p:spPr>
+        <p:txBody>
+          <a:bodyPr wrap="square" lIns="0" tIns="0" rIns="0" bIns="0" rtlCol="0" anchor="t"/>
+          <a:lstStyle/>
+          <a:p>
+            <a:pPr algn="l" indent="0" marL="0">
+              <a:lnSpc>
+                <a:spcPct val="145000"/>
+              </a:lnSpc>
+              <a:buNone/>
+            </a:pPr>
+            <a:r>
+              <a:rPr lang="en-US" sz="1700" b="1" dirty="0">
+                <a:solidFill>
+                  <a:srgbClr val="332F2A"/>
                 </a:solidFill>
                 <a:latin typeface="Libre Franklin" pitchFamily="34" charset="0"/>
                 <a:ea typeface="Libre Franklin" pitchFamily="34" charset="-122"/>
                 <a:cs typeface="Libre Franklin" pitchFamily="34" charset="-120"/>
               </a:rPr>
-              <a:t>Order in Thai. Order something the menu nearly has. Change your mind mid-sentence. Then make the prompt handle it — and prove that you did.</a:t>
-            </a:r>
-            <a:endParaRPr lang="en-US" sz="1600" dirty="0"/>
-          </a:p>
-        </p:txBody>
-      </p:sp>
-      <p:sp>
-        <p:nvSpPr>
-          <p:cNvPr id="11" name="Shape 9"/>
-          <p:cNvSpPr/>
-          <p:nvPr/>
-        </p:nvSpPr>
-        <p:spPr>
-          <a:xfrm>
-            <a:off x="7431430" y="5384800"/>
-            <a:ext cx="12700" cy="698500"/>
-          </a:xfrm>
-          <a:prstGeom prst="rect">
-            <a:avLst/>
-          </a:prstGeom>
-          <a:solidFill>
-            <a:srgbClr val="A87A2E"/>
-          </a:solidFill>
-          <a:ln/>
-        </p:spPr>
-      </p:sp>
-      <p:sp>
-        <p:nvSpPr>
-          <p:cNvPr id="12" name="Text 10"/>
-          <p:cNvSpPr/>
-          <p:nvPr/>
-        </p:nvSpPr>
-        <p:spPr>
-          <a:xfrm>
-            <a:off x="7596530" y="5416550"/>
-            <a:ext cx="4036670" cy="698500"/>
-          </a:xfrm>
-          <a:prstGeom prst="rect">
-            <a:avLst/>
-          </a:prstGeom>
-          <a:noFill/>
-          <a:ln/>
-        </p:spPr>
-        <p:txBody>
-          <a:bodyPr wrap="square" lIns="0" tIns="0" rIns="0" bIns="0" rtlCol="0" anchor="t"/>
-          <a:lstStyle/>
-          <a:p>
-            <a:pPr algn="l" indent="0" marL="0">
-              <a:lnSpc>
-                <a:spcPct val="140000"/>
-              </a:lnSpc>
-              <a:buNone/>
-            </a:pPr>
-            <a:r>
-              <a:rPr lang="en-US" sz="1500" dirty="0">
+              <a:t>Run the rules parser. </a:t>
+            </a:r>
+            <a:pPr algn="l" indent="0" marL="0">
+              <a:lnSpc>
+                <a:spcPct val="145000"/>
+              </a:lnSpc>
+              <a:buNone/>
+            </a:pPr>
+            <a:r>
+              <a:rPr lang="en-US" sz="1700" dirty="0">
                 <a:solidFill>
                   <a:srgbClr val="332F2A"/>
                 </a:solidFill>
@@ -6668,165 +6967,310 @@
                 <a:ea typeface="Libre Franklin" pitchFamily="34" charset="-122"/>
                 <a:cs typeface="Libre Franklin" pitchFamily="34" charset="-120"/>
               </a:rPr>
-              <a:t>A prompt you cannot score is a prompt you cannot improve.</a:t>
-            </a:r>
-            <a:endParaRPr lang="en-US" sz="1500" dirty="0"/>
-          </a:p>
-        </p:txBody>
-      </p:sp>
-    </p:spTree>
-  </p:cSld>
-  <p:clrMapOvr>
-    <a:masterClrMapping/>
-  </p:clrMapOvr>
-</p:sld>
-</file>
-
-<file path=ppt/slides/slide18.xml><?xml version="1.0" encoding="utf-8"?>
-<p:sld xmlns:a="http://schemas.openxmlformats.org/drawingml/2006/main" xmlns:r="http://schemas.openxmlformats.org/officeDocument/2006/relationships" xmlns:p="http://schemas.openxmlformats.org/presentationml/2006/main">
-  <p:cSld name="Slide 18">
-    <p:bg>
-      <p:bgPr>
-        <a:solidFill>
-          <a:srgbClr val="F5F2EC"/>
-        </a:solidFill>
-      </p:bgPr>
-    </p:bg>
-    <p:spTree>
-      <p:nvGrpSpPr>
-        <p:cNvPr id="1" name=""/>
-        <p:cNvGrpSpPr/>
-        <p:nvPr/>
-      </p:nvGrpSpPr>
-      <p:grpSpPr>
-        <a:xfrm>
-          <a:off x="0" y="0"/>
-          <a:ext cx="0" cy="0"/>
-          <a:chOff x="0" y="0"/>
-          <a:chExt cx="0" cy="0"/>
-        </a:xfrm>
-      </p:grpSpPr>
-      <p:sp>
-        <p:nvSpPr>
-          <p:cNvPr id="2" name="Text 0"/>
-          <p:cNvSpPr/>
-          <p:nvPr/>
-        </p:nvSpPr>
-        <p:spPr>
-          <a:xfrm>
-            <a:off x="558800" y="2286000"/>
-            <a:ext cx="11074400" cy="254000"/>
-          </a:xfrm>
-          <a:prstGeom prst="rect">
-            <a:avLst/>
-          </a:prstGeom>
-          <a:noFill/>
-          <a:ln/>
-        </p:spPr>
-        <p:txBody>
-          <a:bodyPr wrap="square" lIns="0" tIns="0" rIns="0" bIns="0" rtlCol="0" anchor="t"/>
-          <a:lstStyle/>
-          <a:p>
-            <a:pPr algn="l" indent="0" marL="0">
-              <a:lnSpc>
-                <a:spcPct val="145000"/>
-              </a:lnSpc>
-              <a:buNone/>
-            </a:pPr>
-            <a:r>
-              <a:rPr lang="en-US" sz="1300" spc="182" kern="0" dirty="0">
+              <a:t>Ten real messages, four of them read correctly. Look at the six it misses and ask how many more rules you would need.</a:t>
+            </a:r>
+            <a:endParaRPr lang="en-US" sz="1700" dirty="0"/>
+          </a:p>
+        </p:txBody>
+      </p:sp>
+      <p:sp>
+        <p:nvSpPr>
+          <p:cNvPr id="9" name="Text 7"/>
+          <p:cNvSpPr/>
+          <p:nvPr/>
+        </p:nvSpPr>
+        <p:spPr>
+          <a:xfrm>
+            <a:off x="558800" y="2391410"/>
+            <a:ext cx="190500" cy="317500"/>
+          </a:xfrm>
+          <a:prstGeom prst="rect">
+            <a:avLst/>
+          </a:prstGeom>
+          <a:noFill/>
+          <a:ln/>
+        </p:spPr>
+        <p:txBody>
+          <a:bodyPr wrap="square" lIns="0" tIns="0" rIns="0" bIns="0" rtlCol="0" anchor="t"/>
+          <a:lstStyle/>
+          <a:p>
+            <a:pPr algn="l" indent="0" marL="0">
+              <a:lnSpc>
+                <a:spcPct val="140000"/>
+              </a:lnSpc>
+              <a:buNone/>
+            </a:pPr>
+            <a:r>
+              <a:rPr lang="en-US" sz="1700" dirty="0">
                 <a:solidFill>
                   <a:srgbClr val="A87A2E"/>
-                </a:solidFill>
-                <a:latin typeface="IBM Plex Mono" pitchFamily="34" charset="0"/>
-                <a:ea typeface="IBM Plex Mono" pitchFamily="34" charset="-122"/>
-                <a:cs typeface="IBM Plex Mono" pitchFamily="34" charset="-120"/>
-              </a:rPr>
-              <a:t>SECTION 05</a:t>
-            </a:r>
-            <a:endParaRPr lang="en-US" sz="1300" dirty="0"/>
-          </a:p>
-        </p:txBody>
-      </p:sp>
-      <p:sp>
-        <p:nvSpPr>
-          <p:cNvPr id="3" name="Text 1"/>
-          <p:cNvSpPr/>
-          <p:nvPr/>
-        </p:nvSpPr>
-        <p:spPr>
-          <a:xfrm>
-            <a:off x="558800" y="2667000"/>
-            <a:ext cx="8255000" cy="1206500"/>
-          </a:xfrm>
-          <a:prstGeom prst="rect">
-            <a:avLst/>
-          </a:prstGeom>
-          <a:noFill/>
-          <a:ln/>
-        </p:spPr>
-        <p:txBody>
-          <a:bodyPr wrap="square" lIns="0" tIns="0" rIns="0" bIns="0" rtlCol="0" anchor="t"/>
-          <a:lstStyle/>
-          <a:p>
-            <a:pPr algn="l" indent="0" marL="0">
-              <a:lnSpc>
-                <a:spcPct val="108000"/>
-              </a:lnSpc>
-              <a:buNone/>
-            </a:pPr>
-            <a:r>
-              <a:rPr lang="en-US" sz="4000" b="1" dirty="0">
-                <a:solidFill>
-                  <a:srgbClr val="332F2A"/>
                 </a:solidFill>
                 <a:latin typeface="Libre Franklin" pitchFamily="34" charset="0"/>
                 <a:ea typeface="Libre Franklin" pitchFamily="34" charset="-122"/>
                 <a:cs typeface="Libre Franklin" pitchFamily="34" charset="-120"/>
               </a:rPr>
-              <a:t>Then put it in your project</a:t>
-            </a:r>
-            <a:endParaRPr lang="en-US" sz="4000" dirty="0"/>
-          </a:p>
-        </p:txBody>
-      </p:sp>
-      <p:sp>
-        <p:nvSpPr>
-          <p:cNvPr id="4" name="Text 2"/>
-          <p:cNvSpPr/>
-          <p:nvPr/>
-        </p:nvSpPr>
-        <p:spPr>
-          <a:xfrm>
-            <a:off x="558800" y="4064000"/>
-            <a:ext cx="6985000" cy="635000"/>
-          </a:xfrm>
-          <a:prstGeom prst="rect">
-            <a:avLst/>
-          </a:prstGeom>
-          <a:noFill/>
-          <a:ln/>
-        </p:spPr>
-        <p:txBody>
-          <a:bodyPr wrap="square" lIns="0" tIns="0" rIns="0" bIns="0" rtlCol="0" anchor="t"/>
-          <a:lstStyle/>
-          <a:p>
-            <a:pPr algn="l" indent="0" marL="0">
-              <a:lnSpc>
-                <a:spcPct val="140000"/>
-              </a:lnSpc>
-              <a:buNone/>
-            </a:pPr>
-            <a:r>
-              <a:rPr lang="en-US" sz="1700" dirty="0">
-                <a:solidFill>
-                  <a:srgbClr val="77726A"/>
+              <a:t>—</a:t>
+            </a:r>
+            <a:endParaRPr lang="en-US" sz="1700" dirty="0"/>
+          </a:p>
+        </p:txBody>
+      </p:sp>
+      <p:sp>
+        <p:nvSpPr>
+          <p:cNvPr id="10" name="Text 8"/>
+          <p:cNvSpPr/>
+          <p:nvPr/>
+        </p:nvSpPr>
+        <p:spPr>
+          <a:xfrm>
+            <a:off x="927100" y="2391410"/>
+            <a:ext cx="9156700" cy="753110"/>
+          </a:xfrm>
+          <a:prstGeom prst="rect">
+            <a:avLst/>
+          </a:prstGeom>
+          <a:noFill/>
+          <a:ln/>
+        </p:spPr>
+        <p:txBody>
+          <a:bodyPr wrap="square" lIns="0" tIns="0" rIns="0" bIns="0" rtlCol="0" anchor="t"/>
+          <a:lstStyle/>
+          <a:p>
+            <a:pPr algn="l" indent="0" marL="0">
+              <a:lnSpc>
+                <a:spcPct val="145000"/>
+              </a:lnSpc>
+              <a:buNone/>
+            </a:pPr>
+            <a:r>
+              <a:rPr lang="en-US" sz="1700" b="1" dirty="0">
+                <a:solidFill>
+                  <a:srgbClr val="332F2A"/>
                 </a:solidFill>
                 <a:latin typeface="Libre Franklin" pitchFamily="34" charset="0"/>
                 <a:ea typeface="Libre Franklin" pitchFamily="34" charset="-122"/>
                 <a:cs typeface="Libre Franklin" pitchFamily="34" charset="-120"/>
               </a:rPr>
-              <a:t>Twenty minutes. Every brief has an AI feature waiting, and it is this lab wearing different clothes.</a:t>
+              <a:t>Ask in plain text. </a:t>
+            </a:r>
+            <a:pPr algn="l" indent="0" marL="0">
+              <a:lnSpc>
+                <a:spcPct val="145000"/>
+              </a:lnSpc>
+              <a:buNone/>
+            </a:pPr>
+            <a:r>
+              <a:rPr lang="en-US" sz="1700" dirty="0">
+                <a:solidFill>
+                  <a:srgbClr val="332F2A"/>
+                </a:solidFill>
+                <a:latin typeface="Libre Franklin" pitchFamily="34" charset="0"/>
+                <a:ea typeface="Libre Franklin" pitchFamily="34" charset="-122"/>
+                <a:cs typeface="Libre Franklin" pitchFamily="34" charset="-120"/>
+              </a:rPr>
+              <a:t>The answer will be correct and useless — a sentence, when your till needs fields.</a:t>
+            </a:r>
+            <a:endParaRPr lang="en-US" sz="1700" dirty="0"/>
+          </a:p>
+        </p:txBody>
+      </p:sp>
+      <p:sp>
+        <p:nvSpPr>
+          <p:cNvPr id="11" name="Text 9"/>
+          <p:cNvSpPr/>
+          <p:nvPr/>
+        </p:nvSpPr>
+        <p:spPr>
+          <a:xfrm>
+            <a:off x="558800" y="3271520"/>
+            <a:ext cx="190500" cy="317500"/>
+          </a:xfrm>
+          <a:prstGeom prst="rect">
+            <a:avLst/>
+          </a:prstGeom>
+          <a:noFill/>
+          <a:ln/>
+        </p:spPr>
+        <p:txBody>
+          <a:bodyPr wrap="square" lIns="0" tIns="0" rIns="0" bIns="0" rtlCol="0" anchor="t"/>
+          <a:lstStyle/>
+          <a:p>
+            <a:pPr algn="l" indent="0" marL="0">
+              <a:lnSpc>
+                <a:spcPct val="140000"/>
+              </a:lnSpc>
+              <a:buNone/>
+            </a:pPr>
+            <a:r>
+              <a:rPr lang="en-US" sz="1700" dirty="0">
+                <a:solidFill>
+                  <a:srgbClr val="A87A2E"/>
+                </a:solidFill>
+                <a:latin typeface="Libre Franklin" pitchFamily="34" charset="0"/>
+                <a:ea typeface="Libre Franklin" pitchFamily="34" charset="-122"/>
+                <a:cs typeface="Libre Franklin" pitchFamily="34" charset="-120"/>
+              </a:rPr>
+              <a:t>—</a:t>
+            </a:r>
+            <a:endParaRPr lang="en-US" sz="1700" dirty="0"/>
+          </a:p>
+        </p:txBody>
+      </p:sp>
+      <p:sp>
+        <p:nvSpPr>
+          <p:cNvPr id="12" name="Text 10"/>
+          <p:cNvSpPr/>
+          <p:nvPr/>
+        </p:nvSpPr>
+        <p:spPr>
+          <a:xfrm>
+            <a:off x="927100" y="3271520"/>
+            <a:ext cx="9156700" cy="753110"/>
+          </a:xfrm>
+          <a:prstGeom prst="rect">
+            <a:avLst/>
+          </a:prstGeom>
+          <a:noFill/>
+          <a:ln/>
+        </p:spPr>
+        <p:txBody>
+          <a:bodyPr wrap="square" lIns="0" tIns="0" rIns="0" bIns="0" rtlCol="0" anchor="t"/>
+          <a:lstStyle/>
+          <a:p>
+            <a:pPr algn="l" indent="0" marL="0">
+              <a:lnSpc>
+                <a:spcPct val="145000"/>
+              </a:lnSpc>
+              <a:buNone/>
+            </a:pPr>
+            <a:r>
+              <a:rPr lang="en-US" sz="1700" b="1" dirty="0">
+                <a:solidFill>
+                  <a:srgbClr val="332F2A"/>
+                </a:solidFill>
+                <a:latin typeface="Libre Franklin" pitchFamily="34" charset="0"/>
+                <a:ea typeface="Libre Franklin" pitchFamily="34" charset="-122"/>
+                <a:cs typeface="Libre Franklin" pitchFamily="34" charset="-120"/>
+              </a:rPr>
+              <a:t>Ask for a shape. </a:t>
+            </a:r>
+            <a:pPr algn="l" indent="0" marL="0">
+              <a:lnSpc>
+                <a:spcPct val="145000"/>
+              </a:lnSpc>
+              <a:buNone/>
+            </a:pPr>
+            <a:r>
+              <a:rPr lang="en-US" sz="1700" dirty="0">
+                <a:solidFill>
+                  <a:srgbClr val="332F2A"/>
+                </a:solidFill>
+                <a:latin typeface="Libre Franklin" pitchFamily="34" charset="0"/>
+                <a:ea typeface="Libre Franklin" pitchFamily="34" charset="-122"/>
+                <a:cs typeface="Libre Franklin" pitchFamily="34" charset="-120"/>
+              </a:rPr>
+              <a:t>One argument later, ten messy messages become ten rows. No regular expressions.</a:t>
+            </a:r>
+            <a:endParaRPr lang="en-US" sz="1700" dirty="0"/>
+          </a:p>
+        </p:txBody>
+      </p:sp>
+      <p:sp>
+        <p:nvSpPr>
+          <p:cNvPr id="13" name="Text 11"/>
+          <p:cNvSpPr/>
+          <p:nvPr/>
+        </p:nvSpPr>
+        <p:spPr>
+          <a:xfrm>
+            <a:off x="558800" y="4151630"/>
+            <a:ext cx="190500" cy="317500"/>
+          </a:xfrm>
+          <a:prstGeom prst="rect">
+            <a:avLst/>
+          </a:prstGeom>
+          <a:noFill/>
+          <a:ln/>
+        </p:spPr>
+        <p:txBody>
+          <a:bodyPr wrap="square" lIns="0" tIns="0" rIns="0" bIns="0" rtlCol="0" anchor="t"/>
+          <a:lstStyle/>
+          <a:p>
+            <a:pPr algn="l" indent="0" marL="0">
+              <a:lnSpc>
+                <a:spcPct val="140000"/>
+              </a:lnSpc>
+              <a:buNone/>
+            </a:pPr>
+            <a:r>
+              <a:rPr lang="en-US" sz="1700" dirty="0">
+                <a:solidFill>
+                  <a:srgbClr val="A87A2E"/>
+                </a:solidFill>
+                <a:latin typeface="Libre Franklin" pitchFamily="34" charset="0"/>
+                <a:ea typeface="Libre Franklin" pitchFamily="34" charset="-122"/>
+                <a:cs typeface="Libre Franklin" pitchFamily="34" charset="-120"/>
+              </a:rPr>
+              <a:t>—</a:t>
+            </a:r>
+            <a:endParaRPr lang="en-US" sz="1700" dirty="0"/>
+          </a:p>
+        </p:txBody>
+      </p:sp>
+      <p:sp>
+        <p:nvSpPr>
+          <p:cNvPr id="14" name="Text 12"/>
+          <p:cNvSpPr/>
+          <p:nvPr/>
+        </p:nvSpPr>
+        <p:spPr>
+          <a:xfrm>
+            <a:off x="927100" y="4151630"/>
+            <a:ext cx="9156700" cy="753110"/>
+          </a:xfrm>
+          <a:prstGeom prst="rect">
+            <a:avLst/>
+          </a:prstGeom>
+          <a:noFill/>
+          <a:ln/>
+        </p:spPr>
+        <p:txBody>
+          <a:bodyPr wrap="square" lIns="0" tIns="0" rIns="0" bIns="0" rtlCol="0" anchor="t"/>
+          <a:lstStyle/>
+          <a:p>
+            <a:pPr algn="l" indent="0" marL="0">
+              <a:lnSpc>
+                <a:spcPct val="145000"/>
+              </a:lnSpc>
+              <a:buNone/>
+            </a:pPr>
+            <a:r>
+              <a:rPr lang="en-US" sz="1700" b="1" dirty="0">
+                <a:solidFill>
+                  <a:srgbClr val="332F2A"/>
+                </a:solidFill>
+                <a:latin typeface="Libre Franklin" pitchFamily="34" charset="0"/>
+                <a:ea typeface="Libre Franklin" pitchFamily="34" charset="-122"/>
+                <a:cs typeface="Libre Franklin" pitchFamily="34" charset="-120"/>
+              </a:rPr>
+              <a:t>Score it, then plan for being wrong. </a:t>
+            </a:r>
+            <a:pPr algn="l" indent="0" marL="0">
+              <a:lnSpc>
+                <a:spcPct val="145000"/>
+              </a:lnSpc>
+              <a:buNone/>
+            </a:pPr>
+            <a:r>
+              <a:rPr lang="en-US" sz="1700" dirty="0">
+                <a:solidFill>
+                  <a:srgbClr val="332F2A"/>
+                </a:solidFill>
+                <a:latin typeface="Libre Franklin" pitchFamily="34" charset="0"/>
+                <a:ea typeface="Libre Franklin" pitchFamily="34" charset="-122"/>
+                <a:cs typeface="Libre Franklin" pitchFamily="34" charset="-120"/>
+              </a:rPr>
+              <a:t>Grade yourself against the answer key, and send what the model was unsure about to a human.</a:t>
             </a:r>
             <a:endParaRPr lang="en-US" sz="1700" dirty="0"/>
           </a:p>
@@ -6900,7 +7344,7 @@
                 <a:ea typeface="IBM Plex Mono" pitchFamily="34" charset="-122"/>
                 <a:cs typeface="IBM Plex Mono" pitchFamily="34" charset="-120"/>
               </a:rPr>
-              <a:t>SECTION 05</a:t>
+              <a:t>SECTION 04</a:t>
             </a:r>
             <a:endParaRPr lang="en-US" sz="1200" dirty="0"/>
           </a:p>
@@ -6942,7 +7386,7 @@
                 <a:ea typeface="Libre Franklin" pitchFamily="34" charset="-122"/>
                 <a:cs typeface="Libre Franklin" pitchFamily="34" charset="-120"/>
               </a:rPr>
-              <a:t>Your brief already has the slot</a:t>
+              <a:t>Your job: attack the prompt</a:t>
             </a:r>
             <a:endParaRPr lang="en-US" sz="2800" dirty="0"/>
           </a:p>
@@ -7054,56 +7498,237 @@
       </p:sp>
       <p:sp>
         <p:nvSpPr>
-          <p:cNvPr id="7" name="Text 5"/>
+          <p:cNvPr id="7" name="Shape 5"/>
           <p:cNvSpPr/>
           <p:nvPr/>
         </p:nvSpPr>
         <p:spPr>
           <a:xfrm>
             <a:off x="558800" y="1511300"/>
-            <a:ext cx="5283200" cy="254000"/>
-          </a:xfrm>
-          <a:prstGeom prst="rect">
-            <a:avLst/>
-          </a:prstGeom>
-          <a:noFill/>
-          <a:ln/>
-        </p:spPr>
-        <p:txBody>
-          <a:bodyPr wrap="square" lIns="0" tIns="0" rIns="0" bIns="0" rtlCol="0" anchor="t"/>
-          <a:lstStyle/>
-          <a:p>
-            <a:pPr algn="l" indent="0" marL="0">
-              <a:lnSpc>
-                <a:spcPct val="145000"/>
-              </a:lnSpc>
-              <a:buNone/>
-            </a:pPr>
-            <a:r>
-              <a:rPr lang="en-US" sz="1300" spc="130" kern="0" dirty="0">
-                <a:solidFill>
-                  <a:srgbClr val="A87A2E"/>
+            <a:ext cx="6517030" cy="4572000"/>
+          </a:xfrm>
+          <a:prstGeom prst="rect">
+            <a:avLst/>
+          </a:prstGeom>
+          <a:solidFill>
+            <a:srgbClr val="F5F2EC"/>
+          </a:solidFill>
+          <a:ln w="6350">
+            <a:solidFill>
+              <a:srgbClr val="E1DED7"/>
+            </a:solidFill>
+            <a:prstDash val="solid"/>
+          </a:ln>
+        </p:spPr>
+      </p:sp>
+      <p:sp>
+        <p:nvSpPr>
+          <p:cNvPr id="8" name="Text 6"/>
+          <p:cNvSpPr/>
+          <p:nvPr/>
+        </p:nvSpPr>
+        <p:spPr>
+          <a:xfrm>
+            <a:off x="800100" y="1727200"/>
+            <a:ext cx="6034430" cy="4140200"/>
+          </a:xfrm>
+          <a:prstGeom prst="rect">
+            <a:avLst/>
+          </a:prstGeom>
+          <a:noFill/>
+          <a:ln/>
+        </p:spPr>
+        <p:txBody>
+          <a:bodyPr wrap="square" lIns="0" tIns="0" rIns="0" bIns="0" rtlCol="0" anchor="t"/>
+          <a:lstStyle/>
+          <a:p>
+            <a:pPr indent="0" marL="0">
+              <a:lnSpc>
+                <a:spcPct val="160000"/>
+              </a:lnSpc>
+              <a:buNone/>
+            </a:pPr>
+            <a:r>
+              <a:rPr lang="en-US" sz="1400" dirty="0">
+                <a:solidFill>
+                  <a:srgbClr val="332F2A"/>
                 </a:solidFill>
                 <a:latin typeface="IBM Plex Mono" pitchFamily="34" charset="0"/>
                 <a:ea typeface="IBM Plex Mono" pitchFamily="34" charset="-122"/>
                 <a:cs typeface="IBM Plex Mono" pitchFamily="34" charset="-120"/>
               </a:rPr>
-              <a:t>THE MESSY INPUT</a:t>
-            </a:r>
-            <a:endParaRPr lang="en-US" sz="1300" dirty="0"/>
-          </a:p>
-        </p:txBody>
-      </p:sp>
-      <p:sp>
-        <p:nvSpPr>
-          <p:cNvPr id="8" name="Text 6"/>
-          <p:cNvSpPr/>
-          <p:nvPr/>
-        </p:nvSpPr>
-        <p:spPr>
-          <a:xfrm>
-            <a:off x="558800" y="1917700"/>
-            <a:ext cx="5283200" cy="1270000"/>
+              <a:t>1. Write 5 messages the inbox does not</a:t>
+            </a:r>
+            <a:endParaRPr lang="en-US" sz="1400" dirty="0"/>
+          </a:p>
+          <a:p>
+            <a:pPr indent="0" marL="0">
+              <a:lnSpc>
+                <a:spcPct val="160000"/>
+              </a:lnSpc>
+              <a:buNone/>
+            </a:pPr>
+            <a:r>
+              <a:rPr lang="en-US" sz="1400" dirty="0">
+                <a:solidFill>
+                  <a:srgbClr val="332F2A"/>
+                </a:solidFill>
+                <a:latin typeface="IBM Plex Mono" pitchFamily="34" charset="0"/>
+                <a:ea typeface="IBM Plex Mono" pitchFamily="34" charset="-122"/>
+                <a:cs typeface="IBM Plex Mono" pitchFamily="34" charset="-120"/>
+              </a:rPr>
+              <a:t>   have. Make them hard.</a:t>
+            </a:r>
+            <a:endParaRPr lang="en-US" sz="1400" dirty="0"/>
+          </a:p>
+          <a:p>
+            <a:pPr indent="0" marL="0">
+              <a:lnSpc>
+                <a:spcPct val="160000"/>
+              </a:lnSpc>
+              <a:buNone/>
+            </a:pPr>
+            <a:endParaRPr lang="en-US" sz="1400" dirty="0"/>
+          </a:p>
+          <a:p>
+            <a:pPr indent="0" marL="0">
+              <a:lnSpc>
+                <a:spcPct val="160000"/>
+              </a:lnSpc>
+              <a:buNone/>
+            </a:pPr>
+            <a:r>
+              <a:rPr lang="en-US" sz="1400" dirty="0">
+                <a:solidFill>
+                  <a:srgbClr val="332F2A"/>
+                </a:solidFill>
+                <a:latin typeface="IBM Plex Mono" pitchFamily="34" charset="0"/>
+                <a:ea typeface="IBM Plex Mono" pitchFamily="34" charset="-122"/>
+                <a:cs typeface="IBM Plex Mono" pitchFamily="34" charset="-120"/>
+              </a:rPr>
+              <a:t>2. Write the correct answer for each.</a:t>
+            </a:r>
+            <a:endParaRPr lang="en-US" sz="1400" dirty="0"/>
+          </a:p>
+          <a:p>
+            <a:pPr indent="0" marL="0">
+              <a:lnSpc>
+                <a:spcPct val="160000"/>
+              </a:lnSpc>
+              <a:buNone/>
+            </a:pPr>
+            <a:endParaRPr lang="en-US" sz="1400" dirty="0"/>
+          </a:p>
+          <a:p>
+            <a:pPr indent="0" marL="0">
+              <a:lnSpc>
+                <a:spcPct val="160000"/>
+              </a:lnSpc>
+              <a:buNone/>
+            </a:pPr>
+            <a:r>
+              <a:rPr lang="en-US" sz="1400" dirty="0">
+                <a:solidFill>
+                  <a:srgbClr val="332F2A"/>
+                </a:solidFill>
+                <a:latin typeface="IBM Plex Mono" pitchFamily="34" charset="0"/>
+                <a:ea typeface="IBM Plex Mono" pitchFamily="34" charset="-122"/>
+                <a:cs typeface="IBM Plex Mono" pitchFamily="34" charset="-120"/>
+              </a:rPr>
+              <a:t>3. Score it. Check what it flagged,</a:t>
+            </a:r>
+            <a:endParaRPr lang="en-US" sz="1400" dirty="0"/>
+          </a:p>
+          <a:p>
+            <a:pPr indent="0" marL="0">
+              <a:lnSpc>
+                <a:spcPct val="160000"/>
+              </a:lnSpc>
+              <a:buNone/>
+            </a:pPr>
+            <a:r>
+              <a:rPr lang="en-US" sz="1400" dirty="0">
+                <a:solidFill>
+                  <a:srgbClr val="332F2A"/>
+                </a:solidFill>
+                <a:latin typeface="IBM Plex Mono" pitchFamily="34" charset="0"/>
+                <a:ea typeface="IBM Plex Mono" pitchFamily="34" charset="-122"/>
+                <a:cs typeface="IBM Plex Mono" pitchFamily="34" charset="-120"/>
+              </a:rPr>
+              <a:t>   and what it should have.</a:t>
+            </a:r>
+            <a:endParaRPr lang="en-US" sz="1400" dirty="0"/>
+          </a:p>
+          <a:p>
+            <a:pPr indent="0" marL="0">
+              <a:lnSpc>
+                <a:spcPct val="160000"/>
+              </a:lnSpc>
+              <a:buNone/>
+            </a:pPr>
+            <a:endParaRPr lang="en-US" sz="1400" dirty="0"/>
+          </a:p>
+          <a:p>
+            <a:pPr indent="0" marL="0">
+              <a:lnSpc>
+                <a:spcPct val="160000"/>
+              </a:lnSpc>
+              <a:buNone/>
+            </a:pPr>
+            <a:r>
+              <a:rPr lang="en-US" sz="1400" dirty="0">
+                <a:solidFill>
+                  <a:srgbClr val="332F2A"/>
+                </a:solidFill>
+                <a:latin typeface="IBM Plex Mono" pitchFamily="34" charset="0"/>
+                <a:ea typeface="IBM Plex Mono" pitchFamily="34" charset="-122"/>
+                <a:cs typeface="IBM Plex Mono" pitchFamily="34" charset="-120"/>
+              </a:rPr>
+              <a:t>4. Change ONE line. Score again.</a:t>
+            </a:r>
+            <a:endParaRPr lang="en-US" sz="1400" dirty="0"/>
+          </a:p>
+          <a:p>
+            <a:pPr indent="0" marL="0">
+              <a:lnSpc>
+                <a:spcPct val="160000"/>
+              </a:lnSpc>
+              <a:buNone/>
+            </a:pPr>
+            <a:endParaRPr lang="en-US" sz="1400" dirty="0"/>
+          </a:p>
+          <a:p>
+            <a:pPr indent="0" marL="0">
+              <a:lnSpc>
+                <a:spcPct val="160000"/>
+              </a:lnSpc>
+              <a:buNone/>
+            </a:pPr>
+            <a:r>
+              <a:rPr lang="en-US" sz="1400" dirty="0">
+                <a:solidFill>
+                  <a:srgbClr val="332F2A"/>
+                </a:solidFill>
+                <a:latin typeface="IBM Plex Mono" pitchFamily="34" charset="0"/>
+                <a:ea typeface="IBM Plex Mono" pitchFamily="34" charset="-122"/>
+                <a:cs typeface="IBM Plex Mono" pitchFamily="34" charset="-120"/>
+              </a:rPr>
+              <a:t>5. Keep it or revert it. Repeat.</a:t>
+            </a:r>
+            <a:endParaRPr lang="en-US" sz="1400" dirty="0"/>
+          </a:p>
+        </p:txBody>
+      </p:sp>
+      <p:sp>
+        <p:nvSpPr>
+          <p:cNvPr id="9" name="Text 7"/>
+          <p:cNvSpPr/>
+          <p:nvPr/>
+        </p:nvSpPr>
+        <p:spPr>
+          <a:xfrm>
+            <a:off x="7431430" y="1511300"/>
+            <a:ext cx="4201770" cy="1600200"/>
           </a:xfrm>
           <a:prstGeom prst="rect">
             <a:avLst/>
@@ -7130,7 +7755,7 @@
                 <a:ea typeface="Libre Franklin" pitchFamily="34" charset="-122"/>
                 <a:cs typeface="Libre Franklin" pitchFamily="34" charset="-120"/>
               </a:rPr>
-              <a:t>Carpool: “anyone driving Friday morning?” Sessions: “physics cramming thurs after lab, 5ish”. Bills: a pasted delivery receipt.</a:t>
+              <a:t>The prompt in core/intake.py already scores ten out of ten on the ten messages you were given, so there is nothing to improve there. Bring it messages it has never seen.</a:t>
             </a:r>
             <a:endParaRPr lang="en-US" sz="1600" dirty="0"/>
           </a:p>
@@ -7138,14 +7763,14 @@
       </p:sp>
       <p:sp>
         <p:nvSpPr>
-          <p:cNvPr id="9" name="Text 7"/>
-          <p:cNvSpPr/>
-          <p:nvPr/>
-        </p:nvSpPr>
-        <p:spPr>
-          <a:xfrm>
-            <a:off x="558800" y="3162300"/>
-            <a:ext cx="5283200" cy="1270000"/>
+          <p:cNvPr id="10" name="Text 8"/>
+          <p:cNvSpPr/>
+          <p:nvPr/>
+        </p:nvSpPr>
+        <p:spPr>
+          <a:xfrm>
+            <a:off x="7431430" y="3238500"/>
+            <a:ext cx="4201770" cy="1600200"/>
           </a:xfrm>
           <a:prstGeom prst="rect">
             <a:avLst/>
@@ -7172,7 +7797,7 @@
                 <a:ea typeface="Libre Franklin" pitchFamily="34" charset="-122"/>
                 <a:cs typeface="Libre Franklin" pitchFamily="34" charset="-120"/>
               </a:rPr>
-              <a:t>Free text a person would understand instantly and your code cannot touch.</a:t>
+              <a:t>Order in Thai. Order something the menu nearly has. Change your mind mid-sentence. Then make the prompt handle it — and prove that you did.</a:t>
             </a:r>
             <a:endParaRPr lang="en-US" sz="1600" dirty="0"/>
           </a:p>
@@ -7180,75 +7805,53 @@
       </p:sp>
       <p:sp>
         <p:nvSpPr>
-          <p:cNvPr id="10" name="Text 8"/>
-          <p:cNvSpPr/>
-          <p:nvPr/>
-        </p:nvSpPr>
-        <p:spPr>
-          <a:xfrm>
-            <a:off x="6350000" y="1511300"/>
-            <a:ext cx="5283200" cy="254000"/>
-          </a:xfrm>
-          <a:prstGeom prst="rect">
-            <a:avLst/>
-          </a:prstGeom>
-          <a:noFill/>
-          <a:ln/>
-        </p:spPr>
-        <p:txBody>
-          <a:bodyPr wrap="square" lIns="0" tIns="0" rIns="0" bIns="0" rtlCol="0" anchor="t"/>
-          <a:lstStyle/>
-          <a:p>
-            <a:pPr algn="l" indent="0" marL="0">
-              <a:lnSpc>
-                <a:spcPct val="145000"/>
-              </a:lnSpc>
-              <a:buNone/>
-            </a:pPr>
-            <a:r>
-              <a:rPr lang="en-US" sz="1300" spc="130" kern="0" dirty="0">
-                <a:solidFill>
-                  <a:srgbClr val="A87A2E"/>
-                </a:solidFill>
-                <a:latin typeface="IBM Plex Mono" pitchFamily="34" charset="0"/>
-                <a:ea typeface="IBM Plex Mono" pitchFamily="34" charset="-122"/>
-                <a:cs typeface="IBM Plex Mono" pitchFamily="34" charset="-120"/>
-              </a:rPr>
-              <a:t>THE SHAPE YOU WANT</a:t>
-            </a:r>
-            <a:endParaRPr lang="en-US" sz="1300" dirty="0"/>
-          </a:p>
-        </p:txBody>
-      </p:sp>
-      <p:sp>
-        <p:nvSpPr>
-          <p:cNvPr id="11" name="Text 9"/>
-          <p:cNvSpPr/>
-          <p:nvPr/>
-        </p:nvSpPr>
-        <p:spPr>
-          <a:xfrm>
-            <a:off x="6350000" y="1917700"/>
-            <a:ext cx="5283200" cy="1270000"/>
-          </a:xfrm>
-          <a:prstGeom prst="rect">
-            <a:avLst/>
-          </a:prstGeom>
-          <a:noFill/>
-          <a:ln/>
-        </p:spPr>
-        <p:txBody>
-          <a:bodyPr wrap="square" lIns="0" tIns="0" rIns="0" bIns="0" rtlCol="0" anchor="t"/>
-          <a:lstStyle/>
-          <a:p>
-            <a:pPr algn="l" indent="0" marL="0">
-              <a:lnSpc>
-                <a:spcPct val="145000"/>
-              </a:lnSpc>
-              <a:buNone/>
-            </a:pPr>
-            <a:r>
-              <a:rPr lang="en-US" sz="1600" dirty="0">
+          <p:cNvPr id="11" name="Shape 9"/>
+          <p:cNvSpPr/>
+          <p:nvPr/>
+        </p:nvSpPr>
+        <p:spPr>
+          <a:xfrm>
+            <a:off x="7431430" y="5384800"/>
+            <a:ext cx="12700" cy="698500"/>
+          </a:xfrm>
+          <a:prstGeom prst="rect">
+            <a:avLst/>
+          </a:prstGeom>
+          <a:solidFill>
+            <a:srgbClr val="A87A2E"/>
+          </a:solidFill>
+          <a:ln/>
+        </p:spPr>
+      </p:sp>
+      <p:sp>
+        <p:nvSpPr>
+          <p:cNvPr id="12" name="Text 10"/>
+          <p:cNvSpPr/>
+          <p:nvPr/>
+        </p:nvSpPr>
+        <p:spPr>
+          <a:xfrm>
+            <a:off x="7596530" y="5416550"/>
+            <a:ext cx="4036670" cy="698500"/>
+          </a:xfrm>
+          <a:prstGeom prst="rect">
+            <a:avLst/>
+          </a:prstGeom>
+          <a:noFill/>
+          <a:ln/>
+        </p:spPr>
+        <p:txBody>
+          <a:bodyPr wrap="square" lIns="0" tIns="0" rIns="0" bIns="0" rtlCol="0" anchor="t"/>
+          <a:lstStyle/>
+          <a:p>
+            <a:pPr algn="l" indent="0" marL="0">
+              <a:lnSpc>
+                <a:spcPct val="140000"/>
+              </a:lnSpc>
+              <a:buNone/>
+            </a:pPr>
+            <a:r>
+              <a:rPr lang="en-US" sz="1500" dirty="0">
                 <a:solidFill>
                   <a:srgbClr val="332F2A"/>
                 </a:solidFill>
@@ -7256,51 +7859,9 @@
                 <a:ea typeface="Libre Franklin" pitchFamily="34" charset="-122"/>
                 <a:cs typeface="Libre Franklin" pitchFamily="34" charset="-120"/>
               </a:rPr>
-              <a:t>Carpool: a date and a time window. Sessions: subject, date, start, end, place. Bills: items, amounts, who shares.</a:t>
-            </a:r>
-            <a:endParaRPr lang="en-US" sz="1600" dirty="0"/>
-          </a:p>
-        </p:txBody>
-      </p:sp>
-      <p:sp>
-        <p:nvSpPr>
-          <p:cNvPr id="12" name="Text 10"/>
-          <p:cNvSpPr/>
-          <p:nvPr/>
-        </p:nvSpPr>
-        <p:spPr>
-          <a:xfrm>
-            <a:off x="6350000" y="3162300"/>
-            <a:ext cx="5283200" cy="1270000"/>
-          </a:xfrm>
-          <a:prstGeom prst="rect">
-            <a:avLst/>
-          </a:prstGeom>
-          <a:noFill/>
-          <a:ln/>
-        </p:spPr>
-        <p:txBody>
-          <a:bodyPr wrap="square" lIns="0" tIns="0" rIns="0" bIns="0" rtlCol="0" anchor="t"/>
-          <a:lstStyle/>
-          <a:p>
-            <a:pPr algn="l" indent="0" marL="0">
-              <a:lnSpc>
-                <a:spcPct val="145000"/>
-              </a:lnSpc>
-              <a:buNone/>
-            </a:pPr>
-            <a:r>
-              <a:rPr lang="en-US" sz="1600" dirty="0">
-                <a:solidFill>
-                  <a:srgbClr val="77726A"/>
-                </a:solidFill>
-                <a:latin typeface="Libre Franklin" pitchFamily="34" charset="0"/>
-                <a:ea typeface="Libre Franklin" pitchFamily="34" charset="-122"/>
-                <a:cs typeface="Libre Franklin" pitchFamily="34" charset="-120"/>
-              </a:rPr>
-              <a:t>core/llm.py has been an empty slot in your project since Session 1, for exactly this.</a:t>
-            </a:r>
-            <a:endParaRPr lang="en-US" sz="1600" dirty="0"/>
+              <a:t>A prompt you cannot score is a prompt you cannot improve.</a:t>
+            </a:r>
+            <a:endParaRPr lang="en-US" sz="1500" dirty="0"/>
           </a:p>
         </p:txBody>
       </p:sp>
@@ -7770,7 +8331,7 @@
                 <a:ea typeface="Libre Franklin" pitchFamily="34" charset="-122"/>
                 <a:cs typeface="Libre Franklin" pitchFamily="34" charset="-120"/>
               </a:rPr>
-              <a:t>Examples, and when they pay</a:t>
+              <a:t>Knowing if it works</a:t>
             </a:r>
             <a:endParaRPr lang="en-US" sz="1700" dirty="0"/>
           </a:p>
@@ -7854,7 +8415,7 @@
                 <a:ea typeface="Libre Franklin" pitchFamily="34" charset="-122"/>
                 <a:cs typeface="Libre Franklin" pitchFamily="34" charset="-120"/>
               </a:rPr>
-              <a:t>Making a prompt better on purpose</a:t>
+              <a:t>Examples, and making it better</a:t>
             </a:r>
             <a:endParaRPr lang="en-US" sz="1700" dirty="0"/>
           </a:p>
@@ -8096,7 +8657,7 @@
                 <a:ea typeface="IBM Plex Mono" pitchFamily="34" charset="-122"/>
                 <a:cs typeface="IBM Plex Mono" pitchFamily="34" charset="-120"/>
               </a:rPr>
-              <a:t>SECTION 06</a:t>
+              <a:t>SECTION 05</a:t>
             </a:r>
             <a:endParaRPr lang="en-US" sz="1300" dirty="0"/>
           </a:p>
@@ -8138,7 +8699,7 @@
                 <a:ea typeface="Libre Franklin" pitchFamily="34" charset="-122"/>
                 <a:cs typeface="Libre Franklin" pitchFamily="34" charset="-120"/>
               </a:rPr>
-              <a:t>Demos</a:t>
+              <a:t>Then put it in your project</a:t>
             </a:r>
             <a:endParaRPr lang="en-US" sz="4000" dirty="0"/>
           </a:p>
@@ -8180,7 +8741,7 @@
                 <a:ea typeface="Libre Franklin" pitchFamily="34" charset="-122"/>
                 <a:cs typeface="Libre Franklin" pitchFamily="34" charset="-120"/>
               </a:rPr>
-              <a:t>Two rounds. Half of you present, half of you walk around and score. Then swap.</a:t>
+              <a:t>Twenty minutes. Every brief has an AI feature waiting, and it is this lab wearing different clothes.</a:t>
             </a:r>
             <a:endParaRPr lang="en-US" sz="1700" dirty="0"/>
           </a:p>
@@ -8197,6 +8758,478 @@
 <file path=ppt/slides/slide21.xml><?xml version="1.0" encoding="utf-8"?>
 <p:sld xmlns:a="http://schemas.openxmlformats.org/drawingml/2006/main" xmlns:r="http://schemas.openxmlformats.org/officeDocument/2006/relationships" xmlns:p="http://schemas.openxmlformats.org/presentationml/2006/main">
   <p:cSld name="Slide 21">
+    <p:bg>
+      <p:bgPr>
+        <a:solidFill>
+          <a:srgbClr val="FCFBF8"/>
+        </a:solidFill>
+      </p:bgPr>
+    </p:bg>
+    <p:spTree>
+      <p:nvGrpSpPr>
+        <p:cNvPr id="1" name=""/>
+        <p:cNvGrpSpPr/>
+        <p:nvPr/>
+      </p:nvGrpSpPr>
+      <p:grpSpPr>
+        <a:xfrm>
+          <a:off x="0" y="0"/>
+          <a:ext cx="0" cy="0"/>
+          <a:chOff x="0" y="0"/>
+          <a:chExt cx="0" cy="0"/>
+        </a:xfrm>
+      </p:grpSpPr>
+      <p:sp>
+        <p:nvSpPr>
+          <p:cNvPr id="2" name="Text 0"/>
+          <p:cNvSpPr/>
+          <p:nvPr/>
+        </p:nvSpPr>
+        <p:spPr>
+          <a:xfrm>
+            <a:off x="558800" y="355600"/>
+            <a:ext cx="11074400" cy="215900"/>
+          </a:xfrm>
+          <a:prstGeom prst="rect">
+            <a:avLst/>
+          </a:prstGeom>
+          <a:noFill/>
+          <a:ln/>
+        </p:spPr>
+        <p:txBody>
+          <a:bodyPr wrap="square" lIns="0" tIns="0" rIns="0" bIns="0" rtlCol="0" anchor="t"/>
+          <a:lstStyle/>
+          <a:p>
+            <a:pPr algn="l" indent="0" marL="0">
+              <a:lnSpc>
+                <a:spcPct val="145000"/>
+              </a:lnSpc>
+              <a:buNone/>
+            </a:pPr>
+            <a:r>
+              <a:rPr lang="en-US" sz="1200" spc="168" kern="0" dirty="0">
+                <a:solidFill>
+                  <a:srgbClr val="77726A"/>
+                </a:solidFill>
+                <a:latin typeface="IBM Plex Mono" pitchFamily="34" charset="0"/>
+                <a:ea typeface="IBM Plex Mono" pitchFamily="34" charset="-122"/>
+                <a:cs typeface="IBM Plex Mono" pitchFamily="34" charset="-120"/>
+              </a:rPr>
+              <a:t>SECTION 05</a:t>
+            </a:r>
+            <a:endParaRPr lang="en-US" sz="1200" dirty="0"/>
+          </a:p>
+        </p:txBody>
+      </p:sp>
+      <p:sp>
+        <p:nvSpPr>
+          <p:cNvPr id="3" name="Text 1"/>
+          <p:cNvSpPr/>
+          <p:nvPr/>
+        </p:nvSpPr>
+        <p:spPr>
+          <a:xfrm>
+            <a:off x="558800" y="635000"/>
+            <a:ext cx="11074400" cy="508000"/>
+          </a:xfrm>
+          <a:prstGeom prst="rect">
+            <a:avLst/>
+          </a:prstGeom>
+          <a:noFill/>
+          <a:ln/>
+        </p:spPr>
+        <p:txBody>
+          <a:bodyPr wrap="square" lIns="0" tIns="0" rIns="0" bIns="0" rtlCol="0" anchor="t"/>
+          <a:lstStyle/>
+          <a:p>
+            <a:pPr algn="l" indent="0" marL="0">
+              <a:lnSpc>
+                <a:spcPct val="110000"/>
+              </a:lnSpc>
+              <a:buNone/>
+            </a:pPr>
+            <a:r>
+              <a:rPr lang="en-US" sz="2800" b="1" dirty="0">
+                <a:solidFill>
+                  <a:srgbClr val="332F2A"/>
+                </a:solidFill>
+                <a:latin typeface="Libre Franklin" pitchFamily="34" charset="0"/>
+                <a:ea typeface="Libre Franklin" pitchFamily="34" charset="-122"/>
+                <a:cs typeface="Libre Franklin" pitchFamily="34" charset="-120"/>
+              </a:rPr>
+              <a:t>Your brief already has the slot</a:t>
+            </a:r>
+            <a:endParaRPr lang="en-US" sz="2800" dirty="0"/>
+          </a:p>
+        </p:txBody>
+      </p:sp>
+      <p:sp>
+        <p:nvSpPr>
+          <p:cNvPr id="4" name="Shape 2"/>
+          <p:cNvSpPr/>
+          <p:nvPr/>
+        </p:nvSpPr>
+        <p:spPr>
+          <a:xfrm>
+            <a:off x="558800" y="1181100"/>
+            <a:ext cx="11074400" cy="6350"/>
+          </a:xfrm>
+          <a:prstGeom prst="rect">
+            <a:avLst/>
+          </a:prstGeom>
+          <a:solidFill>
+            <a:srgbClr val="E1DED7"/>
+          </a:solidFill>
+          <a:ln/>
+        </p:spPr>
+      </p:sp>
+      <p:sp>
+        <p:nvSpPr>
+          <p:cNvPr id="5" name="Text 3"/>
+          <p:cNvSpPr/>
+          <p:nvPr/>
+        </p:nvSpPr>
+        <p:spPr>
+          <a:xfrm>
+            <a:off x="558800" y="6337300"/>
+            <a:ext cx="9804400" cy="215900"/>
+          </a:xfrm>
+          <a:prstGeom prst="rect">
+            <a:avLst/>
+          </a:prstGeom>
+          <a:noFill/>
+          <a:ln/>
+        </p:spPr>
+        <p:txBody>
+          <a:bodyPr wrap="square" lIns="0" tIns="0" rIns="0" bIns="0" rtlCol="0" anchor="t"/>
+          <a:lstStyle/>
+          <a:p>
+            <a:pPr algn="l" indent="0" marL="0">
+              <a:lnSpc>
+                <a:spcPct val="145000"/>
+              </a:lnSpc>
+              <a:buNone/>
+            </a:pPr>
+            <a:r>
+              <a:rPr lang="en-US" sz="1200" dirty="0">
+                <a:solidFill>
+                  <a:srgbClr val="99948B"/>
+                </a:solidFill>
+                <a:latin typeface="IBM Plex Mono" pitchFamily="34" charset="0"/>
+                <a:ea typeface="IBM Plex Mono" pitchFamily="34" charset="-122"/>
+                <a:cs typeface="IBM Plex Mono" pitchFamily="34" charset="-120"/>
+              </a:rPr>
+              <a:t>AI for Software Development · Session 3</a:t>
+            </a:r>
+            <a:endParaRPr lang="en-US" sz="1200" dirty="0"/>
+          </a:p>
+        </p:txBody>
+      </p:sp>
+      <p:sp>
+        <p:nvSpPr>
+          <p:cNvPr id="6" name="Text 4"/>
+          <p:cNvSpPr/>
+          <p:nvPr/>
+        </p:nvSpPr>
+        <p:spPr>
+          <a:xfrm>
+            <a:off x="10363200" y="6337300"/>
+            <a:ext cx="1270000" cy="215900"/>
+          </a:xfrm>
+          <a:prstGeom prst="rect">
+            <a:avLst/>
+          </a:prstGeom>
+          <a:noFill/>
+          <a:ln/>
+        </p:spPr>
+        <p:txBody>
+          <a:bodyPr wrap="square" lIns="0" tIns="0" rIns="0" bIns="0" rtlCol="0" anchor="t"/>
+          <a:lstStyle/>
+          <a:p>
+            <a:pPr algn="r" indent="0" marL="0">
+              <a:lnSpc>
+                <a:spcPct val="145000"/>
+              </a:lnSpc>
+              <a:buNone/>
+            </a:pPr>
+            <a:r>
+              <a:rPr lang="en-US" sz="1200" dirty="0">
+                <a:solidFill>
+                  <a:srgbClr val="99948B"/>
+                </a:solidFill>
+                <a:latin typeface="IBM Plex Mono" pitchFamily="34" charset="0"/>
+                <a:ea typeface="IBM Plex Mono" pitchFamily="34" charset="-122"/>
+                <a:cs typeface="IBM Plex Mono" pitchFamily="34" charset="-120"/>
+              </a:rPr>
+              <a:t>21</a:t>
+            </a:r>
+            <a:endParaRPr lang="en-US" sz="1200" dirty="0"/>
+          </a:p>
+        </p:txBody>
+      </p:sp>
+      <p:sp>
+        <p:nvSpPr>
+          <p:cNvPr id="7" name="Text 5"/>
+          <p:cNvSpPr/>
+          <p:nvPr/>
+        </p:nvSpPr>
+        <p:spPr>
+          <a:xfrm>
+            <a:off x="558800" y="1511300"/>
+            <a:ext cx="5283200" cy="254000"/>
+          </a:xfrm>
+          <a:prstGeom prst="rect">
+            <a:avLst/>
+          </a:prstGeom>
+          <a:noFill/>
+          <a:ln/>
+        </p:spPr>
+        <p:txBody>
+          <a:bodyPr wrap="square" lIns="0" tIns="0" rIns="0" bIns="0" rtlCol="0" anchor="t"/>
+          <a:lstStyle/>
+          <a:p>
+            <a:pPr algn="l" indent="0" marL="0">
+              <a:lnSpc>
+                <a:spcPct val="145000"/>
+              </a:lnSpc>
+              <a:buNone/>
+            </a:pPr>
+            <a:r>
+              <a:rPr lang="en-US" sz="1300" spc="130" kern="0" dirty="0">
+                <a:solidFill>
+                  <a:srgbClr val="A87A2E"/>
+                </a:solidFill>
+                <a:latin typeface="IBM Plex Mono" pitchFamily="34" charset="0"/>
+                <a:ea typeface="IBM Plex Mono" pitchFamily="34" charset="-122"/>
+                <a:cs typeface="IBM Plex Mono" pitchFamily="34" charset="-120"/>
+              </a:rPr>
+              <a:t>THE MESSY INPUT</a:t>
+            </a:r>
+            <a:endParaRPr lang="en-US" sz="1300" dirty="0"/>
+          </a:p>
+        </p:txBody>
+      </p:sp>
+      <p:sp>
+        <p:nvSpPr>
+          <p:cNvPr id="8" name="Text 6"/>
+          <p:cNvSpPr/>
+          <p:nvPr/>
+        </p:nvSpPr>
+        <p:spPr>
+          <a:xfrm>
+            <a:off x="558800" y="1917700"/>
+            <a:ext cx="5283200" cy="1270000"/>
+          </a:xfrm>
+          <a:prstGeom prst="rect">
+            <a:avLst/>
+          </a:prstGeom>
+          <a:noFill/>
+          <a:ln/>
+        </p:spPr>
+        <p:txBody>
+          <a:bodyPr wrap="square" lIns="0" tIns="0" rIns="0" bIns="0" rtlCol="0" anchor="t"/>
+          <a:lstStyle/>
+          <a:p>
+            <a:pPr algn="l" indent="0" marL="0">
+              <a:lnSpc>
+                <a:spcPct val="145000"/>
+              </a:lnSpc>
+              <a:buNone/>
+            </a:pPr>
+            <a:r>
+              <a:rPr lang="en-US" sz="1600" dirty="0">
+                <a:solidFill>
+                  <a:srgbClr val="332F2A"/>
+                </a:solidFill>
+                <a:latin typeface="Libre Franklin" pitchFamily="34" charset="0"/>
+                <a:ea typeface="Libre Franklin" pitchFamily="34" charset="-122"/>
+                <a:cs typeface="Libre Franklin" pitchFamily="34" charset="-120"/>
+              </a:rPr>
+              <a:t>Carpool: “anyone driving Friday morning?” Sessions: “physics cramming thurs after lab, 5ish”. Bills: a pasted delivery receipt.</a:t>
+            </a:r>
+            <a:endParaRPr lang="en-US" sz="1600" dirty="0"/>
+          </a:p>
+        </p:txBody>
+      </p:sp>
+      <p:sp>
+        <p:nvSpPr>
+          <p:cNvPr id="9" name="Text 7"/>
+          <p:cNvSpPr/>
+          <p:nvPr/>
+        </p:nvSpPr>
+        <p:spPr>
+          <a:xfrm>
+            <a:off x="558800" y="3162300"/>
+            <a:ext cx="5283200" cy="1270000"/>
+          </a:xfrm>
+          <a:prstGeom prst="rect">
+            <a:avLst/>
+          </a:prstGeom>
+          <a:noFill/>
+          <a:ln/>
+        </p:spPr>
+        <p:txBody>
+          <a:bodyPr wrap="square" lIns="0" tIns="0" rIns="0" bIns="0" rtlCol="0" anchor="t"/>
+          <a:lstStyle/>
+          <a:p>
+            <a:pPr algn="l" indent="0" marL="0">
+              <a:lnSpc>
+                <a:spcPct val="145000"/>
+              </a:lnSpc>
+              <a:buNone/>
+            </a:pPr>
+            <a:r>
+              <a:rPr lang="en-US" sz="1600" dirty="0">
+                <a:solidFill>
+                  <a:srgbClr val="77726A"/>
+                </a:solidFill>
+                <a:latin typeface="Libre Franklin" pitchFamily="34" charset="0"/>
+                <a:ea typeface="Libre Franklin" pitchFamily="34" charset="-122"/>
+                <a:cs typeface="Libre Franklin" pitchFamily="34" charset="-120"/>
+              </a:rPr>
+              <a:t>Free text a person would understand instantly and your code cannot touch.</a:t>
+            </a:r>
+            <a:endParaRPr lang="en-US" sz="1600" dirty="0"/>
+          </a:p>
+        </p:txBody>
+      </p:sp>
+      <p:sp>
+        <p:nvSpPr>
+          <p:cNvPr id="10" name="Text 8"/>
+          <p:cNvSpPr/>
+          <p:nvPr/>
+        </p:nvSpPr>
+        <p:spPr>
+          <a:xfrm>
+            <a:off x="6350000" y="1511300"/>
+            <a:ext cx="5283200" cy="254000"/>
+          </a:xfrm>
+          <a:prstGeom prst="rect">
+            <a:avLst/>
+          </a:prstGeom>
+          <a:noFill/>
+          <a:ln/>
+        </p:spPr>
+        <p:txBody>
+          <a:bodyPr wrap="square" lIns="0" tIns="0" rIns="0" bIns="0" rtlCol="0" anchor="t"/>
+          <a:lstStyle/>
+          <a:p>
+            <a:pPr algn="l" indent="0" marL="0">
+              <a:lnSpc>
+                <a:spcPct val="145000"/>
+              </a:lnSpc>
+              <a:buNone/>
+            </a:pPr>
+            <a:r>
+              <a:rPr lang="en-US" sz="1300" spc="130" kern="0" dirty="0">
+                <a:solidFill>
+                  <a:srgbClr val="A87A2E"/>
+                </a:solidFill>
+                <a:latin typeface="IBM Plex Mono" pitchFamily="34" charset="0"/>
+                <a:ea typeface="IBM Plex Mono" pitchFamily="34" charset="-122"/>
+                <a:cs typeface="IBM Plex Mono" pitchFamily="34" charset="-120"/>
+              </a:rPr>
+              <a:t>THE SHAPE YOU WANT</a:t>
+            </a:r>
+            <a:endParaRPr lang="en-US" sz="1300" dirty="0"/>
+          </a:p>
+        </p:txBody>
+      </p:sp>
+      <p:sp>
+        <p:nvSpPr>
+          <p:cNvPr id="11" name="Text 9"/>
+          <p:cNvSpPr/>
+          <p:nvPr/>
+        </p:nvSpPr>
+        <p:spPr>
+          <a:xfrm>
+            <a:off x="6350000" y="1917700"/>
+            <a:ext cx="5283200" cy="1270000"/>
+          </a:xfrm>
+          <a:prstGeom prst="rect">
+            <a:avLst/>
+          </a:prstGeom>
+          <a:noFill/>
+          <a:ln/>
+        </p:spPr>
+        <p:txBody>
+          <a:bodyPr wrap="square" lIns="0" tIns="0" rIns="0" bIns="0" rtlCol="0" anchor="t"/>
+          <a:lstStyle/>
+          <a:p>
+            <a:pPr algn="l" indent="0" marL="0">
+              <a:lnSpc>
+                <a:spcPct val="145000"/>
+              </a:lnSpc>
+              <a:buNone/>
+            </a:pPr>
+            <a:r>
+              <a:rPr lang="en-US" sz="1600" dirty="0">
+                <a:solidFill>
+                  <a:srgbClr val="332F2A"/>
+                </a:solidFill>
+                <a:latin typeface="Libre Franklin" pitchFamily="34" charset="0"/>
+                <a:ea typeface="Libre Franklin" pitchFamily="34" charset="-122"/>
+                <a:cs typeface="Libre Franklin" pitchFamily="34" charset="-120"/>
+              </a:rPr>
+              <a:t>Carpool: a date and a time window. Sessions: subject, date, start, end, place. Bills: items, amounts, who shares.</a:t>
+            </a:r>
+            <a:endParaRPr lang="en-US" sz="1600" dirty="0"/>
+          </a:p>
+        </p:txBody>
+      </p:sp>
+      <p:sp>
+        <p:nvSpPr>
+          <p:cNvPr id="12" name="Text 10"/>
+          <p:cNvSpPr/>
+          <p:nvPr/>
+        </p:nvSpPr>
+        <p:spPr>
+          <a:xfrm>
+            <a:off x="6350000" y="3162300"/>
+            <a:ext cx="5283200" cy="1270000"/>
+          </a:xfrm>
+          <a:prstGeom prst="rect">
+            <a:avLst/>
+          </a:prstGeom>
+          <a:noFill/>
+          <a:ln/>
+        </p:spPr>
+        <p:txBody>
+          <a:bodyPr wrap="square" lIns="0" tIns="0" rIns="0" bIns="0" rtlCol="0" anchor="t"/>
+          <a:lstStyle/>
+          <a:p>
+            <a:pPr algn="l" indent="0" marL="0">
+              <a:lnSpc>
+                <a:spcPct val="145000"/>
+              </a:lnSpc>
+              <a:buNone/>
+            </a:pPr>
+            <a:r>
+              <a:rPr lang="en-US" sz="1600" dirty="0">
+                <a:solidFill>
+                  <a:srgbClr val="77726A"/>
+                </a:solidFill>
+                <a:latin typeface="Libre Franklin" pitchFamily="34" charset="0"/>
+                <a:ea typeface="Libre Franklin" pitchFamily="34" charset="-122"/>
+                <a:cs typeface="Libre Franklin" pitchFamily="34" charset="-120"/>
+              </a:rPr>
+              <a:t>core/llm.py has been an empty slot in your project since Session 1, for exactly this.</a:t>
+            </a:r>
+            <a:endParaRPr lang="en-US" sz="1600" dirty="0"/>
+          </a:p>
+        </p:txBody>
+      </p:sp>
+    </p:spTree>
+  </p:cSld>
+  <p:clrMapOvr>
+    <a:masterClrMapping/>
+  </p:clrMapOvr>
+</p:sld>
+</file>
+
+<file path=ppt/slides/slide22.xml><?xml version="1.0" encoding="utf-8"?>
+<p:sld xmlns:a="http://schemas.openxmlformats.org/drawingml/2006/main" xmlns:r="http://schemas.openxmlformats.org/officeDocument/2006/relationships" xmlns:p="http://schemas.openxmlformats.org/presentationml/2006/main">
+  <p:cSld name="Slide 22">
     <p:bg>
       <p:bgPr>
         <a:solidFill>
@@ -8226,37 +9259,37 @@
         </p:nvSpPr>
         <p:spPr>
           <a:xfrm>
-            <a:off x="558800" y="355600"/>
-            <a:ext cx="11074400" cy="215900"/>
-          </a:xfrm>
-          <a:prstGeom prst="rect">
-            <a:avLst/>
-          </a:prstGeom>
-          <a:noFill/>
-          <a:ln/>
-        </p:spPr>
-        <p:txBody>
-          <a:bodyPr wrap="square" lIns="0" tIns="0" rIns="0" bIns="0" rtlCol="0" anchor="t"/>
-          <a:lstStyle/>
-          <a:p>
-            <a:pPr algn="l" indent="0" marL="0">
-              <a:lnSpc>
-                <a:spcPct val="145000"/>
-              </a:lnSpc>
-              <a:buNone/>
-            </a:pPr>
-            <a:r>
-              <a:rPr lang="en-US" sz="1200" spc="168" kern="0" dirty="0">
-                <a:solidFill>
-                  <a:srgbClr val="77726A"/>
+            <a:off x="558800" y="2286000"/>
+            <a:ext cx="11074400" cy="254000"/>
+          </a:xfrm>
+          <a:prstGeom prst="rect">
+            <a:avLst/>
+          </a:prstGeom>
+          <a:noFill/>
+          <a:ln/>
+        </p:spPr>
+        <p:txBody>
+          <a:bodyPr wrap="square" lIns="0" tIns="0" rIns="0" bIns="0" rtlCol="0" anchor="t"/>
+          <a:lstStyle/>
+          <a:p>
+            <a:pPr algn="l" indent="0" marL="0">
+              <a:lnSpc>
+                <a:spcPct val="145000"/>
+              </a:lnSpc>
+              <a:buNone/>
+            </a:pPr>
+            <a:r>
+              <a:rPr lang="en-US" sz="1300" spc="182" kern="0" dirty="0">
+                <a:solidFill>
+                  <a:srgbClr val="A87A2E"/>
                 </a:solidFill>
                 <a:latin typeface="IBM Plex Mono" pitchFamily="34" charset="0"/>
                 <a:ea typeface="IBM Plex Mono" pitchFamily="34" charset="-122"/>
                 <a:cs typeface="IBM Plex Mono" pitchFamily="34" charset="-120"/>
               </a:rPr>
-              <a:t>SESSION 03</a:t>
-            </a:r>
-            <a:endParaRPr lang="en-US" sz="1200" dirty="0"/>
+              <a:t>SECTION 06</a:t>
+            </a:r>
+            <a:endParaRPr lang="en-US" sz="1300" dirty="0"/>
           </a:p>
         </p:txBody>
       </p:sp>
@@ -8268,27 +9301,27 @@
         </p:nvSpPr>
         <p:spPr>
           <a:xfrm>
-            <a:off x="558800" y="635000"/>
-            <a:ext cx="11074400" cy="508000"/>
-          </a:xfrm>
-          <a:prstGeom prst="rect">
-            <a:avLst/>
-          </a:prstGeom>
-          <a:noFill/>
-          <a:ln/>
-        </p:spPr>
-        <p:txBody>
-          <a:bodyPr wrap="square" lIns="0" tIns="0" rIns="0" bIns="0" rtlCol="0" anchor="t"/>
-          <a:lstStyle/>
-          <a:p>
-            <a:pPr algn="l" indent="0" marL="0">
-              <a:lnSpc>
-                <a:spcPct val="110000"/>
-              </a:lnSpc>
-              <a:buNone/>
-            </a:pPr>
-            <a:r>
-              <a:rPr lang="en-US" sz="2800" b="1" dirty="0">
+            <a:off x="558800" y="2667000"/>
+            <a:ext cx="8255000" cy="1206500"/>
+          </a:xfrm>
+          <a:prstGeom prst="rect">
+            <a:avLst/>
+          </a:prstGeom>
+          <a:noFill/>
+          <a:ln/>
+        </p:spPr>
+        <p:txBody>
+          <a:bodyPr wrap="square" lIns="0" tIns="0" rIns="0" bIns="0" rtlCol="0" anchor="t"/>
+          <a:lstStyle/>
+          <a:p>
+            <a:pPr algn="l" indent="0" marL="0">
+              <a:lnSpc>
+                <a:spcPct val="108000"/>
+              </a:lnSpc>
+              <a:buNone/>
+            </a:pPr>
+            <a:r>
+              <a:rPr lang="en-US" sz="4000" b="1" dirty="0">
                 <a:solidFill>
                   <a:srgbClr val="332F2A"/>
                 </a:solidFill>
@@ -8296,365 +9329,51 @@
                 <a:ea typeface="Libre Franklin" pitchFamily="34" charset="-122"/>
                 <a:cs typeface="Libre Franklin" pitchFamily="34" charset="-120"/>
               </a:rPr>
-              <a:t>What to take away</a:t>
-            </a:r>
-            <a:endParaRPr lang="en-US" sz="2800" dirty="0"/>
-          </a:p>
-        </p:txBody>
-      </p:sp>
-      <p:sp>
-        <p:nvSpPr>
-          <p:cNvPr id="4" name="Shape 2"/>
-          <p:cNvSpPr/>
-          <p:nvPr/>
-        </p:nvSpPr>
-        <p:spPr>
-          <a:xfrm>
-            <a:off x="558800" y="1181100"/>
-            <a:ext cx="11074400" cy="6350"/>
-          </a:xfrm>
-          <a:prstGeom prst="rect">
-            <a:avLst/>
-          </a:prstGeom>
-          <a:solidFill>
-            <a:srgbClr val="E1DED7"/>
-          </a:solidFill>
-          <a:ln/>
-        </p:spPr>
-      </p:sp>
-      <p:sp>
-        <p:nvSpPr>
-          <p:cNvPr id="5" name="Text 3"/>
-          <p:cNvSpPr/>
-          <p:nvPr/>
-        </p:nvSpPr>
-        <p:spPr>
-          <a:xfrm>
-            <a:off x="558800" y="6337300"/>
-            <a:ext cx="9804400" cy="215900"/>
-          </a:xfrm>
-          <a:prstGeom prst="rect">
-            <a:avLst/>
-          </a:prstGeom>
-          <a:noFill/>
-          <a:ln/>
-        </p:spPr>
-        <p:txBody>
-          <a:bodyPr wrap="square" lIns="0" tIns="0" rIns="0" bIns="0" rtlCol="0" anchor="t"/>
-          <a:lstStyle/>
-          <a:p>
-            <a:pPr algn="l" indent="0" marL="0">
-              <a:lnSpc>
-                <a:spcPct val="145000"/>
-              </a:lnSpc>
-              <a:buNone/>
-            </a:pPr>
-            <a:r>
-              <a:rPr lang="en-US" sz="1200" dirty="0">
-                <a:solidFill>
-                  <a:srgbClr val="99948B"/>
-                </a:solidFill>
-                <a:latin typeface="IBM Plex Mono" pitchFamily="34" charset="0"/>
-                <a:ea typeface="IBM Plex Mono" pitchFamily="34" charset="-122"/>
-                <a:cs typeface="IBM Plex Mono" pitchFamily="34" charset="-120"/>
-              </a:rPr>
-              <a:t>AI for Software Development · Session 3</a:t>
-            </a:r>
-            <a:endParaRPr lang="en-US" sz="1200" dirty="0"/>
-          </a:p>
-        </p:txBody>
-      </p:sp>
-      <p:sp>
-        <p:nvSpPr>
-          <p:cNvPr id="6" name="Text 4"/>
-          <p:cNvSpPr/>
-          <p:nvPr/>
-        </p:nvSpPr>
-        <p:spPr>
-          <a:xfrm>
-            <a:off x="10363200" y="6337300"/>
-            <a:ext cx="1270000" cy="215900"/>
-          </a:xfrm>
-          <a:prstGeom prst="rect">
-            <a:avLst/>
-          </a:prstGeom>
-          <a:noFill/>
-          <a:ln/>
-        </p:spPr>
-        <p:txBody>
-          <a:bodyPr wrap="square" lIns="0" tIns="0" rIns="0" bIns="0" rtlCol="0" anchor="t"/>
-          <a:lstStyle/>
-          <a:p>
-            <a:pPr algn="r" indent="0" marL="0">
-              <a:lnSpc>
-                <a:spcPct val="145000"/>
-              </a:lnSpc>
-              <a:buNone/>
-            </a:pPr>
-            <a:r>
-              <a:rPr lang="en-US" sz="1200" dirty="0">
-                <a:solidFill>
-                  <a:srgbClr val="99948B"/>
-                </a:solidFill>
-                <a:latin typeface="IBM Plex Mono" pitchFamily="34" charset="0"/>
-                <a:ea typeface="IBM Plex Mono" pitchFamily="34" charset="-122"/>
-                <a:cs typeface="IBM Plex Mono" pitchFamily="34" charset="-120"/>
-              </a:rPr>
-              <a:t>21</a:t>
-            </a:r>
-            <a:endParaRPr lang="en-US" sz="1200" dirty="0"/>
-          </a:p>
-        </p:txBody>
-      </p:sp>
-      <p:sp>
-        <p:nvSpPr>
-          <p:cNvPr id="7" name="Text 5"/>
-          <p:cNvSpPr/>
-          <p:nvPr/>
-        </p:nvSpPr>
-        <p:spPr>
-          <a:xfrm>
-            <a:off x="558800" y="1511300"/>
-            <a:ext cx="444500" cy="317500"/>
-          </a:xfrm>
-          <a:prstGeom prst="rect">
-            <a:avLst/>
-          </a:prstGeom>
-          <a:noFill/>
-          <a:ln/>
-        </p:spPr>
-        <p:txBody>
-          <a:bodyPr wrap="square" lIns="0" tIns="0" rIns="0" bIns="0" rtlCol="0" anchor="t"/>
-          <a:lstStyle/>
-          <a:p>
-            <a:pPr algn="l" indent="0" marL="0">
-              <a:lnSpc>
-                <a:spcPct val="145000"/>
+              <a:t>Demos</a:t>
+            </a:r>
+            <a:endParaRPr lang="en-US" sz="4000" dirty="0"/>
+          </a:p>
+        </p:txBody>
+      </p:sp>
+      <p:sp>
+        <p:nvSpPr>
+          <p:cNvPr id="4" name="Text 2"/>
+          <p:cNvSpPr/>
+          <p:nvPr/>
+        </p:nvSpPr>
+        <p:spPr>
+          <a:xfrm>
+            <a:off x="558800" y="4064000"/>
+            <a:ext cx="6985000" cy="635000"/>
+          </a:xfrm>
+          <a:prstGeom prst="rect">
+            <a:avLst/>
+          </a:prstGeom>
+          <a:noFill/>
+          <a:ln/>
+        </p:spPr>
+        <p:txBody>
+          <a:bodyPr wrap="square" lIns="0" tIns="0" rIns="0" bIns="0" rtlCol="0" anchor="t"/>
+          <a:lstStyle/>
+          <a:p>
+            <a:pPr algn="l" indent="0" marL="0">
+              <a:lnSpc>
+                <a:spcPct val="140000"/>
               </a:lnSpc>
               <a:buNone/>
             </a:pPr>
             <a:r>
               <a:rPr lang="en-US" sz="1700" dirty="0">
                 <a:solidFill>
-                  <a:srgbClr val="A87A2E"/>
-                </a:solidFill>
-                <a:latin typeface="IBM Plex Mono" pitchFamily="34" charset="0"/>
-                <a:ea typeface="IBM Plex Mono" pitchFamily="34" charset="-122"/>
-                <a:cs typeface="IBM Plex Mono" pitchFamily="34" charset="-120"/>
-              </a:rPr>
-              <a:t>01</a:t>
-            </a:r>
-            <a:endParaRPr lang="en-US" sz="1700" dirty="0"/>
-          </a:p>
-        </p:txBody>
-      </p:sp>
-      <p:sp>
-        <p:nvSpPr>
-          <p:cNvPr id="8" name="Text 6"/>
-          <p:cNvSpPr/>
-          <p:nvPr/>
-        </p:nvSpPr>
-        <p:spPr>
-          <a:xfrm>
-            <a:off x="1003300" y="1498600"/>
-            <a:ext cx="9461500" cy="447040"/>
-          </a:xfrm>
-          <a:prstGeom prst="rect">
-            <a:avLst/>
-          </a:prstGeom>
-          <a:noFill/>
-          <a:ln/>
-        </p:spPr>
-        <p:txBody>
-          <a:bodyPr wrap="square" lIns="0" tIns="0" rIns="0" bIns="0" rtlCol="0" anchor="t"/>
-          <a:lstStyle/>
-          <a:p>
-            <a:pPr algn="l" indent="0" marL="0">
-              <a:lnSpc>
-                <a:spcPct val="140000"/>
-              </a:lnSpc>
-              <a:buNone/>
-            </a:pPr>
-            <a:r>
-              <a:rPr lang="en-US" sz="1800" dirty="0">
-                <a:solidFill>
-                  <a:srgbClr val="332F2A"/>
+                  <a:srgbClr val="77726A"/>
                 </a:solidFill>
                 <a:latin typeface="Libre Franklin" pitchFamily="34" charset="0"/>
                 <a:ea typeface="Libre Franklin" pitchFamily="34" charset="-122"/>
                 <a:cs typeface="Libre Franklin" pitchFamily="34" charset="-120"/>
               </a:rPr>
-              <a:t>A model is an adapter between language and data, not the application.</a:t>
-            </a:r>
-            <a:endParaRPr lang="en-US" sz="1800" dirty="0"/>
-          </a:p>
-        </p:txBody>
-      </p:sp>
-      <p:sp>
-        <p:nvSpPr>
-          <p:cNvPr id="9" name="Text 7"/>
-          <p:cNvSpPr/>
-          <p:nvPr/>
-        </p:nvSpPr>
-        <p:spPr>
-          <a:xfrm>
-            <a:off x="558800" y="2110740"/>
-            <a:ext cx="444500" cy="317500"/>
-          </a:xfrm>
-          <a:prstGeom prst="rect">
-            <a:avLst/>
-          </a:prstGeom>
-          <a:noFill/>
-          <a:ln/>
-        </p:spPr>
-        <p:txBody>
-          <a:bodyPr wrap="square" lIns="0" tIns="0" rIns="0" bIns="0" rtlCol="0" anchor="t"/>
-          <a:lstStyle/>
-          <a:p>
-            <a:pPr algn="l" indent="0" marL="0">
-              <a:lnSpc>
-                <a:spcPct val="145000"/>
-              </a:lnSpc>
-              <a:buNone/>
-            </a:pPr>
-            <a:r>
-              <a:rPr lang="en-US" sz="1700" dirty="0">
-                <a:solidFill>
-                  <a:srgbClr val="A87A2E"/>
-                </a:solidFill>
-                <a:latin typeface="IBM Plex Mono" pitchFamily="34" charset="0"/>
-                <a:ea typeface="IBM Plex Mono" pitchFamily="34" charset="-122"/>
-                <a:cs typeface="IBM Plex Mono" pitchFamily="34" charset="-120"/>
-              </a:rPr>
-              <a:t>02</a:t>
+              <a:t>Two rounds. Half of you present, half of you walk around and score. Then swap.</a:t>
             </a:r>
             <a:endParaRPr lang="en-US" sz="1700" dirty="0"/>
-          </a:p>
-        </p:txBody>
-      </p:sp>
-      <p:sp>
-        <p:nvSpPr>
-          <p:cNvPr id="10" name="Text 8"/>
-          <p:cNvSpPr/>
-          <p:nvPr/>
-        </p:nvSpPr>
-        <p:spPr>
-          <a:xfrm>
-            <a:off x="1003300" y="2098040"/>
-            <a:ext cx="9461500" cy="447040"/>
-          </a:xfrm>
-          <a:prstGeom prst="rect">
-            <a:avLst/>
-          </a:prstGeom>
-          <a:noFill/>
-          <a:ln/>
-        </p:spPr>
-        <p:txBody>
-          <a:bodyPr wrap="square" lIns="0" tIns="0" rIns="0" bIns="0" rtlCol="0" anchor="t"/>
-          <a:lstStyle/>
-          <a:p>
-            <a:pPr algn="l" indent="0" marL="0">
-              <a:lnSpc>
-                <a:spcPct val="140000"/>
-              </a:lnSpc>
-              <a:buNone/>
-            </a:pPr>
-            <a:r>
-              <a:rPr lang="en-US" sz="1800" dirty="0">
-                <a:solidFill>
-                  <a:srgbClr val="332F2A"/>
-                </a:solidFill>
-                <a:latin typeface="Libre Franklin" pitchFamily="34" charset="0"/>
-                <a:ea typeface="Libre Franklin" pitchFamily="34" charset="-122"/>
-                <a:cs typeface="Libre Franklin" pitchFamily="34" charset="-120"/>
-              </a:rPr>
-              <a:t>A prompt is source code: role, vocabulary, format, defaults, escalation.</a:t>
-            </a:r>
-            <a:endParaRPr lang="en-US" sz="1800" dirty="0"/>
-          </a:p>
-        </p:txBody>
-      </p:sp>
-      <p:sp>
-        <p:nvSpPr>
-          <p:cNvPr id="11" name="Text 9"/>
-          <p:cNvSpPr/>
-          <p:nvPr/>
-        </p:nvSpPr>
-        <p:spPr>
-          <a:xfrm>
-            <a:off x="558800" y="2710180"/>
-            <a:ext cx="444500" cy="317500"/>
-          </a:xfrm>
-          <a:prstGeom prst="rect">
-            <a:avLst/>
-          </a:prstGeom>
-          <a:noFill/>
-          <a:ln/>
-        </p:spPr>
-        <p:txBody>
-          <a:bodyPr wrap="square" lIns="0" tIns="0" rIns="0" bIns="0" rtlCol="0" anchor="t"/>
-          <a:lstStyle/>
-          <a:p>
-            <a:pPr algn="l" indent="0" marL="0">
-              <a:lnSpc>
-                <a:spcPct val="145000"/>
-              </a:lnSpc>
-              <a:buNone/>
-            </a:pPr>
-            <a:r>
-              <a:rPr lang="en-US" sz="1700" dirty="0">
-                <a:solidFill>
-                  <a:srgbClr val="A87A2E"/>
-                </a:solidFill>
-                <a:latin typeface="IBM Plex Mono" pitchFamily="34" charset="0"/>
-                <a:ea typeface="IBM Plex Mono" pitchFamily="34" charset="-122"/>
-                <a:cs typeface="IBM Plex Mono" pitchFamily="34" charset="-120"/>
-              </a:rPr>
-              <a:t>03</a:t>
-            </a:r>
-            <a:endParaRPr lang="en-US" sz="1700" dirty="0"/>
-          </a:p>
-        </p:txBody>
-      </p:sp>
-      <p:sp>
-        <p:nvSpPr>
-          <p:cNvPr id="12" name="Text 10"/>
-          <p:cNvSpPr/>
-          <p:nvPr/>
-        </p:nvSpPr>
-        <p:spPr>
-          <a:xfrm>
-            <a:off x="1003300" y="2697480"/>
-            <a:ext cx="9461500" cy="447040"/>
-          </a:xfrm>
-          <a:prstGeom prst="rect">
-            <a:avLst/>
-          </a:prstGeom>
-          <a:noFill/>
-          <a:ln/>
-        </p:spPr>
-        <p:txBody>
-          <a:bodyPr wrap="square" lIns="0" tIns="0" rIns="0" bIns="0" rtlCol="0" anchor="t"/>
-          <a:lstStyle/>
-          <a:p>
-            <a:pPr algn="l" indent="0" marL="0">
-              <a:lnSpc>
-                <a:spcPct val="140000"/>
-              </a:lnSpc>
-              <a:buNone/>
-            </a:pPr>
-            <a:r>
-              <a:rPr lang="en-US" sz="1800" dirty="0">
-                <a:solidFill>
-                  <a:srgbClr val="332F2A"/>
-                </a:solidFill>
-                <a:latin typeface="Libre Franklin" pitchFamily="34" charset="0"/>
-                <a:ea typeface="Libre Franklin" pitchFamily="34" charset="-122"/>
-                <a:cs typeface="Libre Franklin" pitchFamily="34" charset="-120"/>
-              </a:rPr>
-              <a:t>A prompt you cannot score is a prompt you cannot improve.</a:t>
-            </a:r>
-            <a:endParaRPr lang="en-US" sz="1800" dirty="0"/>
           </a:p>
         </p:txBody>
       </p:sp>
@@ -8666,9 +9385,481 @@
 </p:sld>
 </file>
 
-<file path=ppt/slides/slide22.xml><?xml version="1.0" encoding="utf-8"?>
+<file path=ppt/slides/slide23.xml><?xml version="1.0" encoding="utf-8"?>
 <p:sld xmlns:a="http://schemas.openxmlformats.org/drawingml/2006/main" xmlns:r="http://schemas.openxmlformats.org/officeDocument/2006/relationships" xmlns:p="http://schemas.openxmlformats.org/presentationml/2006/main">
-  <p:cSld name="Slide 22">
+  <p:cSld name="Slide 23">
+    <p:bg>
+      <p:bgPr>
+        <a:solidFill>
+          <a:srgbClr val="F5F2EC"/>
+        </a:solidFill>
+      </p:bgPr>
+    </p:bg>
+    <p:spTree>
+      <p:nvGrpSpPr>
+        <p:cNvPr id="1" name=""/>
+        <p:cNvGrpSpPr/>
+        <p:nvPr/>
+      </p:nvGrpSpPr>
+      <p:grpSpPr>
+        <a:xfrm>
+          <a:off x="0" y="0"/>
+          <a:ext cx="0" cy="0"/>
+          <a:chOff x="0" y="0"/>
+          <a:chExt cx="0" cy="0"/>
+        </a:xfrm>
+      </p:grpSpPr>
+      <p:sp>
+        <p:nvSpPr>
+          <p:cNvPr id="2" name="Text 0"/>
+          <p:cNvSpPr/>
+          <p:nvPr/>
+        </p:nvSpPr>
+        <p:spPr>
+          <a:xfrm>
+            <a:off x="558800" y="355600"/>
+            <a:ext cx="11074400" cy="215900"/>
+          </a:xfrm>
+          <a:prstGeom prst="rect">
+            <a:avLst/>
+          </a:prstGeom>
+          <a:noFill/>
+          <a:ln/>
+        </p:spPr>
+        <p:txBody>
+          <a:bodyPr wrap="square" lIns="0" tIns="0" rIns="0" bIns="0" rtlCol="0" anchor="t"/>
+          <a:lstStyle/>
+          <a:p>
+            <a:pPr algn="l" indent="0" marL="0">
+              <a:lnSpc>
+                <a:spcPct val="145000"/>
+              </a:lnSpc>
+              <a:buNone/>
+            </a:pPr>
+            <a:r>
+              <a:rPr lang="en-US" sz="1200" spc="168" kern="0" dirty="0">
+                <a:solidFill>
+                  <a:srgbClr val="77726A"/>
+                </a:solidFill>
+                <a:latin typeface="IBM Plex Mono" pitchFamily="34" charset="0"/>
+                <a:ea typeface="IBM Plex Mono" pitchFamily="34" charset="-122"/>
+                <a:cs typeface="IBM Plex Mono" pitchFamily="34" charset="-120"/>
+              </a:rPr>
+              <a:t>SESSION 03</a:t>
+            </a:r>
+            <a:endParaRPr lang="en-US" sz="1200" dirty="0"/>
+          </a:p>
+        </p:txBody>
+      </p:sp>
+      <p:sp>
+        <p:nvSpPr>
+          <p:cNvPr id="3" name="Text 1"/>
+          <p:cNvSpPr/>
+          <p:nvPr/>
+        </p:nvSpPr>
+        <p:spPr>
+          <a:xfrm>
+            <a:off x="558800" y="635000"/>
+            <a:ext cx="11074400" cy="508000"/>
+          </a:xfrm>
+          <a:prstGeom prst="rect">
+            <a:avLst/>
+          </a:prstGeom>
+          <a:noFill/>
+          <a:ln/>
+        </p:spPr>
+        <p:txBody>
+          <a:bodyPr wrap="square" lIns="0" tIns="0" rIns="0" bIns="0" rtlCol="0" anchor="t"/>
+          <a:lstStyle/>
+          <a:p>
+            <a:pPr algn="l" indent="0" marL="0">
+              <a:lnSpc>
+                <a:spcPct val="110000"/>
+              </a:lnSpc>
+              <a:buNone/>
+            </a:pPr>
+            <a:r>
+              <a:rPr lang="en-US" sz="2800" b="1" dirty="0">
+                <a:solidFill>
+                  <a:srgbClr val="332F2A"/>
+                </a:solidFill>
+                <a:latin typeface="Libre Franklin" pitchFamily="34" charset="0"/>
+                <a:ea typeface="Libre Franklin" pitchFamily="34" charset="-122"/>
+                <a:cs typeface="Libre Franklin" pitchFamily="34" charset="-120"/>
+              </a:rPr>
+              <a:t>What to take away</a:t>
+            </a:r>
+            <a:endParaRPr lang="en-US" sz="2800" dirty="0"/>
+          </a:p>
+        </p:txBody>
+      </p:sp>
+      <p:sp>
+        <p:nvSpPr>
+          <p:cNvPr id="4" name="Shape 2"/>
+          <p:cNvSpPr/>
+          <p:nvPr/>
+        </p:nvSpPr>
+        <p:spPr>
+          <a:xfrm>
+            <a:off x="558800" y="1181100"/>
+            <a:ext cx="11074400" cy="6350"/>
+          </a:xfrm>
+          <a:prstGeom prst="rect">
+            <a:avLst/>
+          </a:prstGeom>
+          <a:solidFill>
+            <a:srgbClr val="E1DED7"/>
+          </a:solidFill>
+          <a:ln/>
+        </p:spPr>
+      </p:sp>
+      <p:sp>
+        <p:nvSpPr>
+          <p:cNvPr id="5" name="Text 3"/>
+          <p:cNvSpPr/>
+          <p:nvPr/>
+        </p:nvSpPr>
+        <p:spPr>
+          <a:xfrm>
+            <a:off x="558800" y="6337300"/>
+            <a:ext cx="9804400" cy="215900"/>
+          </a:xfrm>
+          <a:prstGeom prst="rect">
+            <a:avLst/>
+          </a:prstGeom>
+          <a:noFill/>
+          <a:ln/>
+        </p:spPr>
+        <p:txBody>
+          <a:bodyPr wrap="square" lIns="0" tIns="0" rIns="0" bIns="0" rtlCol="0" anchor="t"/>
+          <a:lstStyle/>
+          <a:p>
+            <a:pPr algn="l" indent="0" marL="0">
+              <a:lnSpc>
+                <a:spcPct val="145000"/>
+              </a:lnSpc>
+              <a:buNone/>
+            </a:pPr>
+            <a:r>
+              <a:rPr lang="en-US" sz="1200" dirty="0">
+                <a:solidFill>
+                  <a:srgbClr val="99948B"/>
+                </a:solidFill>
+                <a:latin typeface="IBM Plex Mono" pitchFamily="34" charset="0"/>
+                <a:ea typeface="IBM Plex Mono" pitchFamily="34" charset="-122"/>
+                <a:cs typeface="IBM Plex Mono" pitchFamily="34" charset="-120"/>
+              </a:rPr>
+              <a:t>AI for Software Development · Session 3</a:t>
+            </a:r>
+            <a:endParaRPr lang="en-US" sz="1200" dirty="0"/>
+          </a:p>
+        </p:txBody>
+      </p:sp>
+      <p:sp>
+        <p:nvSpPr>
+          <p:cNvPr id="6" name="Text 4"/>
+          <p:cNvSpPr/>
+          <p:nvPr/>
+        </p:nvSpPr>
+        <p:spPr>
+          <a:xfrm>
+            <a:off x="10363200" y="6337300"/>
+            <a:ext cx="1270000" cy="215900"/>
+          </a:xfrm>
+          <a:prstGeom prst="rect">
+            <a:avLst/>
+          </a:prstGeom>
+          <a:noFill/>
+          <a:ln/>
+        </p:spPr>
+        <p:txBody>
+          <a:bodyPr wrap="square" lIns="0" tIns="0" rIns="0" bIns="0" rtlCol="0" anchor="t"/>
+          <a:lstStyle/>
+          <a:p>
+            <a:pPr algn="r" indent="0" marL="0">
+              <a:lnSpc>
+                <a:spcPct val="145000"/>
+              </a:lnSpc>
+              <a:buNone/>
+            </a:pPr>
+            <a:r>
+              <a:rPr lang="en-US" sz="1200" dirty="0">
+                <a:solidFill>
+                  <a:srgbClr val="99948B"/>
+                </a:solidFill>
+                <a:latin typeface="IBM Plex Mono" pitchFamily="34" charset="0"/>
+                <a:ea typeface="IBM Plex Mono" pitchFamily="34" charset="-122"/>
+                <a:cs typeface="IBM Plex Mono" pitchFamily="34" charset="-120"/>
+              </a:rPr>
+              <a:t>23</a:t>
+            </a:r>
+            <a:endParaRPr lang="en-US" sz="1200" dirty="0"/>
+          </a:p>
+        </p:txBody>
+      </p:sp>
+      <p:sp>
+        <p:nvSpPr>
+          <p:cNvPr id="7" name="Text 5"/>
+          <p:cNvSpPr/>
+          <p:nvPr/>
+        </p:nvSpPr>
+        <p:spPr>
+          <a:xfrm>
+            <a:off x="558800" y="1511300"/>
+            <a:ext cx="444500" cy="317500"/>
+          </a:xfrm>
+          <a:prstGeom prst="rect">
+            <a:avLst/>
+          </a:prstGeom>
+          <a:noFill/>
+          <a:ln/>
+        </p:spPr>
+        <p:txBody>
+          <a:bodyPr wrap="square" lIns="0" tIns="0" rIns="0" bIns="0" rtlCol="0" anchor="t"/>
+          <a:lstStyle/>
+          <a:p>
+            <a:pPr algn="l" indent="0" marL="0">
+              <a:lnSpc>
+                <a:spcPct val="145000"/>
+              </a:lnSpc>
+              <a:buNone/>
+            </a:pPr>
+            <a:r>
+              <a:rPr lang="en-US" sz="1700" dirty="0">
+                <a:solidFill>
+                  <a:srgbClr val="A87A2E"/>
+                </a:solidFill>
+                <a:latin typeface="IBM Plex Mono" pitchFamily="34" charset="0"/>
+                <a:ea typeface="IBM Plex Mono" pitchFamily="34" charset="-122"/>
+                <a:cs typeface="IBM Plex Mono" pitchFamily="34" charset="-120"/>
+              </a:rPr>
+              <a:t>01</a:t>
+            </a:r>
+            <a:endParaRPr lang="en-US" sz="1700" dirty="0"/>
+          </a:p>
+        </p:txBody>
+      </p:sp>
+      <p:sp>
+        <p:nvSpPr>
+          <p:cNvPr id="8" name="Text 6"/>
+          <p:cNvSpPr/>
+          <p:nvPr/>
+        </p:nvSpPr>
+        <p:spPr>
+          <a:xfrm>
+            <a:off x="1003300" y="1498600"/>
+            <a:ext cx="9461500" cy="447040"/>
+          </a:xfrm>
+          <a:prstGeom prst="rect">
+            <a:avLst/>
+          </a:prstGeom>
+          <a:noFill/>
+          <a:ln/>
+        </p:spPr>
+        <p:txBody>
+          <a:bodyPr wrap="square" lIns="0" tIns="0" rIns="0" bIns="0" rtlCol="0" anchor="t"/>
+          <a:lstStyle/>
+          <a:p>
+            <a:pPr algn="l" indent="0" marL="0">
+              <a:lnSpc>
+                <a:spcPct val="140000"/>
+              </a:lnSpc>
+              <a:buNone/>
+            </a:pPr>
+            <a:r>
+              <a:rPr lang="en-US" sz="1800" dirty="0">
+                <a:solidFill>
+                  <a:srgbClr val="332F2A"/>
+                </a:solidFill>
+                <a:latin typeface="Libre Franklin" pitchFamily="34" charset="0"/>
+                <a:ea typeface="Libre Franklin" pitchFamily="34" charset="-122"/>
+                <a:cs typeface="Libre Franklin" pitchFamily="34" charset="-120"/>
+              </a:rPr>
+              <a:t>A model is an adapter between language and data, not the application.</a:t>
+            </a:r>
+            <a:endParaRPr lang="en-US" sz="1800" dirty="0"/>
+          </a:p>
+        </p:txBody>
+      </p:sp>
+      <p:sp>
+        <p:nvSpPr>
+          <p:cNvPr id="9" name="Text 7"/>
+          <p:cNvSpPr/>
+          <p:nvPr/>
+        </p:nvSpPr>
+        <p:spPr>
+          <a:xfrm>
+            <a:off x="558800" y="2110740"/>
+            <a:ext cx="444500" cy="317500"/>
+          </a:xfrm>
+          <a:prstGeom prst="rect">
+            <a:avLst/>
+          </a:prstGeom>
+          <a:noFill/>
+          <a:ln/>
+        </p:spPr>
+        <p:txBody>
+          <a:bodyPr wrap="square" lIns="0" tIns="0" rIns="0" bIns="0" rtlCol="0" anchor="t"/>
+          <a:lstStyle/>
+          <a:p>
+            <a:pPr algn="l" indent="0" marL="0">
+              <a:lnSpc>
+                <a:spcPct val="145000"/>
+              </a:lnSpc>
+              <a:buNone/>
+            </a:pPr>
+            <a:r>
+              <a:rPr lang="en-US" sz="1700" dirty="0">
+                <a:solidFill>
+                  <a:srgbClr val="A87A2E"/>
+                </a:solidFill>
+                <a:latin typeface="IBM Plex Mono" pitchFamily="34" charset="0"/>
+                <a:ea typeface="IBM Plex Mono" pitchFamily="34" charset="-122"/>
+                <a:cs typeface="IBM Plex Mono" pitchFamily="34" charset="-120"/>
+              </a:rPr>
+              <a:t>02</a:t>
+            </a:r>
+            <a:endParaRPr lang="en-US" sz="1700" dirty="0"/>
+          </a:p>
+        </p:txBody>
+      </p:sp>
+      <p:sp>
+        <p:nvSpPr>
+          <p:cNvPr id="10" name="Text 8"/>
+          <p:cNvSpPr/>
+          <p:nvPr/>
+        </p:nvSpPr>
+        <p:spPr>
+          <a:xfrm>
+            <a:off x="1003300" y="2098040"/>
+            <a:ext cx="9461500" cy="447040"/>
+          </a:xfrm>
+          <a:prstGeom prst="rect">
+            <a:avLst/>
+          </a:prstGeom>
+          <a:noFill/>
+          <a:ln/>
+        </p:spPr>
+        <p:txBody>
+          <a:bodyPr wrap="square" lIns="0" tIns="0" rIns="0" bIns="0" rtlCol="0" anchor="t"/>
+          <a:lstStyle/>
+          <a:p>
+            <a:pPr algn="l" indent="0" marL="0">
+              <a:lnSpc>
+                <a:spcPct val="140000"/>
+              </a:lnSpc>
+              <a:buNone/>
+            </a:pPr>
+            <a:r>
+              <a:rPr lang="en-US" sz="1800" dirty="0">
+                <a:solidFill>
+                  <a:srgbClr val="332F2A"/>
+                </a:solidFill>
+                <a:latin typeface="Libre Franklin" pitchFamily="34" charset="0"/>
+                <a:ea typeface="Libre Franklin" pitchFamily="34" charset="-122"/>
+                <a:cs typeface="Libre Franklin" pitchFamily="34" charset="-120"/>
+              </a:rPr>
+              <a:t>A prompt is source code: role, vocabulary, format, defaults, escalation.</a:t>
+            </a:r>
+            <a:endParaRPr lang="en-US" sz="1800" dirty="0"/>
+          </a:p>
+        </p:txBody>
+      </p:sp>
+      <p:sp>
+        <p:nvSpPr>
+          <p:cNvPr id="11" name="Text 9"/>
+          <p:cNvSpPr/>
+          <p:nvPr/>
+        </p:nvSpPr>
+        <p:spPr>
+          <a:xfrm>
+            <a:off x="558800" y="2710180"/>
+            <a:ext cx="444500" cy="317500"/>
+          </a:xfrm>
+          <a:prstGeom prst="rect">
+            <a:avLst/>
+          </a:prstGeom>
+          <a:noFill/>
+          <a:ln/>
+        </p:spPr>
+        <p:txBody>
+          <a:bodyPr wrap="square" lIns="0" tIns="0" rIns="0" bIns="0" rtlCol="0" anchor="t"/>
+          <a:lstStyle/>
+          <a:p>
+            <a:pPr algn="l" indent="0" marL="0">
+              <a:lnSpc>
+                <a:spcPct val="145000"/>
+              </a:lnSpc>
+              <a:buNone/>
+            </a:pPr>
+            <a:r>
+              <a:rPr lang="en-US" sz="1700" dirty="0">
+                <a:solidFill>
+                  <a:srgbClr val="A87A2E"/>
+                </a:solidFill>
+                <a:latin typeface="IBM Plex Mono" pitchFamily="34" charset="0"/>
+                <a:ea typeface="IBM Plex Mono" pitchFamily="34" charset="-122"/>
+                <a:cs typeface="IBM Plex Mono" pitchFamily="34" charset="-120"/>
+              </a:rPr>
+              <a:t>03</a:t>
+            </a:r>
+            <a:endParaRPr lang="en-US" sz="1700" dirty="0"/>
+          </a:p>
+        </p:txBody>
+      </p:sp>
+      <p:sp>
+        <p:nvSpPr>
+          <p:cNvPr id="12" name="Text 10"/>
+          <p:cNvSpPr/>
+          <p:nvPr/>
+        </p:nvSpPr>
+        <p:spPr>
+          <a:xfrm>
+            <a:off x="1003300" y="2697480"/>
+            <a:ext cx="9461500" cy="447040"/>
+          </a:xfrm>
+          <a:prstGeom prst="rect">
+            <a:avLst/>
+          </a:prstGeom>
+          <a:noFill/>
+          <a:ln/>
+        </p:spPr>
+        <p:txBody>
+          <a:bodyPr wrap="square" lIns="0" tIns="0" rIns="0" bIns="0" rtlCol="0" anchor="t"/>
+          <a:lstStyle/>
+          <a:p>
+            <a:pPr algn="l" indent="0" marL="0">
+              <a:lnSpc>
+                <a:spcPct val="140000"/>
+              </a:lnSpc>
+              <a:buNone/>
+            </a:pPr>
+            <a:r>
+              <a:rPr lang="en-US" sz="1800" dirty="0">
+                <a:solidFill>
+                  <a:srgbClr val="332F2A"/>
+                </a:solidFill>
+                <a:latin typeface="Libre Franklin" pitchFamily="34" charset="0"/>
+                <a:ea typeface="Libre Franklin" pitchFamily="34" charset="-122"/>
+                <a:cs typeface="Libre Franklin" pitchFamily="34" charset="-120"/>
+              </a:rPr>
+              <a:t>A prompt you cannot score is a prompt you cannot improve.</a:t>
+            </a:r>
+            <a:endParaRPr lang="en-US" sz="1800" dirty="0"/>
+          </a:p>
+        </p:txBody>
+      </p:sp>
+    </p:spTree>
+  </p:cSld>
+  <p:clrMapOvr>
+    <a:masterClrMapping/>
+  </p:clrMapOvr>
+</p:sld>
+</file>
+
+<file path=ppt/slides/slide24.xml><?xml version="1.0" encoding="utf-8"?>
+<p:sld xmlns:a="http://schemas.openxmlformats.org/drawingml/2006/main" xmlns:r="http://schemas.openxmlformats.org/officeDocument/2006/relationships" xmlns:p="http://schemas.openxmlformats.org/presentationml/2006/main">
+  <p:cSld name="Slide 24">
     <p:bg>
       <p:bgPr>
         <a:solidFill>
@@ -8783,7 +9974,7 @@
         <p:spPr>
           <a:xfrm>
             <a:off x="6350000" y="3556000"/>
-            <a:ext cx="5283200" cy="381000"/>
+            <a:ext cx="5283200" cy="690880"/>
           </a:xfrm>
           <a:prstGeom prst="rect">
             <a:avLst/>
@@ -8824,8 +10015,8 @@
         </p:nvSpPr>
         <p:spPr>
           <a:xfrm>
-            <a:off x="6350000" y="3975100"/>
-            <a:ext cx="5283200" cy="381000"/>
+            <a:off x="6350000" y="4272280"/>
+            <a:ext cx="5283200" cy="690880"/>
           </a:xfrm>
           <a:prstGeom prst="rect">
             <a:avLst/>
@@ -8866,7 +10057,7 @@
         </p:nvSpPr>
         <p:spPr>
           <a:xfrm>
-            <a:off x="6350000" y="4508500"/>
+            <a:off x="6350000" y="5102860"/>
             <a:ext cx="5283200" cy="254000"/>
           </a:xfrm>
           <a:prstGeom prst="rect">
@@ -8998,7 +10189,7 @@
                 <a:ea typeface="IBM Plex Mono" pitchFamily="34" charset="-122"/>
                 <a:cs typeface="IBM Plex Mono" pitchFamily="34" charset="-120"/>
               </a:rPr>
-              <a:t>22</a:t>
+              <a:t>24</a:t>
             </a:r>
             <a:endParaRPr lang="en-US" sz="1200" dirty="0"/>
           </a:p>

--- a/slides/Session 3 - Put a Model Inside It.pptx
+++ b/slides/Session 3 - Put a Model Inside It.pptx
@@ -6488,7 +6488,7 @@
                 <a:ea typeface="IBM Plex Mono" pitchFamily="34" charset="-122"/>
                 <a:cs typeface="IBM Plex Mono" pitchFamily="34" charset="-120"/>
               </a:rPr>
-              <a:t>Fig. 11 — the loop that actually improves prompts</a:t>
+              <a:t>Fig. 13 — the loop that actually improves prompts</a:t>
             </a:r>
             <a:endParaRPr lang="en-US" sz="1200" dirty="0"/>
           </a:p>
@@ -10716,7 +10716,7 @@
                 <a:ea typeface="IBM Plex Mono" pitchFamily="34" charset="-122"/>
                 <a:cs typeface="IBM Plex Mono" pitchFamily="34" charset="-120"/>
               </a:rPr>
-              <a:t>Fig. 9 — an adapter, not an oracle</a:t>
+              <a:t>Fig. 10 — an adapter, not an oracle</a:t>
             </a:r>
             <a:endParaRPr lang="en-US" sz="1200" dirty="0"/>
           </a:p>
@@ -12944,7 +12944,7 @@
                 <a:ea typeface="IBM Plex Mono" pitchFamily="34" charset="-122"/>
                 <a:cs typeface="IBM Plex Mono" pitchFamily="34" charset="-120"/>
               </a:rPr>
-              <a:t>Fig. 10 — the same prompt, labelled</a:t>
+              <a:t>Fig. 11 — the same prompt, labelled</a:t>
             </a:r>
             <a:endParaRPr lang="en-US" sz="1200" dirty="0"/>
           </a:p>

--- a/slides/Session 3 - Put a Model Inside It.pptx
+++ b/slides/Session 3 - Put a Model Inside It.pptx
@@ -4921,7 +4921,7 @@
                 <a:ea typeface="IBM Plex Mono" pitchFamily="34" charset="-122"/>
                 <a:cs typeface="IBM Plex Mono" pitchFamily="34" charset="-120"/>
               </a:rPr>
-              <a:t>Fig. 12 — the rules parser on the real inbox, both axes at once</a:t>
+              <a:t>Fig. 13 — the rules parser on the real inbox, both axes at once</a:t>
             </a:r>
             <a:endParaRPr lang="en-US" sz="1200" dirty="0"/>
           </a:p>
@@ -6488,7 +6488,7 @@
                 <a:ea typeface="IBM Plex Mono" pitchFamily="34" charset="-122"/>
                 <a:cs typeface="IBM Plex Mono" pitchFamily="34" charset="-120"/>
               </a:rPr>
-              <a:t>Fig. 13 — the loop that actually improves prompts</a:t>
+              <a:t>Fig. 14 — the loop that actually improves prompts</a:t>
             </a:r>
             <a:endParaRPr lang="en-US" sz="1200" dirty="0"/>
           </a:p>
@@ -10716,7 +10716,7 @@
                 <a:ea typeface="IBM Plex Mono" pitchFamily="34" charset="-122"/>
                 <a:cs typeface="IBM Plex Mono" pitchFamily="34" charset="-120"/>
               </a:rPr>
-              <a:t>Fig. 10 — an adapter, not an oracle</a:t>
+              <a:t>Fig. 11 — an adapter, not an oracle</a:t>
             </a:r>
             <a:endParaRPr lang="en-US" sz="1200" dirty="0"/>
           </a:p>
@@ -12944,7 +12944,7 @@
                 <a:ea typeface="IBM Plex Mono" pitchFamily="34" charset="-122"/>
                 <a:cs typeface="IBM Plex Mono" pitchFamily="34" charset="-120"/>
               </a:rPr>
-              <a:t>Fig. 11 — the same prompt, labelled</a:t>
+              <a:t>Fig. 12 — the same prompt, labelled</a:t>
             </a:r>
             <a:endParaRPr lang="en-US" sz="1200" dirty="0"/>
           </a:p>
